--- a/products/dsim/presentations/dsim-internal-strategy-deck-2026-04-21-embedded.pptx
+++ b/products/dsim/presentations/dsim-internal-strategy-deck-2026-04-21-embedded.pptx
@@ -16,9 +16,10 @@
     <p:sldId id="264" r:id="rId10"/>
     <p:sldId id="265" r:id="rId11"/>
     <p:sldId id="266" r:id="rId12"/>
+    <p:sldId id="267" r:id="rId13"/>
   </p:sldIdLst>
   <p:notesMasterIdLst>
-    <p:notesMasterId r:id="rId13"/>
+    <p:notesMasterId r:id="rId14"/>
   </p:notesMasterIdLst>
   <p:sldSz cx="12192000" cy="6858000"/>
   <p:notesSz cx="6858000" cy="12192000"/>
@@ -1023,6 +1024,94 @@
 </p:notes>
 </file>
 
+<file path=ppt/notesSlides/notesSlide12.xml><?xml version="1.0" encoding="utf-8"?>
+<p:notes xmlns:a="http://schemas.openxmlformats.org/drawingml/2006/main" xmlns:r="http://schemas.openxmlformats.org/officeDocument/2006/relationships" xmlns:p="http://schemas.openxmlformats.org/presentationml/2006/main">
+  <p:cSld>
+    <p:spTree>
+      <p:nvGrpSpPr>
+        <p:cNvPr id="1" name=""/>
+        <p:cNvGrpSpPr/>
+        <p:nvPr/>
+      </p:nvGrpSpPr>
+      <p:grpSpPr>
+        <a:xfrm>
+          <a:off x="0" y="0"/>
+          <a:ext cx="0" cy="0"/>
+          <a:chOff x="0" y="0"/>
+          <a:chExt cx="0" cy="0"/>
+        </a:xfrm>
+      </p:grpSpPr>
+      <p:sp>
+        <p:nvSpPr>
+          <p:cNvPr id="2" name="Slide Image Placeholder 1"/>
+          <p:cNvSpPr>
+            <a:spLocks noGrp="1" noRot="1" noChangeAspect="1"/>
+          </p:cNvSpPr>
+          <p:nvPr>
+            <p:ph type="sldImg"/>
+          </p:nvPr>
+        </p:nvSpPr>
+        <p:spPr/>
+      </p:sp>
+      <p:sp>
+        <p:nvSpPr>
+          <p:cNvPr id="3" name="Notes Placeholder 2"/>
+          <p:cNvSpPr>
+            <a:spLocks noGrp="1"/>
+          </p:cNvSpPr>
+          <p:nvPr>
+            <p:ph type="body" idx="1"/>
+          </p:nvPr>
+        </p:nvSpPr>
+        <p:spPr/>
+        <p:txBody>
+          <a:bodyPr/>
+          <a:lstStyle/>
+          <a:p>
+            <a:r>
+              <a:rPr lang="en-US" dirty="0"/>
+              <a:t/>
+            </a:r>
+            <a:endParaRPr lang="en-US" dirty="0"/>
+          </a:p>
+        </p:txBody>
+      </p:sp>
+      <p:sp>
+        <p:nvSpPr>
+          <p:cNvPr id="4" name="Slide Number Placeholder 3"/>
+          <p:cNvSpPr>
+            <a:spLocks noGrp="1"/>
+          </p:cNvSpPr>
+          <p:nvPr>
+            <p:ph type="sldNum" sz="quarter" idx="10"/>
+          </p:nvPr>
+        </p:nvSpPr>
+        <p:spPr/>
+        <p:txBody>
+          <a:bodyPr/>
+          <a:lstStyle/>
+          <a:p>
+            <a:fld id="{F7021451-1387-4CA6-816F-3879F97B5CBC}" type="slidenum">
+              <a:rPr lang="en-US"/>
+              <a:t>12</a:t>
+            </a:fld>
+            <a:endParaRPr lang="en-US"/>
+          </a:p>
+        </p:txBody>
+      </p:sp>
+    </p:spTree>
+    <p:extLst>
+      <p:ext uri="{BB962C8B-B14F-4D97-AF65-F5344CB8AC3E}">
+        <p14:creationId xmlns:p14="http://schemas.microsoft.com/office/powerpoint/2010/main" val="1024086991"/>
+      </p:ext>
+    </p:extLst>
+  </p:cSld>
+  <p:clrMapOvr>
+    <a:masterClrMapping/>
+  </p:clrMapOvr>
+</p:notes>
+</file>
+
 <file path=ppt/notesSlides/notesSlide2.xml><?xml version="1.0" encoding="utf-8"?>
 <p:notes xmlns:a="http://schemas.openxmlformats.org/drawingml/2006/main" xmlns:r="http://schemas.openxmlformats.org/officeDocument/2006/relationships" xmlns:p="http://schemas.openxmlformats.org/presentationml/2006/main">
   <p:cSld>
@@ -2480,7 +2569,7 @@
                 <a:ea typeface="Calibri" pitchFamily="34" charset="-122"/>
                 <a:cs typeface="Calibri" pitchFamily="34" charset="-120"/>
               </a:rPr>
-              <a:t>Q2–Q3 2026 Key Result Areas</a:t>
+              <a:t>Risk Register &amp; Mitigations</a:t>
             </a:r>
             <a:endParaRPr lang="en-US" sz="2400" dirty="0"/>
           </a:p>
@@ -2515,7 +2604,7 @@
         <p:spPr>
           <a:xfrm>
             <a:off x="365760" y="1298448"/>
-            <a:ext cx="5623560" cy="2103120"/>
+            <a:ext cx="11430000" cy="1051560"/>
           </a:xfrm>
           <a:prstGeom prst="rect">
             <a:avLst/>
@@ -2542,13 +2631,13 @@
         <p:spPr>
           <a:xfrm>
             <a:off x="365760" y="1298448"/>
-            <a:ext cx="5623560" cy="73152"/>
-          </a:xfrm>
-          <a:prstGeom prst="rect">
-            <a:avLst/>
-          </a:prstGeom>
-          <a:solidFill>
-            <a:srgbClr val="1D8A5B"/>
+            <a:ext cx="73152" cy="1051560"/>
+          </a:xfrm>
+          <a:prstGeom prst="rect">
+            <a:avLst/>
+          </a:prstGeom>
+          <a:solidFill>
+            <a:srgbClr val="C0392B"/>
           </a:solidFill>
           <a:ln/>
         </p:spPr>
@@ -2561,47 +2650,106 @@
         </p:nvSpPr>
         <p:spPr>
           <a:xfrm>
-            <a:off x="594360" y="1435608"/>
-            <a:ext cx="5166360" cy="365760"/>
-          </a:xfrm>
-          <a:prstGeom prst="rect">
-            <a:avLst/>
-          </a:prstGeom>
-          <a:noFill/>
-          <a:ln/>
-        </p:spPr>
-        <p:txBody>
-          <a:bodyPr wrap="square" lIns="0" tIns="0" rIns="0" bIns="0" rtlCol="0" anchor="ctr"/>
-          <a:lstStyle/>
-          <a:p>
-            <a:pPr indent="0" marL="0">
-              <a:buNone/>
-            </a:pPr>
-            <a:r>
-              <a:rPr lang="en-US" sz="1300" b="1" dirty="0">
-                <a:solidFill>
-                  <a:srgbClr val="1D8A5B"/>
-                </a:solidFill>
-                <a:latin typeface="Calibri" pitchFamily="34" charset="0"/>
-                <a:ea typeface="Calibri" pitchFamily="34" charset="-122"/>
-                <a:cs typeface="Calibri" pitchFamily="34" charset="-120"/>
-              </a:rPr>
-              <a:t>Close Lactalis PoC</a:t>
-            </a:r>
-            <a:endParaRPr lang="en-US" sz="1300" dirty="0"/>
-          </a:p>
-        </p:txBody>
-      </p:sp>
-      <p:sp>
-        <p:nvSpPr>
-          <p:cNvPr id="8" name="Text 6"/>
-          <p:cNvSpPr/>
-          <p:nvPr/>
-        </p:nvSpPr>
-        <p:spPr>
-          <a:xfrm>
-            <a:off x="594360" y="1828800"/>
-            <a:ext cx="5166360" cy="548640"/>
+            <a:off x="594360" y="1344168"/>
+            <a:ext cx="3657600" cy="320040"/>
+          </a:xfrm>
+          <a:prstGeom prst="rect">
+            <a:avLst/>
+          </a:prstGeom>
+          <a:noFill/>
+          <a:ln/>
+        </p:spPr>
+        <p:txBody>
+          <a:bodyPr wrap="square" lIns="0" tIns="0" rIns="0" bIns="0" rtlCol="0" anchor="ctr"/>
+          <a:lstStyle/>
+          <a:p>
+            <a:pPr indent="0" marL="0">
+              <a:buNone/>
+            </a:pPr>
+            <a:r>
+              <a:rPr lang="en-US" sz="1200" b="1" dirty="0">
+                <a:solidFill>
+                  <a:srgbClr val="1A2B4A"/>
+                </a:solidFill>
+                <a:latin typeface="Calibri" pitchFamily="34" charset="0"/>
+                <a:ea typeface="Calibri" pitchFamily="34" charset="-122"/>
+                <a:cs typeface="Calibri" pitchFamily="34" charset="-120"/>
+              </a:rPr>
+              <a:t>Data Security / Privacy</a:t>
+            </a:r>
+            <a:endParaRPr lang="en-US" sz="1200" dirty="0"/>
+          </a:p>
+        </p:txBody>
+      </p:sp>
+      <p:sp>
+        <p:nvSpPr>
+          <p:cNvPr id="8" name="Shape 6"/>
+          <p:cNvSpPr/>
+          <p:nvPr/>
+        </p:nvSpPr>
+        <p:spPr>
+          <a:xfrm>
+            <a:off x="4480560" y="1371600"/>
+            <a:ext cx="1005840" cy="274320"/>
+          </a:xfrm>
+          <a:prstGeom prst="rect">
+            <a:avLst/>
+          </a:prstGeom>
+          <a:solidFill>
+            <a:srgbClr val="C0392B"/>
+          </a:solidFill>
+          <a:ln/>
+        </p:spPr>
+      </p:sp>
+      <p:sp>
+        <p:nvSpPr>
+          <p:cNvPr id="9" name="Text 7"/>
+          <p:cNvSpPr/>
+          <p:nvPr/>
+        </p:nvSpPr>
+        <p:spPr>
+          <a:xfrm>
+            <a:off x="4480560" y="1371600"/>
+            <a:ext cx="1005840" cy="274320"/>
+          </a:xfrm>
+          <a:prstGeom prst="rect">
+            <a:avLst/>
+          </a:prstGeom>
+          <a:noFill/>
+          <a:ln/>
+        </p:spPr>
+        <p:txBody>
+          <a:bodyPr wrap="square" lIns="0" tIns="0" rIns="0" bIns="0" rtlCol="0" anchor="ctr"/>
+          <a:lstStyle/>
+          <a:p>
+            <a:pPr algn="ctr" indent="0" marL="0">
+              <a:buNone/>
+            </a:pPr>
+            <a:r>
+              <a:rPr lang="en-US" sz="1000" b="1" dirty="0">
+                <a:solidFill>
+                  <a:srgbClr val="FFFFFF"/>
+                </a:solidFill>
+                <a:latin typeface="Calibri" pitchFamily="34" charset="0"/>
+                <a:ea typeface="Calibri" pitchFamily="34" charset="-122"/>
+                <a:cs typeface="Calibri" pitchFamily="34" charset="-120"/>
+              </a:rPr>
+              <a:t>HIGH</a:t>
+            </a:r>
+            <a:endParaRPr lang="en-US" sz="1000" dirty="0"/>
+          </a:p>
+        </p:txBody>
+      </p:sp>
+      <p:sp>
+        <p:nvSpPr>
+          <p:cNvPr id="10" name="Text 8"/>
+          <p:cNvSpPr/>
+          <p:nvPr/>
+        </p:nvSpPr>
+        <p:spPr>
+          <a:xfrm>
+            <a:off x="5669280" y="1344168"/>
+            <a:ext cx="6126480" cy="914400"/>
           </a:xfrm>
           <a:prstGeom prst="rect">
             <a:avLst/>
@@ -2619,13 +2767,13 @@
             <a:r>
               <a:rPr lang="en-US" sz="1100" dirty="0">
                 <a:solidFill>
-                  <a:srgbClr val="1A2B4A"/>
-                </a:solidFill>
-                <a:latin typeface="Calibri" pitchFamily="34" charset="0"/>
-                <a:ea typeface="Calibri" pitchFamily="34" charset="-122"/>
-                <a:cs typeface="Calibri" pitchFamily="34" charset="-120"/>
-              </a:rPr>
-              <a:t>Target: Validated model by June 30</a:t>
+                  <a:srgbClr val="4A5568"/>
+                </a:solidFill>
+                <a:latin typeface="Calibri" pitchFamily="34" charset="0"/>
+                <a:ea typeface="Calibri" pitchFamily="34" charset="-122"/>
+                <a:cs typeface="Calibri" pitchFamily="34" charset="-120"/>
+              </a:rPr>
+              <a:t>SOC 2 Type II certification; Walmart data governance review</a:t>
             </a:r>
             <a:endParaRPr lang="en-US" sz="1100" dirty="0"/>
           </a:p>
@@ -2633,53 +2781,14 @@
       </p:sp>
       <p:sp>
         <p:nvSpPr>
-          <p:cNvPr id="9" name="Text 7"/>
-          <p:cNvSpPr/>
-          <p:nvPr/>
-        </p:nvSpPr>
-        <p:spPr>
-          <a:xfrm>
-            <a:off x="594360" y="2468880"/>
-            <a:ext cx="5166360" cy="320040"/>
-          </a:xfrm>
-          <a:prstGeom prst="rect">
-            <a:avLst/>
-          </a:prstGeom>
-          <a:noFill/>
-          <a:ln/>
-        </p:spPr>
-        <p:txBody>
-          <a:bodyPr wrap="square" lIns="0" tIns="0" rIns="0" bIns="0" rtlCol="0" anchor="ctr"/>
-          <a:lstStyle/>
-          <a:p>
-            <a:pPr indent="0" marL="0">
-              <a:buNone/>
-            </a:pPr>
-            <a:r>
-              <a:rPr lang="en-US" sz="1000" i="1" dirty="0">
-                <a:solidFill>
-                  <a:srgbClr val="718096"/>
-                </a:solidFill>
-                <a:latin typeface="Calibri" pitchFamily="34" charset="0"/>
-                <a:ea typeface="Calibri" pitchFamily="34" charset="-122"/>
-                <a:cs typeface="Calibri" pitchFamily="34" charset="-120"/>
-              </a:rPr>
-              <a:t>Owner: Product + Eng</a:t>
-            </a:r>
-            <a:endParaRPr lang="en-US" sz="1000" dirty="0"/>
-          </a:p>
-        </p:txBody>
-      </p:sp>
-      <p:sp>
-        <p:nvSpPr>
-          <p:cNvPr id="10" name="Shape 8"/>
-          <p:cNvSpPr/>
-          <p:nvPr/>
-        </p:nvSpPr>
-        <p:spPr>
-          <a:xfrm>
-            <a:off x="6217920" y="1298448"/>
-            <a:ext cx="5623560" cy="2103120"/>
+          <p:cNvPr id="11" name="Shape 9"/>
+          <p:cNvSpPr/>
+          <p:nvPr/>
+        </p:nvSpPr>
+        <p:spPr>
+          <a:xfrm>
+            <a:off x="365760" y="2441448"/>
+            <a:ext cx="11430000" cy="1051560"/>
           </a:xfrm>
           <a:prstGeom prst="rect">
             <a:avLst/>
@@ -2699,62 +2808,23 @@
       </p:sp>
       <p:sp>
         <p:nvSpPr>
-          <p:cNvPr id="11" name="Shape 9"/>
-          <p:cNvSpPr/>
-          <p:nvPr/>
-        </p:nvSpPr>
-        <p:spPr>
-          <a:xfrm>
-            <a:off x="6217920" y="1298448"/>
-            <a:ext cx="5623560" cy="73152"/>
-          </a:xfrm>
-          <a:prstGeom prst="rect">
-            <a:avLst/>
-          </a:prstGeom>
-          <a:solidFill>
-            <a:srgbClr val="E8612C"/>
-          </a:solidFill>
-          <a:ln/>
-        </p:spPr>
-      </p:sp>
-      <p:sp>
-        <p:nvSpPr>
-          <p:cNvPr id="12" name="Text 10"/>
-          <p:cNvSpPr/>
-          <p:nvPr/>
-        </p:nvSpPr>
-        <p:spPr>
-          <a:xfrm>
-            <a:off x="6446520" y="1435608"/>
-            <a:ext cx="5166360" cy="365760"/>
-          </a:xfrm>
-          <a:prstGeom prst="rect">
-            <a:avLst/>
-          </a:prstGeom>
-          <a:noFill/>
-          <a:ln/>
-        </p:spPr>
-        <p:txBody>
-          <a:bodyPr wrap="square" lIns="0" tIns="0" rIns="0" bIns="0" rtlCol="0" anchor="ctr"/>
-          <a:lstStyle/>
-          <a:p>
-            <a:pPr indent="0" marL="0">
-              <a:buNone/>
-            </a:pPr>
-            <a:r>
-              <a:rPr lang="en-US" sz="1300" b="1" dirty="0">
-                <a:solidFill>
-                  <a:srgbClr val="E8612C"/>
-                </a:solidFill>
-                <a:latin typeface="Calibri" pitchFamily="34" charset="0"/>
-                <a:ea typeface="Calibri" pitchFamily="34" charset="-122"/>
-                <a:cs typeface="Calibri" pitchFamily="34" charset="-120"/>
-              </a:rPr>
-              <a:t>Land 2 Fast-Follower Betas</a:t>
-            </a:r>
-            <a:endParaRPr lang="en-US" sz="1300" dirty="0"/>
-          </a:p>
-        </p:txBody>
+          <p:cNvPr id="12" name="Shape 10"/>
+          <p:cNvSpPr/>
+          <p:nvPr/>
+        </p:nvSpPr>
+        <p:spPr>
+          <a:xfrm>
+            <a:off x="365760" y="2441448"/>
+            <a:ext cx="73152" cy="1051560"/>
+          </a:xfrm>
+          <a:prstGeom prst="rect">
+            <a:avLst/>
+          </a:prstGeom>
+          <a:solidFill>
+            <a:srgbClr val="D48B14"/>
+          </a:solidFill>
+          <a:ln/>
+        </p:spPr>
       </p:sp>
       <p:sp>
         <p:nvSpPr>
@@ -2764,8 +2834,106 @@
         </p:nvSpPr>
         <p:spPr>
           <a:xfrm>
-            <a:off x="6446520" y="1828800"/>
-            <a:ext cx="5166360" cy="548640"/>
+            <a:off x="594360" y="2487168"/>
+            <a:ext cx="3657600" cy="320040"/>
+          </a:xfrm>
+          <a:prstGeom prst="rect">
+            <a:avLst/>
+          </a:prstGeom>
+          <a:noFill/>
+          <a:ln/>
+        </p:spPr>
+        <p:txBody>
+          <a:bodyPr wrap="square" lIns="0" tIns="0" rIns="0" bIns="0" rtlCol="0" anchor="ctr"/>
+          <a:lstStyle/>
+          <a:p>
+            <a:pPr indent="0" marL="0">
+              <a:buNone/>
+            </a:pPr>
+            <a:r>
+              <a:rPr lang="en-US" sz="1200" b="1" dirty="0">
+                <a:solidFill>
+                  <a:srgbClr val="1A2B4A"/>
+                </a:solidFill>
+                <a:latin typeface="Calibri" pitchFamily="34" charset="0"/>
+                <a:ea typeface="Calibri" pitchFamily="34" charset="-122"/>
+                <a:cs typeface="Calibri" pitchFamily="34" charset="-120"/>
+              </a:rPr>
+              <a:t>Walmart API Changes</a:t>
+            </a:r>
+            <a:endParaRPr lang="en-US" sz="1200" dirty="0"/>
+          </a:p>
+        </p:txBody>
+      </p:sp>
+      <p:sp>
+        <p:nvSpPr>
+          <p:cNvPr id="14" name="Shape 12"/>
+          <p:cNvSpPr/>
+          <p:nvPr/>
+        </p:nvSpPr>
+        <p:spPr>
+          <a:xfrm>
+            <a:off x="4480560" y="2514600"/>
+            <a:ext cx="1005840" cy="274320"/>
+          </a:xfrm>
+          <a:prstGeom prst="rect">
+            <a:avLst/>
+          </a:prstGeom>
+          <a:solidFill>
+            <a:srgbClr val="D48B14"/>
+          </a:solidFill>
+          <a:ln/>
+        </p:spPr>
+      </p:sp>
+      <p:sp>
+        <p:nvSpPr>
+          <p:cNvPr id="15" name="Text 13"/>
+          <p:cNvSpPr/>
+          <p:nvPr/>
+        </p:nvSpPr>
+        <p:spPr>
+          <a:xfrm>
+            <a:off x="4480560" y="2514600"/>
+            <a:ext cx="1005840" cy="274320"/>
+          </a:xfrm>
+          <a:prstGeom prst="rect">
+            <a:avLst/>
+          </a:prstGeom>
+          <a:noFill/>
+          <a:ln/>
+        </p:spPr>
+        <p:txBody>
+          <a:bodyPr wrap="square" lIns="0" tIns="0" rIns="0" bIns="0" rtlCol="0" anchor="ctr"/>
+          <a:lstStyle/>
+          <a:p>
+            <a:pPr algn="ctr" indent="0" marL="0">
+              <a:buNone/>
+            </a:pPr>
+            <a:r>
+              <a:rPr lang="en-US" sz="1000" b="1" dirty="0">
+                <a:solidFill>
+                  <a:srgbClr val="FFFFFF"/>
+                </a:solidFill>
+                <a:latin typeface="Calibri" pitchFamily="34" charset="0"/>
+                <a:ea typeface="Calibri" pitchFamily="34" charset="-122"/>
+                <a:cs typeface="Calibri" pitchFamily="34" charset="-120"/>
+              </a:rPr>
+              <a:t>MEDIUM</a:t>
+            </a:r>
+            <a:endParaRPr lang="en-US" sz="1000" dirty="0"/>
+          </a:p>
+        </p:txBody>
+      </p:sp>
+      <p:sp>
+        <p:nvSpPr>
+          <p:cNvPr id="16" name="Text 14"/>
+          <p:cNvSpPr/>
+          <p:nvPr/>
+        </p:nvSpPr>
+        <p:spPr>
+          <a:xfrm>
+            <a:off x="5669280" y="2487168"/>
+            <a:ext cx="6126480" cy="914400"/>
           </a:xfrm>
           <a:prstGeom prst="rect">
             <a:avLst/>
@@ -2783,13 +2951,13 @@
             <a:r>
               <a:rPr lang="en-US" sz="1100" dirty="0">
                 <a:solidFill>
-                  <a:srgbClr val="1A2B4A"/>
-                </a:solidFill>
-                <a:latin typeface="Calibri" pitchFamily="34" charset="0"/>
-                <a:ea typeface="Calibri" pitchFamily="34" charset="-122"/>
-                <a:cs typeface="Calibri" pitchFamily="34" charset="-120"/>
-              </a:rPr>
-              <a:t>Target: Signed pilots by end of Q2</a:t>
+                  <a:srgbClr val="4A5568"/>
+                </a:solidFill>
+                <a:latin typeface="Calibri" pitchFamily="34" charset="0"/>
+                <a:ea typeface="Calibri" pitchFamily="34" charset="-122"/>
+                <a:cs typeface="Calibri" pitchFamily="34" charset="-120"/>
+              </a:rPr>
+              <a:t>Leverage Incremental.com's official API partnership</a:t>
             </a:r>
             <a:endParaRPr lang="en-US" sz="1100" dirty="0"/>
           </a:p>
@@ -2797,53 +2965,14 @@
       </p:sp>
       <p:sp>
         <p:nvSpPr>
-          <p:cNvPr id="14" name="Text 12"/>
-          <p:cNvSpPr/>
-          <p:nvPr/>
-        </p:nvSpPr>
-        <p:spPr>
-          <a:xfrm>
-            <a:off x="6446520" y="2468880"/>
-            <a:ext cx="5166360" cy="320040"/>
-          </a:xfrm>
-          <a:prstGeom prst="rect">
-            <a:avLst/>
-          </a:prstGeom>
-          <a:noFill/>
-          <a:ln/>
-        </p:spPr>
-        <p:txBody>
-          <a:bodyPr wrap="square" lIns="0" tIns="0" rIns="0" bIns="0" rtlCol="0" anchor="ctr"/>
-          <a:lstStyle/>
-          <a:p>
-            <a:pPr indent="0" marL="0">
-              <a:buNone/>
-            </a:pPr>
-            <a:r>
-              <a:rPr lang="en-US" sz="1000" i="1" dirty="0">
-                <a:solidFill>
-                  <a:srgbClr val="718096"/>
-                </a:solidFill>
-                <a:latin typeface="Calibri" pitchFamily="34" charset="0"/>
-                <a:ea typeface="Calibri" pitchFamily="34" charset="-122"/>
-                <a:cs typeface="Calibri" pitchFamily="34" charset="-120"/>
-              </a:rPr>
-              <a:t>Owner: Sales + CS</a:t>
-            </a:r>
-            <a:endParaRPr lang="en-US" sz="1000" dirty="0"/>
-          </a:p>
-        </p:txBody>
-      </p:sp>
-      <p:sp>
-        <p:nvSpPr>
-          <p:cNvPr id="15" name="Shape 13"/>
-          <p:cNvSpPr/>
-          <p:nvPr/>
-        </p:nvSpPr>
-        <p:spPr>
-          <a:xfrm>
-            <a:off x="365760" y="3493008"/>
-            <a:ext cx="5623560" cy="2103120"/>
+          <p:cNvPr id="17" name="Shape 15"/>
+          <p:cNvSpPr/>
+          <p:nvPr/>
+        </p:nvSpPr>
+        <p:spPr>
+          <a:xfrm>
+            <a:off x="365760" y="3584448"/>
+            <a:ext cx="11430000" cy="1051560"/>
           </a:xfrm>
           <a:prstGeom prst="rect">
             <a:avLst/>
@@ -2863,73 +2992,132 @@
       </p:sp>
       <p:sp>
         <p:nvSpPr>
-          <p:cNvPr id="16" name="Shape 14"/>
-          <p:cNvSpPr/>
-          <p:nvPr/>
-        </p:nvSpPr>
-        <p:spPr>
-          <a:xfrm>
-            <a:off x="365760" y="3493008"/>
-            <a:ext cx="5623560" cy="73152"/>
-          </a:xfrm>
-          <a:prstGeom prst="rect">
-            <a:avLst/>
-          </a:prstGeom>
-          <a:solidFill>
-            <a:srgbClr val="2E5D9E"/>
-          </a:solidFill>
-          <a:ln/>
-        </p:spPr>
-      </p:sp>
-      <p:sp>
-        <p:nvSpPr>
-          <p:cNvPr id="17" name="Text 15"/>
+          <p:cNvPr id="18" name="Shape 16"/>
+          <p:cNvSpPr/>
+          <p:nvPr/>
+        </p:nvSpPr>
+        <p:spPr>
+          <a:xfrm>
+            <a:off x="365760" y="3584448"/>
+            <a:ext cx="73152" cy="1051560"/>
+          </a:xfrm>
+          <a:prstGeom prst="rect">
+            <a:avLst/>
+          </a:prstGeom>
+          <a:solidFill>
+            <a:srgbClr val="D48B14"/>
+          </a:solidFill>
+          <a:ln/>
+        </p:spPr>
+      </p:sp>
+      <p:sp>
+        <p:nvSpPr>
+          <p:cNvPr id="19" name="Text 17"/>
           <p:cNvSpPr/>
           <p:nvPr/>
         </p:nvSpPr>
         <p:spPr>
           <a:xfrm>
             <a:off x="594360" y="3630168"/>
-            <a:ext cx="5166360" cy="365760"/>
-          </a:xfrm>
-          <a:prstGeom prst="rect">
-            <a:avLst/>
-          </a:prstGeom>
-          <a:noFill/>
-          <a:ln/>
-        </p:spPr>
-        <p:txBody>
-          <a:bodyPr wrap="square" lIns="0" tIns="0" rIns="0" bIns="0" rtlCol="0" anchor="ctr"/>
-          <a:lstStyle/>
-          <a:p>
-            <a:pPr indent="0" marL="0">
-              <a:buNone/>
-            </a:pPr>
-            <a:r>
-              <a:rPr lang="en-US" sz="1300" b="1" dirty="0">
-                <a:solidFill>
-                  <a:srgbClr val="2E5D9E"/>
-                </a:solidFill>
-                <a:latin typeface="Calibri" pitchFamily="34" charset="0"/>
-                <a:ea typeface="Calibri" pitchFamily="34" charset="-122"/>
-                <a:cs typeface="Calibri" pitchFamily="34" charset="-120"/>
-              </a:rPr>
-              <a:t>Productization Design</a:t>
-            </a:r>
-            <a:endParaRPr lang="en-US" sz="1300" dirty="0"/>
-          </a:p>
-        </p:txBody>
-      </p:sp>
-      <p:sp>
-        <p:nvSpPr>
-          <p:cNvPr id="18" name="Text 16"/>
-          <p:cNvSpPr/>
-          <p:nvPr/>
-        </p:nvSpPr>
-        <p:spPr>
-          <a:xfrm>
-            <a:off x="594360" y="4023360"/>
-            <a:ext cx="5166360" cy="548640"/>
+            <a:ext cx="3657600" cy="320040"/>
+          </a:xfrm>
+          <a:prstGeom prst="rect">
+            <a:avLst/>
+          </a:prstGeom>
+          <a:noFill/>
+          <a:ln/>
+        </p:spPr>
+        <p:txBody>
+          <a:bodyPr wrap="square" lIns="0" tIns="0" rIns="0" bIns="0" rtlCol="0" anchor="ctr"/>
+          <a:lstStyle/>
+          <a:p>
+            <a:pPr indent="0" marL="0">
+              <a:buNone/>
+            </a:pPr>
+            <a:r>
+              <a:rPr lang="en-US" sz="1200" b="1" dirty="0">
+                <a:solidFill>
+                  <a:srgbClr val="1A2B4A"/>
+                </a:solidFill>
+                <a:latin typeface="Calibri" pitchFamily="34" charset="0"/>
+                <a:ea typeface="Calibri" pitchFamily="34" charset="-122"/>
+                <a:cs typeface="Calibri" pitchFamily="34" charset="-120"/>
+              </a:rPr>
+              <a:t>Brand Buy-in on Methodology</a:t>
+            </a:r>
+            <a:endParaRPr lang="en-US" sz="1200" dirty="0"/>
+          </a:p>
+        </p:txBody>
+      </p:sp>
+      <p:sp>
+        <p:nvSpPr>
+          <p:cNvPr id="20" name="Shape 18"/>
+          <p:cNvSpPr/>
+          <p:nvPr/>
+        </p:nvSpPr>
+        <p:spPr>
+          <a:xfrm>
+            <a:off x="4480560" y="3657600"/>
+            <a:ext cx="1005840" cy="274320"/>
+          </a:xfrm>
+          <a:prstGeom prst="rect">
+            <a:avLst/>
+          </a:prstGeom>
+          <a:solidFill>
+            <a:srgbClr val="D48B14"/>
+          </a:solidFill>
+          <a:ln/>
+        </p:spPr>
+      </p:sp>
+      <p:sp>
+        <p:nvSpPr>
+          <p:cNvPr id="21" name="Text 19"/>
+          <p:cNvSpPr/>
+          <p:nvPr/>
+        </p:nvSpPr>
+        <p:spPr>
+          <a:xfrm>
+            <a:off x="4480560" y="3657600"/>
+            <a:ext cx="1005840" cy="274320"/>
+          </a:xfrm>
+          <a:prstGeom prst="rect">
+            <a:avLst/>
+          </a:prstGeom>
+          <a:noFill/>
+          <a:ln/>
+        </p:spPr>
+        <p:txBody>
+          <a:bodyPr wrap="square" lIns="0" tIns="0" rIns="0" bIns="0" rtlCol="0" anchor="ctr"/>
+          <a:lstStyle/>
+          <a:p>
+            <a:pPr algn="ctr" indent="0" marL="0">
+              <a:buNone/>
+            </a:pPr>
+            <a:r>
+              <a:rPr lang="en-US" sz="1000" b="1" dirty="0">
+                <a:solidFill>
+                  <a:srgbClr val="FFFFFF"/>
+                </a:solidFill>
+                <a:latin typeface="Calibri" pitchFamily="34" charset="0"/>
+                <a:ea typeface="Calibri" pitchFamily="34" charset="-122"/>
+                <a:cs typeface="Calibri" pitchFamily="34" charset="-120"/>
+              </a:rPr>
+              <a:t>MEDIUM</a:t>
+            </a:r>
+            <a:endParaRPr lang="en-US" sz="1000" dirty="0"/>
+          </a:p>
+        </p:txBody>
+      </p:sp>
+      <p:sp>
+        <p:nvSpPr>
+          <p:cNvPr id="22" name="Text 20"/>
+          <p:cNvSpPr/>
+          <p:nvPr/>
+        </p:nvSpPr>
+        <p:spPr>
+          <a:xfrm>
+            <a:off x="5669280" y="3630168"/>
+            <a:ext cx="6126480" cy="914400"/>
           </a:xfrm>
           <a:prstGeom prst="rect">
             <a:avLst/>
@@ -2947,13 +3135,13 @@
             <a:r>
               <a:rPr lang="en-US" sz="1100" dirty="0">
                 <a:solidFill>
-                  <a:srgbClr val="1A2B4A"/>
-                </a:solidFill>
-                <a:latin typeface="Calibri" pitchFamily="34" charset="0"/>
-                <a:ea typeface="Calibri" pitchFamily="34" charset="-122"/>
-                <a:cs typeface="Calibri" pitchFamily="34" charset="-120"/>
-              </a:rPr>
-              <a:t>Target: P1 spec complete by Aug 31</a:t>
+                  <a:srgbClr val="4A5568"/>
+                </a:solidFill>
+                <a:latin typeface="Calibri" pitchFamily="34" charset="0"/>
+                <a:ea typeface="Calibri" pitchFamily="34" charset="-122"/>
+                <a:cs typeface="Calibri" pitchFamily="34" charset="-120"/>
+              </a:rPr>
+              <a:t>Lactalis case study + peer references by Q3</a:t>
             </a:r>
             <a:endParaRPr lang="en-US" sz="1100" dirty="0"/>
           </a:p>
@@ -2961,53 +3149,14 @@
       </p:sp>
       <p:sp>
         <p:nvSpPr>
-          <p:cNvPr id="19" name="Text 17"/>
-          <p:cNvSpPr/>
-          <p:nvPr/>
-        </p:nvSpPr>
-        <p:spPr>
-          <a:xfrm>
-            <a:off x="594360" y="4663440"/>
-            <a:ext cx="5166360" cy="320040"/>
-          </a:xfrm>
-          <a:prstGeom prst="rect">
-            <a:avLst/>
-          </a:prstGeom>
-          <a:noFill/>
-          <a:ln/>
-        </p:spPr>
-        <p:txBody>
-          <a:bodyPr wrap="square" lIns="0" tIns="0" rIns="0" bIns="0" rtlCol="0" anchor="ctr"/>
-          <a:lstStyle/>
-          <a:p>
-            <a:pPr indent="0" marL="0">
-              <a:buNone/>
-            </a:pPr>
-            <a:r>
-              <a:rPr lang="en-US" sz="1000" i="1" dirty="0">
-                <a:solidFill>
-                  <a:srgbClr val="718096"/>
-                </a:solidFill>
-                <a:latin typeface="Calibri" pitchFamily="34" charset="0"/>
-                <a:ea typeface="Calibri" pitchFamily="34" charset="-122"/>
-                <a:cs typeface="Calibri" pitchFamily="34" charset="-120"/>
-              </a:rPr>
-              <a:t>Owner: Product</a:t>
-            </a:r>
-            <a:endParaRPr lang="en-US" sz="1000" dirty="0"/>
-          </a:p>
-        </p:txBody>
-      </p:sp>
-      <p:sp>
-        <p:nvSpPr>
-          <p:cNvPr id="20" name="Shape 18"/>
-          <p:cNvSpPr/>
-          <p:nvPr/>
-        </p:nvSpPr>
-        <p:spPr>
-          <a:xfrm>
-            <a:off x="6217920" y="3493008"/>
-            <a:ext cx="5623560" cy="2103120"/>
+          <p:cNvPr id="23" name="Shape 21"/>
+          <p:cNvSpPr/>
+          <p:nvPr/>
+        </p:nvSpPr>
+        <p:spPr>
+          <a:xfrm>
+            <a:off x="365760" y="4727448"/>
+            <a:ext cx="11430000" cy="1051560"/>
           </a:xfrm>
           <a:prstGeom prst="rect">
             <a:avLst/>
@@ -3027,73 +3176,132 @@
       </p:sp>
       <p:sp>
         <p:nvSpPr>
-          <p:cNvPr id="21" name="Shape 19"/>
-          <p:cNvSpPr/>
-          <p:nvPr/>
-        </p:nvSpPr>
-        <p:spPr>
-          <a:xfrm>
-            <a:off x="6217920" y="3493008"/>
-            <a:ext cx="5623560" cy="73152"/>
-          </a:xfrm>
-          <a:prstGeom prst="rect">
-            <a:avLst/>
-          </a:prstGeom>
-          <a:solidFill>
-            <a:srgbClr val="2E5D9E"/>
-          </a:solidFill>
-          <a:ln/>
-        </p:spPr>
-      </p:sp>
-      <p:sp>
-        <p:nvSpPr>
-          <p:cNvPr id="22" name="Text 20"/>
-          <p:cNvSpPr/>
-          <p:nvPr/>
-        </p:nvSpPr>
-        <p:spPr>
-          <a:xfrm>
-            <a:off x="6446520" y="3630168"/>
-            <a:ext cx="5166360" cy="365760"/>
-          </a:xfrm>
-          <a:prstGeom prst="rect">
-            <a:avLst/>
-          </a:prstGeom>
-          <a:noFill/>
-          <a:ln/>
-        </p:spPr>
-        <p:txBody>
-          <a:bodyPr wrap="square" lIns="0" tIns="0" rIns="0" bIns="0" rtlCol="0" anchor="ctr"/>
-          <a:lstStyle/>
-          <a:p>
-            <a:pPr indent="0" marL="0">
-              <a:buNone/>
-            </a:pPr>
-            <a:r>
-              <a:rPr lang="en-US" sz="1300" b="1" dirty="0">
-                <a:solidFill>
-                  <a:srgbClr val="2E5D9E"/>
-                </a:solidFill>
-                <a:latin typeface="Calibri" pitchFamily="34" charset="0"/>
-                <a:ea typeface="Calibri" pitchFamily="34" charset="-122"/>
-                <a:cs typeface="Calibri" pitchFamily="34" charset="-120"/>
-              </a:rPr>
-              <a:t>Build Competitive Case Studies</a:t>
-            </a:r>
-            <a:endParaRPr lang="en-US" sz="1300" dirty="0"/>
-          </a:p>
-        </p:txBody>
-      </p:sp>
-      <p:sp>
-        <p:nvSpPr>
-          <p:cNvPr id="23" name="Text 21"/>
-          <p:cNvSpPr/>
-          <p:nvPr/>
-        </p:nvSpPr>
-        <p:spPr>
-          <a:xfrm>
-            <a:off x="6446520" y="4023360"/>
-            <a:ext cx="5166360" cy="548640"/>
+          <p:cNvPr id="24" name="Shape 22"/>
+          <p:cNvSpPr/>
+          <p:nvPr/>
+        </p:nvSpPr>
+        <p:spPr>
+          <a:xfrm>
+            <a:off x="365760" y="4727448"/>
+            <a:ext cx="73152" cy="1051560"/>
+          </a:xfrm>
+          <a:prstGeom prst="rect">
+            <a:avLst/>
+          </a:prstGeom>
+          <a:solidFill>
+            <a:srgbClr val="D48B14"/>
+          </a:solidFill>
+          <a:ln/>
+        </p:spPr>
+      </p:sp>
+      <p:sp>
+        <p:nvSpPr>
+          <p:cNvPr id="25" name="Text 23"/>
+          <p:cNvSpPr/>
+          <p:nvPr/>
+        </p:nvSpPr>
+        <p:spPr>
+          <a:xfrm>
+            <a:off x="594360" y="4773168"/>
+            <a:ext cx="3657600" cy="320040"/>
+          </a:xfrm>
+          <a:prstGeom prst="rect">
+            <a:avLst/>
+          </a:prstGeom>
+          <a:noFill/>
+          <a:ln/>
+        </p:spPr>
+        <p:txBody>
+          <a:bodyPr wrap="square" lIns="0" tIns="0" rIns="0" bIns="0" rtlCol="0" anchor="ctr"/>
+          <a:lstStyle/>
+          <a:p>
+            <a:pPr indent="0" marL="0">
+              <a:buNone/>
+            </a:pPr>
+            <a:r>
+              <a:rPr lang="en-US" sz="1200" b="1" dirty="0">
+                <a:solidFill>
+                  <a:srgbClr val="1A2B4A"/>
+                </a:solidFill>
+                <a:latin typeface="Calibri" pitchFamily="34" charset="0"/>
+                <a:ea typeface="Calibri" pitchFamily="34" charset="-122"/>
+                <a:cs typeface="Calibri" pitchFamily="34" charset="-120"/>
+              </a:rPr>
+              <a:t>Productization Timeline Slip</a:t>
+            </a:r>
+            <a:endParaRPr lang="en-US" sz="1200" dirty="0"/>
+          </a:p>
+        </p:txBody>
+      </p:sp>
+      <p:sp>
+        <p:nvSpPr>
+          <p:cNvPr id="26" name="Shape 24"/>
+          <p:cNvSpPr/>
+          <p:nvPr/>
+        </p:nvSpPr>
+        <p:spPr>
+          <a:xfrm>
+            <a:off x="4480560" y="4800600"/>
+            <a:ext cx="1005840" cy="274320"/>
+          </a:xfrm>
+          <a:prstGeom prst="rect">
+            <a:avLst/>
+          </a:prstGeom>
+          <a:solidFill>
+            <a:srgbClr val="D48B14"/>
+          </a:solidFill>
+          <a:ln/>
+        </p:spPr>
+      </p:sp>
+      <p:sp>
+        <p:nvSpPr>
+          <p:cNvPr id="27" name="Text 25"/>
+          <p:cNvSpPr/>
+          <p:nvPr/>
+        </p:nvSpPr>
+        <p:spPr>
+          <a:xfrm>
+            <a:off x="4480560" y="4800600"/>
+            <a:ext cx="1005840" cy="274320"/>
+          </a:xfrm>
+          <a:prstGeom prst="rect">
+            <a:avLst/>
+          </a:prstGeom>
+          <a:noFill/>
+          <a:ln/>
+        </p:spPr>
+        <p:txBody>
+          <a:bodyPr wrap="square" lIns="0" tIns="0" rIns="0" bIns="0" rtlCol="0" anchor="ctr"/>
+          <a:lstStyle/>
+          <a:p>
+            <a:pPr algn="ctr" indent="0" marL="0">
+              <a:buNone/>
+            </a:pPr>
+            <a:r>
+              <a:rPr lang="en-US" sz="1000" b="1" dirty="0">
+                <a:solidFill>
+                  <a:srgbClr val="FFFFFF"/>
+                </a:solidFill>
+                <a:latin typeface="Calibri" pitchFamily="34" charset="0"/>
+                <a:ea typeface="Calibri" pitchFamily="34" charset="-122"/>
+                <a:cs typeface="Calibri" pitchFamily="34" charset="-120"/>
+              </a:rPr>
+              <a:t>MEDIUM</a:t>
+            </a:r>
+            <a:endParaRPr lang="en-US" sz="1000" dirty="0"/>
+          </a:p>
+        </p:txBody>
+      </p:sp>
+      <p:sp>
+        <p:nvSpPr>
+          <p:cNvPr id="28" name="Text 26"/>
+          <p:cNvSpPr/>
+          <p:nvPr/>
+        </p:nvSpPr>
+        <p:spPr>
+          <a:xfrm>
+            <a:off x="5669280" y="4773168"/>
+            <a:ext cx="6126480" cy="914400"/>
           </a:xfrm>
           <a:prstGeom prst="rect">
             <a:avLst/>
@@ -3111,54 +3319,15 @@
             <a:r>
               <a:rPr lang="en-US" sz="1100" dirty="0">
                 <a:solidFill>
-                  <a:srgbClr val="1A2B4A"/>
-                </a:solidFill>
-                <a:latin typeface="Calibri" pitchFamily="34" charset="0"/>
-                <a:ea typeface="Calibri" pitchFamily="34" charset="-122"/>
-                <a:cs typeface="Calibri" pitchFamily="34" charset="-120"/>
-              </a:rPr>
-              <a:t>Target: Lactalis + 1 more by Aug 31</a:t>
+                  <a:srgbClr val="4A5568"/>
+                </a:solidFill>
+                <a:latin typeface="Calibri" pitchFamily="34" charset="0"/>
+                <a:ea typeface="Calibri" pitchFamily="34" charset="-122"/>
+                <a:cs typeface="Calibri" pitchFamily="34" charset="-120"/>
+              </a:rPr>
+              <a:t>Fallback: extend Tableau services model</a:t>
             </a:r>
             <a:endParaRPr lang="en-US" sz="1100" dirty="0"/>
-          </a:p>
-        </p:txBody>
-      </p:sp>
-      <p:sp>
-        <p:nvSpPr>
-          <p:cNvPr id="24" name="Text 22"/>
-          <p:cNvSpPr/>
-          <p:nvPr/>
-        </p:nvSpPr>
-        <p:spPr>
-          <a:xfrm>
-            <a:off x="6446520" y="4663440"/>
-            <a:ext cx="5166360" cy="320040"/>
-          </a:xfrm>
-          <a:prstGeom prst="rect">
-            <a:avLst/>
-          </a:prstGeom>
-          <a:noFill/>
-          <a:ln/>
-        </p:spPr>
-        <p:txBody>
-          <a:bodyPr wrap="square" lIns="0" tIns="0" rIns="0" bIns="0" rtlCol="0" anchor="ctr"/>
-          <a:lstStyle/>
-          <a:p>
-            <a:pPr indent="0" marL="0">
-              <a:buNone/>
-            </a:pPr>
-            <a:r>
-              <a:rPr lang="en-US" sz="1000" i="1" dirty="0">
-                <a:solidFill>
-                  <a:srgbClr val="718096"/>
-                </a:solidFill>
-                <a:latin typeface="Calibri" pitchFamily="34" charset="0"/>
-                <a:ea typeface="Calibri" pitchFamily="34" charset="-122"/>
-                <a:cs typeface="Calibri" pitchFamily="34" charset="-120"/>
-              </a:rPr>
-              <a:t>Owner: Marketing</a:t>
-            </a:r>
-            <a:endParaRPr lang="en-US" sz="1000" dirty="0"/>
           </a:p>
         </p:txBody>
       </p:sp>
@@ -3247,6 +3416,773 @@
                 <a:ea typeface="Calibri" pitchFamily="34" charset="-122"/>
                 <a:cs typeface="Calibri" pitchFamily="34" charset="-120"/>
               </a:rPr>
+              <a:t>Q2–Q3 2026 Key Result Areas</a:t>
+            </a:r>
+            <a:endParaRPr lang="en-US" sz="2400" dirty="0"/>
+          </a:p>
+        </p:txBody>
+      </p:sp>
+      <p:sp>
+        <p:nvSpPr>
+          <p:cNvPr id="4" name="Shape 2"/>
+          <p:cNvSpPr/>
+          <p:nvPr/>
+        </p:nvSpPr>
+        <p:spPr>
+          <a:xfrm>
+            <a:off x="365760" y="1115568"/>
+            <a:ext cx="11430000" cy="18288"/>
+          </a:xfrm>
+          <a:prstGeom prst="rect">
+            <a:avLst/>
+          </a:prstGeom>
+          <a:solidFill>
+            <a:srgbClr val="DDE4F0"/>
+          </a:solidFill>
+          <a:ln/>
+        </p:spPr>
+      </p:sp>
+      <p:sp>
+        <p:nvSpPr>
+          <p:cNvPr id="5" name="Shape 3"/>
+          <p:cNvSpPr/>
+          <p:nvPr/>
+        </p:nvSpPr>
+        <p:spPr>
+          <a:xfrm>
+            <a:off x="365760" y="1298448"/>
+            <a:ext cx="5623560" cy="2103120"/>
+          </a:xfrm>
+          <a:prstGeom prst="rect">
+            <a:avLst/>
+          </a:prstGeom>
+          <a:solidFill>
+            <a:srgbClr val="FFFFFF"/>
+          </a:solidFill>
+          <a:ln/>
+          <a:effectLst>
+            <a:outerShdw sx="100000" sy="100000" kx="0" ky="0" algn="bl" rotWithShape="0" blurRad="50800" dist="25400" dir="8100000">
+              <a:srgbClr val="000000">
+                <a:alpha val="8000"/>
+              </a:srgbClr>
+            </a:outerShdw>
+          </a:effectLst>
+        </p:spPr>
+      </p:sp>
+      <p:sp>
+        <p:nvSpPr>
+          <p:cNvPr id="6" name="Shape 4"/>
+          <p:cNvSpPr/>
+          <p:nvPr/>
+        </p:nvSpPr>
+        <p:spPr>
+          <a:xfrm>
+            <a:off x="365760" y="1298448"/>
+            <a:ext cx="5623560" cy="73152"/>
+          </a:xfrm>
+          <a:prstGeom prst="rect">
+            <a:avLst/>
+          </a:prstGeom>
+          <a:solidFill>
+            <a:srgbClr val="1D8A5B"/>
+          </a:solidFill>
+          <a:ln/>
+        </p:spPr>
+      </p:sp>
+      <p:sp>
+        <p:nvSpPr>
+          <p:cNvPr id="7" name="Text 5"/>
+          <p:cNvSpPr/>
+          <p:nvPr/>
+        </p:nvSpPr>
+        <p:spPr>
+          <a:xfrm>
+            <a:off x="594360" y="1435608"/>
+            <a:ext cx="5166360" cy="365760"/>
+          </a:xfrm>
+          <a:prstGeom prst="rect">
+            <a:avLst/>
+          </a:prstGeom>
+          <a:noFill/>
+          <a:ln/>
+        </p:spPr>
+        <p:txBody>
+          <a:bodyPr wrap="square" lIns="0" tIns="0" rIns="0" bIns="0" rtlCol="0" anchor="ctr"/>
+          <a:lstStyle/>
+          <a:p>
+            <a:pPr indent="0" marL="0">
+              <a:buNone/>
+            </a:pPr>
+            <a:r>
+              <a:rPr lang="en-US" sz="1300" b="1" dirty="0">
+                <a:solidFill>
+                  <a:srgbClr val="1D8A5B"/>
+                </a:solidFill>
+                <a:latin typeface="Calibri" pitchFamily="34" charset="0"/>
+                <a:ea typeface="Calibri" pitchFamily="34" charset="-122"/>
+                <a:cs typeface="Calibri" pitchFamily="34" charset="-120"/>
+              </a:rPr>
+              <a:t>Close Lactalis PoC</a:t>
+            </a:r>
+            <a:endParaRPr lang="en-US" sz="1300" dirty="0"/>
+          </a:p>
+        </p:txBody>
+      </p:sp>
+      <p:sp>
+        <p:nvSpPr>
+          <p:cNvPr id="8" name="Text 6"/>
+          <p:cNvSpPr/>
+          <p:nvPr/>
+        </p:nvSpPr>
+        <p:spPr>
+          <a:xfrm>
+            <a:off x="594360" y="1828800"/>
+            <a:ext cx="5166360" cy="548640"/>
+          </a:xfrm>
+          <a:prstGeom prst="rect">
+            <a:avLst/>
+          </a:prstGeom>
+          <a:noFill/>
+          <a:ln/>
+        </p:spPr>
+        <p:txBody>
+          <a:bodyPr wrap="square" lIns="0" tIns="0" rIns="0" bIns="0" rtlCol="0" anchor="ctr"/>
+          <a:lstStyle/>
+          <a:p>
+            <a:pPr indent="0" marL="0">
+              <a:buNone/>
+            </a:pPr>
+            <a:r>
+              <a:rPr lang="en-US" sz="1100" dirty="0">
+                <a:solidFill>
+                  <a:srgbClr val="1A2B4A"/>
+                </a:solidFill>
+                <a:latin typeface="Calibri" pitchFamily="34" charset="0"/>
+                <a:ea typeface="Calibri" pitchFamily="34" charset="-122"/>
+                <a:cs typeface="Calibri" pitchFamily="34" charset="-120"/>
+              </a:rPr>
+              <a:t>Target: Validated model by June 30</a:t>
+            </a:r>
+            <a:endParaRPr lang="en-US" sz="1100" dirty="0"/>
+          </a:p>
+        </p:txBody>
+      </p:sp>
+      <p:sp>
+        <p:nvSpPr>
+          <p:cNvPr id="9" name="Text 7"/>
+          <p:cNvSpPr/>
+          <p:nvPr/>
+        </p:nvSpPr>
+        <p:spPr>
+          <a:xfrm>
+            <a:off x="594360" y="2468880"/>
+            <a:ext cx="5166360" cy="320040"/>
+          </a:xfrm>
+          <a:prstGeom prst="rect">
+            <a:avLst/>
+          </a:prstGeom>
+          <a:noFill/>
+          <a:ln/>
+        </p:spPr>
+        <p:txBody>
+          <a:bodyPr wrap="square" lIns="0" tIns="0" rIns="0" bIns="0" rtlCol="0" anchor="ctr"/>
+          <a:lstStyle/>
+          <a:p>
+            <a:pPr indent="0" marL="0">
+              <a:buNone/>
+            </a:pPr>
+            <a:r>
+              <a:rPr lang="en-US" sz="1000" i="1" dirty="0">
+                <a:solidFill>
+                  <a:srgbClr val="718096"/>
+                </a:solidFill>
+                <a:latin typeface="Calibri" pitchFamily="34" charset="0"/>
+                <a:ea typeface="Calibri" pitchFamily="34" charset="-122"/>
+                <a:cs typeface="Calibri" pitchFamily="34" charset="-120"/>
+              </a:rPr>
+              <a:t>Owner: Product + Eng</a:t>
+            </a:r>
+            <a:endParaRPr lang="en-US" sz="1000" dirty="0"/>
+          </a:p>
+        </p:txBody>
+      </p:sp>
+      <p:sp>
+        <p:nvSpPr>
+          <p:cNvPr id="10" name="Shape 8"/>
+          <p:cNvSpPr/>
+          <p:nvPr/>
+        </p:nvSpPr>
+        <p:spPr>
+          <a:xfrm>
+            <a:off x="6217920" y="1298448"/>
+            <a:ext cx="5623560" cy="2103120"/>
+          </a:xfrm>
+          <a:prstGeom prst="rect">
+            <a:avLst/>
+          </a:prstGeom>
+          <a:solidFill>
+            <a:srgbClr val="FFFFFF"/>
+          </a:solidFill>
+          <a:ln/>
+          <a:effectLst>
+            <a:outerShdw sx="100000" sy="100000" kx="0" ky="0" algn="bl" rotWithShape="0" blurRad="50800" dist="25400" dir="8100000">
+              <a:srgbClr val="000000">
+                <a:alpha val="8000"/>
+              </a:srgbClr>
+            </a:outerShdw>
+          </a:effectLst>
+        </p:spPr>
+      </p:sp>
+      <p:sp>
+        <p:nvSpPr>
+          <p:cNvPr id="11" name="Shape 9"/>
+          <p:cNvSpPr/>
+          <p:nvPr/>
+        </p:nvSpPr>
+        <p:spPr>
+          <a:xfrm>
+            <a:off x="6217920" y="1298448"/>
+            <a:ext cx="5623560" cy="73152"/>
+          </a:xfrm>
+          <a:prstGeom prst="rect">
+            <a:avLst/>
+          </a:prstGeom>
+          <a:solidFill>
+            <a:srgbClr val="E8612C"/>
+          </a:solidFill>
+          <a:ln/>
+        </p:spPr>
+      </p:sp>
+      <p:sp>
+        <p:nvSpPr>
+          <p:cNvPr id="12" name="Text 10"/>
+          <p:cNvSpPr/>
+          <p:nvPr/>
+        </p:nvSpPr>
+        <p:spPr>
+          <a:xfrm>
+            <a:off x="6446520" y="1435608"/>
+            <a:ext cx="5166360" cy="365760"/>
+          </a:xfrm>
+          <a:prstGeom prst="rect">
+            <a:avLst/>
+          </a:prstGeom>
+          <a:noFill/>
+          <a:ln/>
+        </p:spPr>
+        <p:txBody>
+          <a:bodyPr wrap="square" lIns="0" tIns="0" rIns="0" bIns="0" rtlCol="0" anchor="ctr"/>
+          <a:lstStyle/>
+          <a:p>
+            <a:pPr indent="0" marL="0">
+              <a:buNone/>
+            </a:pPr>
+            <a:r>
+              <a:rPr lang="en-US" sz="1300" b="1" dirty="0">
+                <a:solidFill>
+                  <a:srgbClr val="E8612C"/>
+                </a:solidFill>
+                <a:latin typeface="Calibri" pitchFamily="34" charset="0"/>
+                <a:ea typeface="Calibri" pitchFamily="34" charset="-122"/>
+                <a:cs typeface="Calibri" pitchFamily="34" charset="-120"/>
+              </a:rPr>
+              <a:t>Land 2 Fast-Follower Betas</a:t>
+            </a:r>
+            <a:endParaRPr lang="en-US" sz="1300" dirty="0"/>
+          </a:p>
+        </p:txBody>
+      </p:sp>
+      <p:sp>
+        <p:nvSpPr>
+          <p:cNvPr id="13" name="Text 11"/>
+          <p:cNvSpPr/>
+          <p:nvPr/>
+        </p:nvSpPr>
+        <p:spPr>
+          <a:xfrm>
+            <a:off x="6446520" y="1828800"/>
+            <a:ext cx="5166360" cy="548640"/>
+          </a:xfrm>
+          <a:prstGeom prst="rect">
+            <a:avLst/>
+          </a:prstGeom>
+          <a:noFill/>
+          <a:ln/>
+        </p:spPr>
+        <p:txBody>
+          <a:bodyPr wrap="square" lIns="0" tIns="0" rIns="0" bIns="0" rtlCol="0" anchor="ctr"/>
+          <a:lstStyle/>
+          <a:p>
+            <a:pPr indent="0" marL="0">
+              <a:buNone/>
+            </a:pPr>
+            <a:r>
+              <a:rPr lang="en-US" sz="1100" dirty="0">
+                <a:solidFill>
+                  <a:srgbClr val="1A2B4A"/>
+                </a:solidFill>
+                <a:latin typeface="Calibri" pitchFamily="34" charset="0"/>
+                <a:ea typeface="Calibri" pitchFamily="34" charset="-122"/>
+                <a:cs typeface="Calibri" pitchFamily="34" charset="-120"/>
+              </a:rPr>
+              <a:t>Target: Signed pilots by end of Q2</a:t>
+            </a:r>
+            <a:endParaRPr lang="en-US" sz="1100" dirty="0"/>
+          </a:p>
+        </p:txBody>
+      </p:sp>
+      <p:sp>
+        <p:nvSpPr>
+          <p:cNvPr id="14" name="Text 12"/>
+          <p:cNvSpPr/>
+          <p:nvPr/>
+        </p:nvSpPr>
+        <p:spPr>
+          <a:xfrm>
+            <a:off x="6446520" y="2468880"/>
+            <a:ext cx="5166360" cy="320040"/>
+          </a:xfrm>
+          <a:prstGeom prst="rect">
+            <a:avLst/>
+          </a:prstGeom>
+          <a:noFill/>
+          <a:ln/>
+        </p:spPr>
+        <p:txBody>
+          <a:bodyPr wrap="square" lIns="0" tIns="0" rIns="0" bIns="0" rtlCol="0" anchor="ctr"/>
+          <a:lstStyle/>
+          <a:p>
+            <a:pPr indent="0" marL="0">
+              <a:buNone/>
+            </a:pPr>
+            <a:r>
+              <a:rPr lang="en-US" sz="1000" i="1" dirty="0">
+                <a:solidFill>
+                  <a:srgbClr val="718096"/>
+                </a:solidFill>
+                <a:latin typeface="Calibri" pitchFamily="34" charset="0"/>
+                <a:ea typeface="Calibri" pitchFamily="34" charset="-122"/>
+                <a:cs typeface="Calibri" pitchFamily="34" charset="-120"/>
+              </a:rPr>
+              <a:t>Owner: Sales + CS</a:t>
+            </a:r>
+            <a:endParaRPr lang="en-US" sz="1000" dirty="0"/>
+          </a:p>
+        </p:txBody>
+      </p:sp>
+      <p:sp>
+        <p:nvSpPr>
+          <p:cNvPr id="15" name="Shape 13"/>
+          <p:cNvSpPr/>
+          <p:nvPr/>
+        </p:nvSpPr>
+        <p:spPr>
+          <a:xfrm>
+            <a:off x="365760" y="3493008"/>
+            <a:ext cx="5623560" cy="2103120"/>
+          </a:xfrm>
+          <a:prstGeom prst="rect">
+            <a:avLst/>
+          </a:prstGeom>
+          <a:solidFill>
+            <a:srgbClr val="FFFFFF"/>
+          </a:solidFill>
+          <a:ln/>
+          <a:effectLst>
+            <a:outerShdw sx="100000" sy="100000" kx="0" ky="0" algn="bl" rotWithShape="0" blurRad="50800" dist="25400" dir="8100000">
+              <a:srgbClr val="000000">
+                <a:alpha val="8000"/>
+              </a:srgbClr>
+            </a:outerShdw>
+          </a:effectLst>
+        </p:spPr>
+      </p:sp>
+      <p:sp>
+        <p:nvSpPr>
+          <p:cNvPr id="16" name="Shape 14"/>
+          <p:cNvSpPr/>
+          <p:nvPr/>
+        </p:nvSpPr>
+        <p:spPr>
+          <a:xfrm>
+            <a:off x="365760" y="3493008"/>
+            <a:ext cx="5623560" cy="73152"/>
+          </a:xfrm>
+          <a:prstGeom prst="rect">
+            <a:avLst/>
+          </a:prstGeom>
+          <a:solidFill>
+            <a:srgbClr val="2E5D9E"/>
+          </a:solidFill>
+          <a:ln/>
+        </p:spPr>
+      </p:sp>
+      <p:sp>
+        <p:nvSpPr>
+          <p:cNvPr id="17" name="Text 15"/>
+          <p:cNvSpPr/>
+          <p:nvPr/>
+        </p:nvSpPr>
+        <p:spPr>
+          <a:xfrm>
+            <a:off x="594360" y="3630168"/>
+            <a:ext cx="5166360" cy="365760"/>
+          </a:xfrm>
+          <a:prstGeom prst="rect">
+            <a:avLst/>
+          </a:prstGeom>
+          <a:noFill/>
+          <a:ln/>
+        </p:spPr>
+        <p:txBody>
+          <a:bodyPr wrap="square" lIns="0" tIns="0" rIns="0" bIns="0" rtlCol="0" anchor="ctr"/>
+          <a:lstStyle/>
+          <a:p>
+            <a:pPr indent="0" marL="0">
+              <a:buNone/>
+            </a:pPr>
+            <a:r>
+              <a:rPr lang="en-US" sz="1300" b="1" dirty="0">
+                <a:solidFill>
+                  <a:srgbClr val="2E5D9E"/>
+                </a:solidFill>
+                <a:latin typeface="Calibri" pitchFamily="34" charset="0"/>
+                <a:ea typeface="Calibri" pitchFamily="34" charset="-122"/>
+                <a:cs typeface="Calibri" pitchFamily="34" charset="-120"/>
+              </a:rPr>
+              <a:t>Productization Design</a:t>
+            </a:r>
+            <a:endParaRPr lang="en-US" sz="1300" dirty="0"/>
+          </a:p>
+        </p:txBody>
+      </p:sp>
+      <p:sp>
+        <p:nvSpPr>
+          <p:cNvPr id="18" name="Text 16"/>
+          <p:cNvSpPr/>
+          <p:nvPr/>
+        </p:nvSpPr>
+        <p:spPr>
+          <a:xfrm>
+            <a:off x="594360" y="4023360"/>
+            <a:ext cx="5166360" cy="548640"/>
+          </a:xfrm>
+          <a:prstGeom prst="rect">
+            <a:avLst/>
+          </a:prstGeom>
+          <a:noFill/>
+          <a:ln/>
+        </p:spPr>
+        <p:txBody>
+          <a:bodyPr wrap="square" lIns="0" tIns="0" rIns="0" bIns="0" rtlCol="0" anchor="ctr"/>
+          <a:lstStyle/>
+          <a:p>
+            <a:pPr indent="0" marL="0">
+              <a:buNone/>
+            </a:pPr>
+            <a:r>
+              <a:rPr lang="en-US" sz="1100" dirty="0">
+                <a:solidFill>
+                  <a:srgbClr val="1A2B4A"/>
+                </a:solidFill>
+                <a:latin typeface="Calibri" pitchFamily="34" charset="0"/>
+                <a:ea typeface="Calibri" pitchFamily="34" charset="-122"/>
+                <a:cs typeface="Calibri" pitchFamily="34" charset="-120"/>
+              </a:rPr>
+              <a:t>Target: P1 spec complete by Aug 31</a:t>
+            </a:r>
+            <a:endParaRPr lang="en-US" sz="1100" dirty="0"/>
+          </a:p>
+        </p:txBody>
+      </p:sp>
+      <p:sp>
+        <p:nvSpPr>
+          <p:cNvPr id="19" name="Text 17"/>
+          <p:cNvSpPr/>
+          <p:nvPr/>
+        </p:nvSpPr>
+        <p:spPr>
+          <a:xfrm>
+            <a:off x="594360" y="4663440"/>
+            <a:ext cx="5166360" cy="320040"/>
+          </a:xfrm>
+          <a:prstGeom prst="rect">
+            <a:avLst/>
+          </a:prstGeom>
+          <a:noFill/>
+          <a:ln/>
+        </p:spPr>
+        <p:txBody>
+          <a:bodyPr wrap="square" lIns="0" tIns="0" rIns="0" bIns="0" rtlCol="0" anchor="ctr"/>
+          <a:lstStyle/>
+          <a:p>
+            <a:pPr indent="0" marL="0">
+              <a:buNone/>
+            </a:pPr>
+            <a:r>
+              <a:rPr lang="en-US" sz="1000" i="1" dirty="0">
+                <a:solidFill>
+                  <a:srgbClr val="718096"/>
+                </a:solidFill>
+                <a:latin typeface="Calibri" pitchFamily="34" charset="0"/>
+                <a:ea typeface="Calibri" pitchFamily="34" charset="-122"/>
+                <a:cs typeface="Calibri" pitchFamily="34" charset="-120"/>
+              </a:rPr>
+              <a:t>Owner: Product</a:t>
+            </a:r>
+            <a:endParaRPr lang="en-US" sz="1000" dirty="0"/>
+          </a:p>
+        </p:txBody>
+      </p:sp>
+      <p:sp>
+        <p:nvSpPr>
+          <p:cNvPr id="20" name="Shape 18"/>
+          <p:cNvSpPr/>
+          <p:nvPr/>
+        </p:nvSpPr>
+        <p:spPr>
+          <a:xfrm>
+            <a:off x="6217920" y="3493008"/>
+            <a:ext cx="5623560" cy="2103120"/>
+          </a:xfrm>
+          <a:prstGeom prst="rect">
+            <a:avLst/>
+          </a:prstGeom>
+          <a:solidFill>
+            <a:srgbClr val="FFFFFF"/>
+          </a:solidFill>
+          <a:ln/>
+          <a:effectLst>
+            <a:outerShdw sx="100000" sy="100000" kx="0" ky="0" algn="bl" rotWithShape="0" blurRad="50800" dist="25400" dir="8100000">
+              <a:srgbClr val="000000">
+                <a:alpha val="8000"/>
+              </a:srgbClr>
+            </a:outerShdw>
+          </a:effectLst>
+        </p:spPr>
+      </p:sp>
+      <p:sp>
+        <p:nvSpPr>
+          <p:cNvPr id="21" name="Shape 19"/>
+          <p:cNvSpPr/>
+          <p:nvPr/>
+        </p:nvSpPr>
+        <p:spPr>
+          <a:xfrm>
+            <a:off x="6217920" y="3493008"/>
+            <a:ext cx="5623560" cy="73152"/>
+          </a:xfrm>
+          <a:prstGeom prst="rect">
+            <a:avLst/>
+          </a:prstGeom>
+          <a:solidFill>
+            <a:srgbClr val="2E5D9E"/>
+          </a:solidFill>
+          <a:ln/>
+        </p:spPr>
+      </p:sp>
+      <p:sp>
+        <p:nvSpPr>
+          <p:cNvPr id="22" name="Text 20"/>
+          <p:cNvSpPr/>
+          <p:nvPr/>
+        </p:nvSpPr>
+        <p:spPr>
+          <a:xfrm>
+            <a:off x="6446520" y="3630168"/>
+            <a:ext cx="5166360" cy="365760"/>
+          </a:xfrm>
+          <a:prstGeom prst="rect">
+            <a:avLst/>
+          </a:prstGeom>
+          <a:noFill/>
+          <a:ln/>
+        </p:spPr>
+        <p:txBody>
+          <a:bodyPr wrap="square" lIns="0" tIns="0" rIns="0" bIns="0" rtlCol="0" anchor="ctr"/>
+          <a:lstStyle/>
+          <a:p>
+            <a:pPr indent="0" marL="0">
+              <a:buNone/>
+            </a:pPr>
+            <a:r>
+              <a:rPr lang="en-US" sz="1300" b="1" dirty="0">
+                <a:solidFill>
+                  <a:srgbClr val="2E5D9E"/>
+                </a:solidFill>
+                <a:latin typeface="Calibri" pitchFamily="34" charset="0"/>
+                <a:ea typeface="Calibri" pitchFamily="34" charset="-122"/>
+                <a:cs typeface="Calibri" pitchFamily="34" charset="-120"/>
+              </a:rPr>
+              <a:t>Build Competitive Case Studies</a:t>
+            </a:r>
+            <a:endParaRPr lang="en-US" sz="1300" dirty="0"/>
+          </a:p>
+        </p:txBody>
+      </p:sp>
+      <p:sp>
+        <p:nvSpPr>
+          <p:cNvPr id="23" name="Text 21"/>
+          <p:cNvSpPr/>
+          <p:nvPr/>
+        </p:nvSpPr>
+        <p:spPr>
+          <a:xfrm>
+            <a:off x="6446520" y="4023360"/>
+            <a:ext cx="5166360" cy="548640"/>
+          </a:xfrm>
+          <a:prstGeom prst="rect">
+            <a:avLst/>
+          </a:prstGeom>
+          <a:noFill/>
+          <a:ln/>
+        </p:spPr>
+        <p:txBody>
+          <a:bodyPr wrap="square" lIns="0" tIns="0" rIns="0" bIns="0" rtlCol="0" anchor="ctr"/>
+          <a:lstStyle/>
+          <a:p>
+            <a:pPr indent="0" marL="0">
+              <a:buNone/>
+            </a:pPr>
+            <a:r>
+              <a:rPr lang="en-US" sz="1100" dirty="0">
+                <a:solidFill>
+                  <a:srgbClr val="1A2B4A"/>
+                </a:solidFill>
+                <a:latin typeface="Calibri" pitchFamily="34" charset="0"/>
+                <a:ea typeface="Calibri" pitchFamily="34" charset="-122"/>
+                <a:cs typeface="Calibri" pitchFamily="34" charset="-120"/>
+              </a:rPr>
+              <a:t>Target: Lactalis + 1 more by Aug 31</a:t>
+            </a:r>
+            <a:endParaRPr lang="en-US" sz="1100" dirty="0"/>
+          </a:p>
+        </p:txBody>
+      </p:sp>
+      <p:sp>
+        <p:nvSpPr>
+          <p:cNvPr id="24" name="Text 22"/>
+          <p:cNvSpPr/>
+          <p:nvPr/>
+        </p:nvSpPr>
+        <p:spPr>
+          <a:xfrm>
+            <a:off x="6446520" y="4663440"/>
+            <a:ext cx="5166360" cy="320040"/>
+          </a:xfrm>
+          <a:prstGeom prst="rect">
+            <a:avLst/>
+          </a:prstGeom>
+          <a:noFill/>
+          <a:ln/>
+        </p:spPr>
+        <p:txBody>
+          <a:bodyPr wrap="square" lIns="0" tIns="0" rIns="0" bIns="0" rtlCol="0" anchor="ctr"/>
+          <a:lstStyle/>
+          <a:p>
+            <a:pPr indent="0" marL="0">
+              <a:buNone/>
+            </a:pPr>
+            <a:r>
+              <a:rPr lang="en-US" sz="1000" i="1" dirty="0">
+                <a:solidFill>
+                  <a:srgbClr val="718096"/>
+                </a:solidFill>
+                <a:latin typeface="Calibri" pitchFamily="34" charset="0"/>
+                <a:ea typeface="Calibri" pitchFamily="34" charset="-122"/>
+                <a:cs typeface="Calibri" pitchFamily="34" charset="-120"/>
+              </a:rPr>
+              <a:t>Owner: Marketing</a:t>
+            </a:r>
+            <a:endParaRPr lang="en-US" sz="1000" dirty="0"/>
+          </a:p>
+        </p:txBody>
+      </p:sp>
+    </p:spTree>
+  </p:cSld>
+  <p:clrMapOvr>
+    <a:masterClrMapping/>
+  </p:clrMapOvr>
+</p:sld>
+</file>
+
+<file path=ppt/slides/slide12.xml><?xml version="1.0" encoding="utf-8"?>
+<p:sld xmlns:a="http://schemas.openxmlformats.org/drawingml/2006/main" xmlns:r="http://schemas.openxmlformats.org/officeDocument/2006/relationships" xmlns:p="http://schemas.openxmlformats.org/presentationml/2006/main">
+  <p:cSld name="Slide 12">
+    <p:bg>
+      <p:bgPr>
+        <a:solidFill>
+          <a:srgbClr val="F7F9FC"/>
+        </a:solidFill>
+      </p:bgPr>
+    </p:bg>
+    <p:spTree>
+      <p:nvGrpSpPr>
+        <p:cNvPr id="1" name=""/>
+        <p:cNvGrpSpPr/>
+        <p:nvPr/>
+      </p:nvGrpSpPr>
+      <p:grpSpPr>
+        <a:xfrm>
+          <a:off x="0" y="0"/>
+          <a:ext cx="0" cy="0"/>
+          <a:chOff x="0" y="0"/>
+          <a:chExt cx="0" cy="0"/>
+        </a:xfrm>
+      </p:grpSpPr>
+      <p:sp>
+        <p:nvSpPr>
+          <p:cNvPr id="2" name="Shape 0"/>
+          <p:cNvSpPr/>
+          <p:nvPr/>
+        </p:nvSpPr>
+        <p:spPr>
+          <a:xfrm>
+            <a:off x="0" y="0"/>
+            <a:ext cx="128016" cy="6858000"/>
+          </a:xfrm>
+          <a:prstGeom prst="rect">
+            <a:avLst/>
+          </a:prstGeom>
+          <a:solidFill>
+            <a:srgbClr val="E8612C"/>
+          </a:solidFill>
+          <a:ln/>
+        </p:spPr>
+      </p:sp>
+      <p:sp>
+        <p:nvSpPr>
+          <p:cNvPr id="3" name="Text 1"/>
+          <p:cNvSpPr/>
+          <p:nvPr/>
+        </p:nvSpPr>
+        <p:spPr>
+          <a:xfrm>
+            <a:off x="365760" y="201168"/>
+            <a:ext cx="11430000" cy="502920"/>
+          </a:xfrm>
+          <a:prstGeom prst="rect">
+            <a:avLst/>
+          </a:prstGeom>
+          <a:noFill/>
+          <a:ln/>
+        </p:spPr>
+        <p:txBody>
+          <a:bodyPr wrap="square" lIns="0" tIns="0" rIns="0" bIns="0" rtlCol="0" anchor="ctr"/>
+          <a:lstStyle/>
+          <a:p>
+            <a:pPr indent="0" marL="0">
+              <a:buNone/>
+            </a:pPr>
+            <a:r>
+              <a:rPr lang="en-US" sz="2400" b="1" dirty="0">
+                <a:solidFill>
+                  <a:srgbClr val="1A2B4A"/>
+                </a:solidFill>
+                <a:latin typeface="Calibri" pitchFamily="34" charset="0"/>
+                <a:ea typeface="Calibri" pitchFamily="34" charset="-122"/>
+                <a:cs typeface="Calibri" pitchFamily="34" charset="-120"/>
+              </a:rPr>
               <a:t>Supplemental: DSIM Model Infographics</a:t>
             </a:r>
             <a:endParaRPr lang="en-US" sz="2400" dirty="0"/>
@@ -5162,7 +6098,7 @@
                 <a:ea typeface="Calibri" pitchFamily="34" charset="-122"/>
                 <a:cs typeface="Calibri" pitchFamily="34" charset="-120"/>
               </a:rPr>
-              <a:t>Lactalis PoC: Proof of Impact</a:t>
+              <a:t>Who Buys DSIM — Three Entry Points</a:t>
             </a:r>
             <a:endParaRPr lang="en-US" sz="2400" dirty="0"/>
           </a:p>
@@ -5170,23 +6106,42 @@
       </p:sp>
       <p:sp>
         <p:nvSpPr>
-          <p:cNvPr id="4" name="Shape 2"/>
-          <p:cNvSpPr/>
-          <p:nvPr/>
-        </p:nvSpPr>
-        <p:spPr>
-          <a:xfrm>
-            <a:off x="365760" y="1115568"/>
-            <a:ext cx="11430000" cy="18288"/>
-          </a:xfrm>
-          <a:prstGeom prst="rect">
-            <a:avLst/>
-          </a:prstGeom>
-          <a:solidFill>
-            <a:srgbClr val="DDE4F0"/>
-          </a:solidFill>
-          <a:ln/>
-        </p:spPr>
+          <p:cNvPr id="4" name="Text 2"/>
+          <p:cNvSpPr/>
+          <p:nvPr/>
+        </p:nvSpPr>
+        <p:spPr>
+          <a:xfrm>
+            <a:off x="365760" y="731520"/>
+            <a:ext cx="11430000" cy="256032"/>
+          </a:xfrm>
+          <a:prstGeom prst="rect">
+            <a:avLst/>
+          </a:prstGeom>
+          <a:noFill/>
+          <a:ln/>
+        </p:spPr>
+        <p:txBody>
+          <a:bodyPr wrap="square" lIns="0" tIns="0" rIns="0" bIns="0" rtlCol="0" anchor="ctr"/>
+          <a:lstStyle/>
+          <a:p>
+            <a:pPr indent="0" marL="0">
+              <a:buNone/>
+            </a:pPr>
+            <a:r>
+              <a:rPr lang="en-US" sz="1100" i="1" dirty="0">
+                <a:solidFill>
+                  <a:srgbClr val="718096"/>
+                </a:solidFill>
+                <a:latin typeface="Calibri" pitchFamily="34" charset="0"/>
+                <a:ea typeface="Calibri" pitchFamily="34" charset="-122"/>
+                <a:cs typeface="Calibri" pitchFamily="34" charset="-120"/>
+              </a:rPr>
+              <a:t>Positioning: Option B — Sales decomposition (which lever drove Walmart sales, at the store cluster level)</a:t>
+            </a:r>
+            <a:endParaRPr lang="en-US" sz="1100" dirty="0"/>
+          </a:p>
+        </p:txBody>
       </p:sp>
       <p:sp>
         <p:nvSpPr>
@@ -5196,8 +6151,8 @@
         </p:nvSpPr>
         <p:spPr>
           <a:xfrm>
-            <a:off x="365760" y="1298448"/>
-            <a:ext cx="3657600" cy="1645920"/>
+            <a:off x="365760" y="1078992"/>
+            <a:ext cx="3657600" cy="5394960"/>
           </a:xfrm>
           <a:prstGeom prst="rect">
             <a:avLst/>
@@ -5223,14 +6178,14 @@
         </p:nvSpPr>
         <p:spPr>
           <a:xfrm>
-            <a:off x="365760" y="1298448"/>
-            <a:ext cx="3657600" cy="73152"/>
-          </a:xfrm>
-          <a:prstGeom prst="rect">
-            <a:avLst/>
-          </a:prstGeom>
-          <a:solidFill>
-            <a:srgbClr val="1D8A5B"/>
+            <a:off x="365760" y="1078992"/>
+            <a:ext cx="3657600" cy="91440"/>
+          </a:xfrm>
+          <a:prstGeom prst="rect">
+            <a:avLst/>
+          </a:prstGeom>
+          <a:solidFill>
+            <a:srgbClr val="2E5D9E"/>
           </a:solidFill>
           <a:ln/>
         </p:spPr>
@@ -5243,34 +6198,51 @@
         </p:nvSpPr>
         <p:spPr>
           <a:xfrm>
-            <a:off x="548640" y="1435608"/>
-            <a:ext cx="3291840" cy="640080"/>
-          </a:xfrm>
-          <a:prstGeom prst="rect">
-            <a:avLst/>
-          </a:prstGeom>
-          <a:noFill/>
-          <a:ln/>
-        </p:spPr>
-        <p:txBody>
-          <a:bodyPr wrap="square" lIns="0" tIns="0" rIns="0" bIns="0" rtlCol="0" anchor="ctr"/>
-          <a:lstStyle/>
-          <a:p>
-            <a:pPr indent="0" marL="0">
-              <a:buNone/>
-            </a:pPr>
-            <a:r>
-              <a:rPr lang="en-US" sz="4000" b="1" dirty="0">
-                <a:solidFill>
-                  <a:srgbClr val="1D8A5B"/>
-                </a:solidFill>
-                <a:latin typeface="Calibri" pitchFamily="34" charset="0"/>
-                <a:ea typeface="Calibri" pitchFamily="34" charset="-122"/>
-                <a:cs typeface="Calibri" pitchFamily="34" charset="-120"/>
-              </a:rPr>
-              <a:t>91%</a:t>
-            </a:r>
-            <a:endParaRPr lang="en-US" sz="4000" dirty="0"/>
+            <a:off x="548640" y="1216152"/>
+            <a:ext cx="3291840" cy="502920"/>
+          </a:xfrm>
+          <a:prstGeom prst="rect">
+            <a:avLst/>
+          </a:prstGeom>
+          <a:noFill/>
+          <a:ln/>
+        </p:spPr>
+        <p:txBody>
+          <a:bodyPr wrap="square" lIns="0" tIns="0" rIns="0" bIns="0" rtlCol="0" anchor="ctr"/>
+          <a:lstStyle/>
+          <a:p>
+            <a:pPr indent="0" marL="0">
+              <a:buNone/>
+            </a:pPr>
+            <a:r>
+              <a:rPr lang="en-US" sz="1300" b="1" dirty="0">
+                <a:solidFill>
+                  <a:srgbClr val="2E5D9E"/>
+                </a:solidFill>
+                <a:latin typeface="Calibri" pitchFamily="34" charset="0"/>
+                <a:ea typeface="Calibri" pitchFamily="34" charset="-122"/>
+                <a:cs typeface="Calibri" pitchFamily="34" charset="-120"/>
+              </a:rPr>
+              <a:t>eCommerce /</a:t>
+            </a:r>
+            <a:endParaRPr lang="en-US" sz="1300" dirty="0"/>
+          </a:p>
+          <a:p>
+            <a:pPr indent="0" marL="0">
+              <a:buNone/>
+            </a:pPr>
+            <a:r>
+              <a:rPr lang="en-US" sz="1300" b="1" dirty="0">
+                <a:solidFill>
+                  <a:srgbClr val="2E5D9E"/>
+                </a:solidFill>
+                <a:latin typeface="Calibri" pitchFamily="34" charset="0"/>
+                <a:ea typeface="Calibri" pitchFamily="34" charset="-122"/>
+                <a:cs typeface="Calibri" pitchFamily="34" charset="-120"/>
+              </a:rPr>
+              <a:t>Retail Media Lead</a:t>
+            </a:r>
+            <a:endParaRPr lang="en-US" sz="1300" dirty="0"/>
           </a:p>
         </p:txBody>
       </p:sp>
@@ -5282,24 +6254,178 @@
         </p:nvSpPr>
         <p:spPr>
           <a:xfrm>
-            <a:off x="548640" y="2075688"/>
-            <a:ext cx="3291840" cy="594360"/>
-          </a:xfrm>
-          <a:prstGeom prst="rect">
-            <a:avLst/>
-          </a:prstGeom>
-          <a:noFill/>
-          <a:ln/>
-        </p:spPr>
-        <p:txBody>
-          <a:bodyPr wrap="square" lIns="0" tIns="0" rIns="0" bIns="0" rtlCol="0" anchor="ctr"/>
-          <a:lstStyle/>
-          <a:p>
-            <a:pPr indent="0" marL="0">
-              <a:buNone/>
-            </a:pPr>
-            <a:r>
-              <a:rPr lang="en-US" sz="1100" dirty="0">
+            <a:off x="548640" y="1773936"/>
+            <a:ext cx="502920" cy="201168"/>
+          </a:xfrm>
+          <a:prstGeom prst="rect">
+            <a:avLst/>
+          </a:prstGeom>
+          <a:noFill/>
+          <a:ln/>
+        </p:spPr>
+        <p:txBody>
+          <a:bodyPr wrap="square" lIns="0" tIns="0" rIns="0" bIns="0" rtlCol="0" anchor="ctr"/>
+          <a:lstStyle/>
+          <a:p>
+            <a:pPr indent="0" marL="0">
+              <a:buNone/>
+            </a:pPr>
+            <a:r>
+              <a:rPr lang="en-US" sz="850" b="1" dirty="0">
+                <a:solidFill>
+                  <a:srgbClr val="718096"/>
+                </a:solidFill>
+                <a:latin typeface="Calibri" pitchFamily="34" charset="0"/>
+                <a:ea typeface="Calibri" pitchFamily="34" charset="-122"/>
+                <a:cs typeface="Calibri" pitchFamily="34" charset="-120"/>
+              </a:rPr>
+              <a:t>Owns:</a:t>
+            </a:r>
+            <a:endParaRPr lang="en-US" sz="850" dirty="0"/>
+          </a:p>
+        </p:txBody>
+      </p:sp>
+      <p:sp>
+        <p:nvSpPr>
+          <p:cNvPr id="9" name="Text 7"/>
+          <p:cNvSpPr/>
+          <p:nvPr/>
+        </p:nvSpPr>
+        <p:spPr>
+          <a:xfrm>
+            <a:off x="1051560" y="1773936"/>
+            <a:ext cx="2788920" cy="365760"/>
+          </a:xfrm>
+          <a:prstGeom prst="rect">
+            <a:avLst/>
+          </a:prstGeom>
+          <a:noFill/>
+          <a:ln/>
+        </p:spPr>
+        <p:txBody>
+          <a:bodyPr wrap="square" lIns="0" tIns="0" rIns="0" bIns="0" rtlCol="0" anchor="ctr"/>
+          <a:lstStyle/>
+          <a:p>
+            <a:pPr indent="0" marL="0">
+              <a:buNone/>
+            </a:pPr>
+            <a:r>
+              <a:rPr lang="en-US" sz="850" i="1" dirty="0">
+                <a:solidFill>
+                  <a:srgbClr val="718096"/>
+                </a:solidFill>
+                <a:latin typeface="Calibri" pitchFamily="34" charset="0"/>
+                <a:ea typeface="Calibri" pitchFamily="34" charset="-122"/>
+                <a:cs typeface="Calibri" pitchFamily="34" charset="-120"/>
+              </a:rPr>
+              <a:t>Walmart Connect budget</a:t>
+            </a:r>
+            <a:endParaRPr lang="en-US" sz="850" dirty="0"/>
+          </a:p>
+          <a:p>
+            <a:pPr indent="0" marL="0">
+              <a:buNone/>
+            </a:pPr>
+            <a:r>
+              <a:rPr lang="en-US" sz="850" i="1" dirty="0">
+                <a:solidFill>
+                  <a:srgbClr val="718096"/>
+                </a:solidFill>
+                <a:latin typeface="Calibri" pitchFamily="34" charset="0"/>
+                <a:ea typeface="Calibri" pitchFamily="34" charset="-122"/>
+                <a:cs typeface="Calibri" pitchFamily="34" charset="-120"/>
+              </a:rPr>
+              <a:t>($500K–$5M+/yr)</a:t>
+            </a:r>
+            <a:endParaRPr lang="en-US" sz="850" dirty="0"/>
+          </a:p>
+        </p:txBody>
+      </p:sp>
+      <p:sp>
+        <p:nvSpPr>
+          <p:cNvPr id="10" name="Shape 8"/>
+          <p:cNvSpPr/>
+          <p:nvPr/>
+        </p:nvSpPr>
+        <p:spPr>
+          <a:xfrm>
+            <a:off x="548640" y="2231136"/>
+            <a:ext cx="3291840" cy="9144"/>
+          </a:xfrm>
+          <a:prstGeom prst="rect">
+            <a:avLst/>
+          </a:prstGeom>
+          <a:solidFill>
+            <a:srgbClr val="DDE4F0"/>
+          </a:solidFill>
+          <a:ln/>
+        </p:spPr>
+      </p:sp>
+      <p:sp>
+        <p:nvSpPr>
+          <p:cNvPr id="11" name="Text 9"/>
+          <p:cNvSpPr/>
+          <p:nvPr/>
+        </p:nvSpPr>
+        <p:spPr>
+          <a:xfrm>
+            <a:off x="548640" y="2331720"/>
+            <a:ext cx="3291840" cy="201168"/>
+          </a:xfrm>
+          <a:prstGeom prst="rect">
+            <a:avLst/>
+          </a:prstGeom>
+          <a:noFill/>
+          <a:ln/>
+        </p:spPr>
+        <p:txBody>
+          <a:bodyPr wrap="square" lIns="0" tIns="0" rIns="0" bIns="0" rtlCol="0" anchor="ctr"/>
+          <a:lstStyle/>
+          <a:p>
+            <a:pPr indent="0" marL="0">
+              <a:buNone/>
+            </a:pPr>
+            <a:r>
+              <a:rPr lang="en-US" sz="850" b="1" dirty="0">
+                <a:solidFill>
+                  <a:srgbClr val="1A2B4A"/>
+                </a:solidFill>
+                <a:latin typeface="Calibri" pitchFamily="34" charset="0"/>
+                <a:ea typeface="Calibri" pitchFamily="34" charset="-122"/>
+                <a:cs typeface="Calibri" pitchFamily="34" charset="-120"/>
+              </a:rPr>
+              <a:t>Pain today:</a:t>
+            </a:r>
+            <a:endParaRPr lang="en-US" sz="850" dirty="0"/>
+          </a:p>
+        </p:txBody>
+      </p:sp>
+      <p:sp>
+        <p:nvSpPr>
+          <p:cNvPr id="12" name="Text 10"/>
+          <p:cNvSpPr/>
+          <p:nvPr/>
+        </p:nvSpPr>
+        <p:spPr>
+          <a:xfrm>
+            <a:off x="548640" y="2551176"/>
+            <a:ext cx="3291840" cy="868680"/>
+          </a:xfrm>
+          <a:prstGeom prst="rect">
+            <a:avLst/>
+          </a:prstGeom>
+          <a:noFill/>
+          <a:ln/>
+        </p:spPr>
+        <p:txBody>
+          <a:bodyPr wrap="square" lIns="0" tIns="0" rIns="0" bIns="0" rtlCol="0" anchor="ctr"/>
+          <a:lstStyle/>
+          <a:p>
+            <a:pPr indent="0" marL="0">
+              <a:buNone/>
+            </a:pPr>
+            <a:r>
+              <a:rPr lang="en-US" sz="850" dirty="0">
                 <a:solidFill>
                   <a:srgbClr val="4A5568"/>
                 </a:solidFill>
@@ -5307,22 +6433,179 @@
                 <a:ea typeface="Calibri" pitchFamily="34" charset="-122"/>
                 <a:cs typeface="Calibri" pitchFamily="34" charset="-120"/>
               </a:rPr>
-              <a:t>R² / Model Fit</a:t>
-            </a:r>
-            <a:endParaRPr lang="en-US" sz="1100" dirty="0"/>
-          </a:p>
-        </p:txBody>
-      </p:sp>
-      <p:sp>
-        <p:nvSpPr>
-          <p:cNvPr id="9" name="Shape 7"/>
-          <p:cNvSpPr/>
-          <p:nvPr/>
-        </p:nvSpPr>
-        <p:spPr>
-          <a:xfrm>
-            <a:off x="4279392" y="1298448"/>
-            <a:ext cx="3657600" cy="1645920"/>
+              <a:t>ROAS dropped. Doesn't know if it's a media problem or a shelf problem (72% in-stock eating impressions).</a:t>
+            </a:r>
+            <a:endParaRPr lang="en-US" sz="850" dirty="0"/>
+          </a:p>
+        </p:txBody>
+      </p:sp>
+      <p:sp>
+        <p:nvSpPr>
+          <p:cNvPr id="13" name="Shape 11"/>
+          <p:cNvSpPr/>
+          <p:nvPr/>
+        </p:nvSpPr>
+        <p:spPr>
+          <a:xfrm>
+            <a:off x="548640" y="3493008"/>
+            <a:ext cx="3291840" cy="9144"/>
+          </a:xfrm>
+          <a:prstGeom prst="rect">
+            <a:avLst/>
+          </a:prstGeom>
+          <a:solidFill>
+            <a:srgbClr val="DDE4F0"/>
+          </a:solidFill>
+          <a:ln/>
+        </p:spPr>
+      </p:sp>
+      <p:sp>
+        <p:nvSpPr>
+          <p:cNvPr id="14" name="Text 12"/>
+          <p:cNvSpPr/>
+          <p:nvPr/>
+        </p:nvSpPr>
+        <p:spPr>
+          <a:xfrm>
+            <a:off x="548640" y="3593592"/>
+            <a:ext cx="3291840" cy="201168"/>
+          </a:xfrm>
+          <a:prstGeom prst="rect">
+            <a:avLst/>
+          </a:prstGeom>
+          <a:noFill/>
+          <a:ln/>
+        </p:spPr>
+        <p:txBody>
+          <a:bodyPr wrap="square" lIns="0" tIns="0" rIns="0" bIns="0" rtlCol="0" anchor="ctr"/>
+          <a:lstStyle/>
+          <a:p>
+            <a:pPr indent="0" marL="0">
+              <a:buNone/>
+            </a:pPr>
+            <a:r>
+              <a:rPr lang="en-US" sz="850" b="1" dirty="0">
+                <a:solidFill>
+                  <a:srgbClr val="2E5D9E"/>
+                </a:solidFill>
+                <a:latin typeface="Calibri" pitchFamily="34" charset="0"/>
+                <a:ea typeface="Calibri" pitchFamily="34" charset="-122"/>
+                <a:cs typeface="Calibri" pitchFamily="34" charset="-120"/>
+              </a:rPr>
+              <a:t>DSIM gives them:</a:t>
+            </a:r>
+            <a:endParaRPr lang="en-US" sz="850" dirty="0"/>
+          </a:p>
+        </p:txBody>
+      </p:sp>
+      <p:sp>
+        <p:nvSpPr>
+          <p:cNvPr id="15" name="Text 13"/>
+          <p:cNvSpPr/>
+          <p:nvPr/>
+        </p:nvSpPr>
+        <p:spPr>
+          <a:xfrm>
+            <a:off x="548640" y="3813048"/>
+            <a:ext cx="3291840" cy="868680"/>
+          </a:xfrm>
+          <a:prstGeom prst="rect">
+            <a:avLst/>
+          </a:prstGeom>
+          <a:noFill/>
+          <a:ln/>
+        </p:spPr>
+        <p:txBody>
+          <a:bodyPr wrap="square" lIns="0" tIns="0" rIns="0" bIns="0" rtlCol="0" anchor="ctr"/>
+          <a:lstStyle/>
+          <a:p>
+            <a:pPr indent="0" marL="0">
+              <a:buNone/>
+            </a:pPr>
+            <a:r>
+              <a:rPr lang="en-US" sz="850" dirty="0">
+                <a:solidFill>
+                  <a:srgbClr val="4A5568"/>
+                </a:solidFill>
+                <a:latin typeface="Calibri" pitchFamily="34" charset="0"/>
+                <a:ea typeface="Calibri" pitchFamily="34" charset="-122"/>
+                <a:cs typeface="Calibri" pitchFamily="34" charset="-120"/>
+              </a:rPr>
+              <a:t>Shows which lever (availability, SoS, content, media) drove or capped the last campaign — and which clusters to fix first.</a:t>
+            </a:r>
+            <a:endParaRPr lang="en-US" sz="850" dirty="0"/>
+          </a:p>
+        </p:txBody>
+      </p:sp>
+      <p:sp>
+        <p:nvSpPr>
+          <p:cNvPr id="16" name="Shape 14"/>
+          <p:cNvSpPr/>
+          <p:nvPr/>
+        </p:nvSpPr>
+        <p:spPr>
+          <a:xfrm>
+            <a:off x="548640" y="4754880"/>
+            <a:ext cx="3291840" cy="9144"/>
+          </a:xfrm>
+          <a:prstGeom prst="rect">
+            <a:avLst/>
+          </a:prstGeom>
+          <a:solidFill>
+            <a:srgbClr val="DDE4F0"/>
+          </a:solidFill>
+          <a:ln/>
+        </p:spPr>
+      </p:sp>
+      <p:sp>
+        <p:nvSpPr>
+          <p:cNvPr id="17" name="Text 15"/>
+          <p:cNvSpPr/>
+          <p:nvPr/>
+        </p:nvSpPr>
+        <p:spPr>
+          <a:xfrm>
+            <a:off x="548640" y="4846320"/>
+            <a:ext cx="3291840" cy="1371600"/>
+          </a:xfrm>
+          <a:prstGeom prst="rect">
+            <a:avLst/>
+          </a:prstGeom>
+          <a:noFill/>
+          <a:ln/>
+        </p:spPr>
+        <p:txBody>
+          <a:bodyPr wrap="square" lIns="0" tIns="0" rIns="0" bIns="0" rtlCol="0" anchor="ctr"/>
+          <a:lstStyle/>
+          <a:p>
+            <a:pPr indent="0" marL="0">
+              <a:buNone/>
+            </a:pPr>
+            <a:r>
+              <a:rPr lang="en-US" sz="800" b="1" i="1" dirty="0">
+                <a:solidFill>
+                  <a:srgbClr val="2E5D9E"/>
+                </a:solidFill>
+                <a:latin typeface="Calibri" pitchFamily="34" charset="0"/>
+                <a:ea typeface="Calibri" pitchFamily="34" charset="-122"/>
+                <a:cs typeface="Calibri" pitchFamily="34" charset="-120"/>
+              </a:rPr>
+              <a:t>“Your ROAS is what the platform says happened. DSIM shows what actually drove the sale.”</a:t>
+            </a:r>
+            <a:endParaRPr lang="en-US" sz="800" dirty="0"/>
+          </a:p>
+        </p:txBody>
+      </p:sp>
+      <p:sp>
+        <p:nvSpPr>
+          <p:cNvPr id="18" name="Shape 16"/>
+          <p:cNvSpPr/>
+          <p:nvPr/>
+        </p:nvSpPr>
+        <p:spPr>
+          <a:xfrm>
+            <a:off x="4279392" y="1078992"/>
+            <a:ext cx="3657600" cy="5394960"/>
           </a:xfrm>
           <a:prstGeom prst="rect">
             <a:avLst/>
@@ -5342,89 +6625,260 @@
       </p:sp>
       <p:sp>
         <p:nvSpPr>
-          <p:cNvPr id="10" name="Shape 8"/>
-          <p:cNvSpPr/>
-          <p:nvPr/>
-        </p:nvSpPr>
-        <p:spPr>
-          <a:xfrm>
-            <a:off x="4279392" y="1298448"/>
-            <a:ext cx="3657600" cy="73152"/>
-          </a:xfrm>
-          <a:prstGeom prst="rect">
-            <a:avLst/>
-          </a:prstGeom>
-          <a:solidFill>
-            <a:srgbClr val="1D8A5B"/>
-          </a:solidFill>
-          <a:ln/>
-        </p:spPr>
-      </p:sp>
-      <p:sp>
-        <p:nvSpPr>
-          <p:cNvPr id="11" name="Text 9"/>
-          <p:cNvSpPr/>
-          <p:nvPr/>
-        </p:nvSpPr>
-        <p:spPr>
-          <a:xfrm>
-            <a:off x="4462272" y="1435608"/>
-            <a:ext cx="3291840" cy="640080"/>
-          </a:xfrm>
-          <a:prstGeom prst="rect">
-            <a:avLst/>
-          </a:prstGeom>
-          <a:noFill/>
-          <a:ln/>
-        </p:spPr>
-        <p:txBody>
-          <a:bodyPr wrap="square" lIns="0" tIns="0" rIns="0" bIns="0" rtlCol="0" anchor="ctr"/>
-          <a:lstStyle/>
-          <a:p>
-            <a:pPr indent="0" marL="0">
-              <a:buNone/>
-            </a:pPr>
-            <a:r>
-              <a:rPr lang="en-US" sz="4000" b="1" dirty="0">
-                <a:solidFill>
-                  <a:srgbClr val="1D8A5B"/>
-                </a:solidFill>
-                <a:latin typeface="Calibri" pitchFamily="34" charset="0"/>
-                <a:ea typeface="Calibri" pitchFamily="34" charset="-122"/>
-                <a:cs typeface="Calibri" pitchFamily="34" charset="-120"/>
-              </a:rPr>
-              <a:t>5.9%</a:t>
-            </a:r>
-            <a:endParaRPr lang="en-US" sz="4000" dirty="0"/>
-          </a:p>
-        </p:txBody>
-      </p:sp>
-      <p:sp>
-        <p:nvSpPr>
-          <p:cNvPr id="12" name="Text 10"/>
-          <p:cNvSpPr/>
-          <p:nvPr/>
-        </p:nvSpPr>
-        <p:spPr>
-          <a:xfrm>
-            <a:off x="4462272" y="2075688"/>
-            <a:ext cx="3291840" cy="594360"/>
-          </a:xfrm>
-          <a:prstGeom prst="rect">
-            <a:avLst/>
-          </a:prstGeom>
-          <a:noFill/>
-          <a:ln/>
-        </p:spPr>
-        <p:txBody>
-          <a:bodyPr wrap="square" lIns="0" tIns="0" rIns="0" bIns="0" rtlCol="0" anchor="ctr"/>
-          <a:lstStyle/>
-          <a:p>
-            <a:pPr indent="0" marL="0">
-              <a:buNone/>
-            </a:pPr>
-            <a:r>
-              <a:rPr lang="en-US" sz="1100" dirty="0">
+          <p:cNvPr id="19" name="Shape 17"/>
+          <p:cNvSpPr/>
+          <p:nvPr/>
+        </p:nvSpPr>
+        <p:spPr>
+          <a:xfrm>
+            <a:off x="4279392" y="1078992"/>
+            <a:ext cx="3657600" cy="91440"/>
+          </a:xfrm>
+          <a:prstGeom prst="rect">
+            <a:avLst/>
+          </a:prstGeom>
+          <a:solidFill>
+            <a:srgbClr val="E8612C"/>
+          </a:solidFill>
+          <a:ln/>
+        </p:spPr>
+      </p:sp>
+      <p:sp>
+        <p:nvSpPr>
+          <p:cNvPr id="20" name="Text 18"/>
+          <p:cNvSpPr/>
+          <p:nvPr/>
+        </p:nvSpPr>
+        <p:spPr>
+          <a:xfrm>
+            <a:off x="4462272" y="1216152"/>
+            <a:ext cx="3291840" cy="502920"/>
+          </a:xfrm>
+          <a:prstGeom prst="rect">
+            <a:avLst/>
+          </a:prstGeom>
+          <a:noFill/>
+          <a:ln/>
+        </p:spPr>
+        <p:txBody>
+          <a:bodyPr wrap="square" lIns="0" tIns="0" rIns="0" bIns="0" rtlCol="0" anchor="ctr"/>
+          <a:lstStyle/>
+          <a:p>
+            <a:pPr indent="0" marL="0">
+              <a:buNone/>
+            </a:pPr>
+            <a:r>
+              <a:rPr lang="en-US" sz="1300" b="1" dirty="0">
+                <a:solidFill>
+                  <a:srgbClr val="E8612C"/>
+                </a:solidFill>
+                <a:latin typeface="Calibri" pitchFamily="34" charset="0"/>
+                <a:ea typeface="Calibri" pitchFamily="34" charset="-122"/>
+                <a:cs typeface="Calibri" pitchFamily="34" charset="-120"/>
+              </a:rPr>
+              <a:t>Finance /</a:t>
+            </a:r>
+            <a:endParaRPr lang="en-US" sz="1300" dirty="0"/>
+          </a:p>
+          <a:p>
+            <a:pPr indent="0" marL="0">
+              <a:buNone/>
+            </a:pPr>
+            <a:r>
+              <a:rPr lang="en-US" sz="1300" b="1" dirty="0">
+                <a:solidFill>
+                  <a:srgbClr val="E8612C"/>
+                </a:solidFill>
+                <a:latin typeface="Calibri" pitchFamily="34" charset="0"/>
+                <a:ea typeface="Calibri" pitchFamily="34" charset="-122"/>
+                <a:cs typeface="Calibri" pitchFamily="34" charset="-120"/>
+              </a:rPr>
+              <a:t>RGM Leader</a:t>
+            </a:r>
+            <a:endParaRPr lang="en-US" sz="1300" dirty="0"/>
+          </a:p>
+        </p:txBody>
+      </p:sp>
+      <p:sp>
+        <p:nvSpPr>
+          <p:cNvPr id="21" name="Text 19"/>
+          <p:cNvSpPr/>
+          <p:nvPr/>
+        </p:nvSpPr>
+        <p:spPr>
+          <a:xfrm>
+            <a:off x="4462272" y="1773936"/>
+            <a:ext cx="502920" cy="201168"/>
+          </a:xfrm>
+          <a:prstGeom prst="rect">
+            <a:avLst/>
+          </a:prstGeom>
+          <a:noFill/>
+          <a:ln/>
+        </p:spPr>
+        <p:txBody>
+          <a:bodyPr wrap="square" lIns="0" tIns="0" rIns="0" bIns="0" rtlCol="0" anchor="ctr"/>
+          <a:lstStyle/>
+          <a:p>
+            <a:pPr indent="0" marL="0">
+              <a:buNone/>
+            </a:pPr>
+            <a:r>
+              <a:rPr lang="en-US" sz="850" b="1" dirty="0">
+                <a:solidFill>
+                  <a:srgbClr val="718096"/>
+                </a:solidFill>
+                <a:latin typeface="Calibri" pitchFamily="34" charset="0"/>
+                <a:ea typeface="Calibri" pitchFamily="34" charset="-122"/>
+                <a:cs typeface="Calibri" pitchFamily="34" charset="-120"/>
+              </a:rPr>
+              <a:t>Owns:</a:t>
+            </a:r>
+            <a:endParaRPr lang="en-US" sz="850" dirty="0"/>
+          </a:p>
+        </p:txBody>
+      </p:sp>
+      <p:sp>
+        <p:nvSpPr>
+          <p:cNvPr id="22" name="Text 20"/>
+          <p:cNvSpPr/>
+          <p:nvPr/>
+        </p:nvSpPr>
+        <p:spPr>
+          <a:xfrm>
+            <a:off x="4965192" y="1773936"/>
+            <a:ext cx="2788920" cy="365760"/>
+          </a:xfrm>
+          <a:prstGeom prst="rect">
+            <a:avLst/>
+          </a:prstGeom>
+          <a:noFill/>
+          <a:ln/>
+        </p:spPr>
+        <p:txBody>
+          <a:bodyPr wrap="square" lIns="0" tIns="0" rIns="0" bIns="0" rtlCol="0" anchor="ctr"/>
+          <a:lstStyle/>
+          <a:p>
+            <a:pPr indent="0" marL="0">
+              <a:buNone/>
+            </a:pPr>
+            <a:r>
+              <a:rPr lang="en-US" sz="850" i="1" dirty="0">
+                <a:solidFill>
+                  <a:srgbClr val="718096"/>
+                </a:solidFill>
+                <a:latin typeface="Calibri" pitchFamily="34" charset="0"/>
+                <a:ea typeface="Calibri" pitchFamily="34" charset="-122"/>
+                <a:cs typeface="Calibri" pitchFamily="34" charset="-120"/>
+              </a:rPr>
+              <a:t>Budget approval, trade spend,</a:t>
+            </a:r>
+            <a:endParaRPr lang="en-US" sz="850" dirty="0"/>
+          </a:p>
+          <a:p>
+            <a:pPr indent="0" marL="0">
+              <a:buNone/>
+            </a:pPr>
+            <a:r>
+              <a:rPr lang="en-US" sz="850" i="1" dirty="0">
+                <a:solidFill>
+                  <a:srgbClr val="718096"/>
+                </a:solidFill>
+                <a:latin typeface="Calibri" pitchFamily="34" charset="0"/>
+                <a:ea typeface="Calibri" pitchFamily="34" charset="-122"/>
+                <a:cs typeface="Calibri" pitchFamily="34" charset="-120"/>
+              </a:rPr>
+              <a:t>JBP financial commitments</a:t>
+            </a:r>
+            <a:endParaRPr lang="en-US" sz="850" dirty="0"/>
+          </a:p>
+        </p:txBody>
+      </p:sp>
+      <p:sp>
+        <p:nvSpPr>
+          <p:cNvPr id="23" name="Shape 21"/>
+          <p:cNvSpPr/>
+          <p:nvPr/>
+        </p:nvSpPr>
+        <p:spPr>
+          <a:xfrm>
+            <a:off x="4462272" y="2231136"/>
+            <a:ext cx="3291840" cy="9144"/>
+          </a:xfrm>
+          <a:prstGeom prst="rect">
+            <a:avLst/>
+          </a:prstGeom>
+          <a:solidFill>
+            <a:srgbClr val="DDE4F0"/>
+          </a:solidFill>
+          <a:ln/>
+        </p:spPr>
+      </p:sp>
+      <p:sp>
+        <p:nvSpPr>
+          <p:cNvPr id="24" name="Text 22"/>
+          <p:cNvSpPr/>
+          <p:nvPr/>
+        </p:nvSpPr>
+        <p:spPr>
+          <a:xfrm>
+            <a:off x="4462272" y="2331720"/>
+            <a:ext cx="3291840" cy="201168"/>
+          </a:xfrm>
+          <a:prstGeom prst="rect">
+            <a:avLst/>
+          </a:prstGeom>
+          <a:noFill/>
+          <a:ln/>
+        </p:spPr>
+        <p:txBody>
+          <a:bodyPr wrap="square" lIns="0" tIns="0" rIns="0" bIns="0" rtlCol="0" anchor="ctr"/>
+          <a:lstStyle/>
+          <a:p>
+            <a:pPr indent="0" marL="0">
+              <a:buNone/>
+            </a:pPr>
+            <a:r>
+              <a:rPr lang="en-US" sz="850" b="1" dirty="0">
+                <a:solidFill>
+                  <a:srgbClr val="1A2B4A"/>
+                </a:solidFill>
+                <a:latin typeface="Calibri" pitchFamily="34" charset="0"/>
+                <a:ea typeface="Calibri" pitchFamily="34" charset="-122"/>
+                <a:cs typeface="Calibri" pitchFamily="34" charset="-120"/>
+              </a:rPr>
+              <a:t>Pain today:</a:t>
+            </a:r>
+            <a:endParaRPr lang="en-US" sz="850" dirty="0"/>
+          </a:p>
+        </p:txBody>
+      </p:sp>
+      <p:sp>
+        <p:nvSpPr>
+          <p:cNvPr id="25" name="Text 23"/>
+          <p:cNvSpPr/>
+          <p:nvPr/>
+        </p:nvSpPr>
+        <p:spPr>
+          <a:xfrm>
+            <a:off x="4462272" y="2551176"/>
+            <a:ext cx="3291840" cy="868680"/>
+          </a:xfrm>
+          <a:prstGeom prst="rect">
+            <a:avLst/>
+          </a:prstGeom>
+          <a:noFill/>
+          <a:ln/>
+        </p:spPr>
+        <p:txBody>
+          <a:bodyPr wrap="square" lIns="0" tIns="0" rIns="0" bIns="0" rtlCol="0" anchor="ctr"/>
+          <a:lstStyle/>
+          <a:p>
+            <a:pPr indent="0" marL="0">
+              <a:buNone/>
+            </a:pPr>
+            <a:r>
+              <a:rPr lang="en-US" sz="850" dirty="0">
                 <a:solidFill>
                   <a:srgbClr val="4A5568"/>
                 </a:solidFill>
@@ -5432,22 +6886,179 @@
                 <a:ea typeface="Calibri" pitchFamily="34" charset="-122"/>
                 <a:cs typeface="Calibri" pitchFamily="34" charset="-120"/>
               </a:rPr>
-              <a:t>MAPE / Accuracy</a:t>
-            </a:r>
-            <a:endParaRPr lang="en-US" sz="1100" dirty="0"/>
-          </a:p>
-        </p:txBody>
-      </p:sp>
-      <p:sp>
-        <p:nvSpPr>
-          <p:cNvPr id="13" name="Shape 11"/>
-          <p:cNvSpPr/>
-          <p:nvPr/>
-        </p:nvSpPr>
-        <p:spPr>
-          <a:xfrm>
-            <a:off x="8193024" y="1298448"/>
-            <a:ext cx="3657600" cy="1645920"/>
+              <a:t>eCommerce asks for more Walmart Connect budget. No independent data to verify if it's justified or if a shelf fix would cost less.</a:t>
+            </a:r>
+            <a:endParaRPr lang="en-US" sz="850" dirty="0"/>
+          </a:p>
+        </p:txBody>
+      </p:sp>
+      <p:sp>
+        <p:nvSpPr>
+          <p:cNvPr id="26" name="Shape 24"/>
+          <p:cNvSpPr/>
+          <p:nvPr/>
+        </p:nvSpPr>
+        <p:spPr>
+          <a:xfrm>
+            <a:off x="4462272" y="3493008"/>
+            <a:ext cx="3291840" cy="9144"/>
+          </a:xfrm>
+          <a:prstGeom prst="rect">
+            <a:avLst/>
+          </a:prstGeom>
+          <a:solidFill>
+            <a:srgbClr val="DDE4F0"/>
+          </a:solidFill>
+          <a:ln/>
+        </p:spPr>
+      </p:sp>
+      <p:sp>
+        <p:nvSpPr>
+          <p:cNvPr id="27" name="Text 25"/>
+          <p:cNvSpPr/>
+          <p:nvPr/>
+        </p:nvSpPr>
+        <p:spPr>
+          <a:xfrm>
+            <a:off x="4462272" y="3593592"/>
+            <a:ext cx="3291840" cy="201168"/>
+          </a:xfrm>
+          <a:prstGeom prst="rect">
+            <a:avLst/>
+          </a:prstGeom>
+          <a:noFill/>
+          <a:ln/>
+        </p:spPr>
+        <p:txBody>
+          <a:bodyPr wrap="square" lIns="0" tIns="0" rIns="0" bIns="0" rtlCol="0" anchor="ctr"/>
+          <a:lstStyle/>
+          <a:p>
+            <a:pPr indent="0" marL="0">
+              <a:buNone/>
+            </a:pPr>
+            <a:r>
+              <a:rPr lang="en-US" sz="850" b="1" dirty="0">
+                <a:solidFill>
+                  <a:srgbClr val="E8612C"/>
+                </a:solidFill>
+                <a:latin typeface="Calibri" pitchFamily="34" charset="0"/>
+                <a:ea typeface="Calibri" pitchFamily="34" charset="-122"/>
+                <a:cs typeface="Calibri" pitchFamily="34" charset="-120"/>
+              </a:rPr>
+              <a:t>DSIM gives them:</a:t>
+            </a:r>
+            <a:endParaRPr lang="en-US" sz="850" dirty="0"/>
+          </a:p>
+        </p:txBody>
+      </p:sp>
+      <p:sp>
+        <p:nvSpPr>
+          <p:cNvPr id="28" name="Text 26"/>
+          <p:cNvSpPr/>
+          <p:nvPr/>
+        </p:nvSpPr>
+        <p:spPr>
+          <a:xfrm>
+            <a:off x="4462272" y="3813048"/>
+            <a:ext cx="3291840" cy="868680"/>
+          </a:xfrm>
+          <a:prstGeom prst="rect">
+            <a:avLst/>
+          </a:prstGeom>
+          <a:noFill/>
+          <a:ln/>
+        </p:spPr>
+        <p:txBody>
+          <a:bodyPr wrap="square" lIns="0" tIns="0" rIns="0" bIns="0" rtlCol="0" anchor="ctr"/>
+          <a:lstStyle/>
+          <a:p>
+            <a:pPr indent="0" marL="0">
+              <a:buNone/>
+            </a:pPr>
+            <a:r>
+              <a:rPr lang="en-US" sz="850" dirty="0">
+                <a:solidFill>
+                  <a:srgbClr val="4A5568"/>
+                </a:solidFill>
+                <a:latin typeface="Calibri" pitchFamily="34" charset="0"/>
+                <a:ea typeface="Calibri" pitchFamily="34" charset="-122"/>
+                <a:cs typeface="Calibri" pitchFamily="34" charset="-120"/>
+              </a:rPr>
+              <a:t>Vendor-neutral audit: is the constraint media spend or in-stock rate? The number the CFO can defend — not platform ROAS.</a:t>
+            </a:r>
+            <a:endParaRPr lang="en-US" sz="850" dirty="0"/>
+          </a:p>
+        </p:txBody>
+      </p:sp>
+      <p:sp>
+        <p:nvSpPr>
+          <p:cNvPr id="29" name="Shape 27"/>
+          <p:cNvSpPr/>
+          <p:nvPr/>
+        </p:nvSpPr>
+        <p:spPr>
+          <a:xfrm>
+            <a:off x="4462272" y="4754880"/>
+            <a:ext cx="3291840" cy="9144"/>
+          </a:xfrm>
+          <a:prstGeom prst="rect">
+            <a:avLst/>
+          </a:prstGeom>
+          <a:solidFill>
+            <a:srgbClr val="DDE4F0"/>
+          </a:solidFill>
+          <a:ln/>
+        </p:spPr>
+      </p:sp>
+      <p:sp>
+        <p:nvSpPr>
+          <p:cNvPr id="30" name="Text 28"/>
+          <p:cNvSpPr/>
+          <p:nvPr/>
+        </p:nvSpPr>
+        <p:spPr>
+          <a:xfrm>
+            <a:off x="4462272" y="4846320"/>
+            <a:ext cx="3291840" cy="1371600"/>
+          </a:xfrm>
+          <a:prstGeom prst="rect">
+            <a:avLst/>
+          </a:prstGeom>
+          <a:noFill/>
+          <a:ln/>
+        </p:spPr>
+        <p:txBody>
+          <a:bodyPr wrap="square" lIns="0" tIns="0" rIns="0" bIns="0" rtlCol="0" anchor="ctr"/>
+          <a:lstStyle/>
+          <a:p>
+            <a:pPr indent="0" marL="0">
+              <a:buNone/>
+            </a:pPr>
+            <a:r>
+              <a:rPr lang="en-US" sz="800" b="1" i="1" dirty="0">
+                <a:solidFill>
+                  <a:srgbClr val="E8612C"/>
+                </a:solidFill>
+                <a:latin typeface="Calibri" pitchFamily="34" charset="0"/>
+                <a:ea typeface="Calibri" pitchFamily="34" charset="-122"/>
+                <a:cs typeface="Calibri" pitchFamily="34" charset="-120"/>
+              </a:rPr>
+              <a:t>“Before approving the next Walmart Connect request, know whether the bottleneck is media or shelf.”</a:t>
+            </a:r>
+            <a:endParaRPr lang="en-US" sz="800" dirty="0"/>
+          </a:p>
+        </p:txBody>
+      </p:sp>
+      <p:sp>
+        <p:nvSpPr>
+          <p:cNvPr id="31" name="Shape 29"/>
+          <p:cNvSpPr/>
+          <p:nvPr/>
+        </p:nvSpPr>
+        <p:spPr>
+          <a:xfrm>
+            <a:off x="8193024" y="1078992"/>
+            <a:ext cx="3657600" cy="5394960"/>
           </a:xfrm>
           <a:prstGeom prst="rect">
             <a:avLst/>
@@ -5467,89 +7078,260 @@
       </p:sp>
       <p:sp>
         <p:nvSpPr>
-          <p:cNvPr id="14" name="Shape 12"/>
-          <p:cNvSpPr/>
-          <p:nvPr/>
-        </p:nvSpPr>
-        <p:spPr>
-          <a:xfrm>
-            <a:off x="8193024" y="1298448"/>
-            <a:ext cx="3657600" cy="73152"/>
-          </a:xfrm>
-          <a:prstGeom prst="rect">
-            <a:avLst/>
-          </a:prstGeom>
-          <a:solidFill>
-            <a:srgbClr val="E8612C"/>
-          </a:solidFill>
-          <a:ln/>
-        </p:spPr>
-      </p:sp>
-      <p:sp>
-        <p:nvSpPr>
-          <p:cNvPr id="15" name="Text 13"/>
-          <p:cNvSpPr/>
-          <p:nvPr/>
-        </p:nvSpPr>
-        <p:spPr>
-          <a:xfrm>
-            <a:off x="8375904" y="1435608"/>
-            <a:ext cx="3291840" cy="640080"/>
-          </a:xfrm>
-          <a:prstGeom prst="rect">
-            <a:avLst/>
-          </a:prstGeom>
-          <a:noFill/>
-          <a:ln/>
-        </p:spPr>
-        <p:txBody>
-          <a:bodyPr wrap="square" lIns="0" tIns="0" rIns="0" bIns="0" rtlCol="0" anchor="ctr"/>
-          <a:lstStyle/>
-          <a:p>
-            <a:pPr indent="0" marL="0">
-              <a:buNone/>
-            </a:pPr>
-            <a:r>
-              <a:rPr lang="en-US" sz="4000" b="1" dirty="0">
-                <a:solidFill>
-                  <a:srgbClr val="E8612C"/>
-                </a:solidFill>
-                <a:latin typeface="Calibri" pitchFamily="34" charset="0"/>
-                <a:ea typeface="Calibri" pitchFamily="34" charset="-122"/>
-                <a:cs typeface="Calibri" pitchFamily="34" charset="-120"/>
-              </a:rPr>
-              <a:t>$30K+</a:t>
-            </a:r>
-            <a:endParaRPr lang="en-US" sz="4000" dirty="0"/>
-          </a:p>
-        </p:txBody>
-      </p:sp>
-      <p:sp>
-        <p:nvSpPr>
-          <p:cNvPr id="16" name="Text 14"/>
-          <p:cNvSpPr/>
-          <p:nvPr/>
-        </p:nvSpPr>
-        <p:spPr>
-          <a:xfrm>
-            <a:off x="8375904" y="2075688"/>
-            <a:ext cx="3291840" cy="594360"/>
-          </a:xfrm>
-          <a:prstGeom prst="rect">
-            <a:avLst/>
-          </a:prstGeom>
-          <a:noFill/>
-          <a:ln/>
-        </p:spPr>
-        <p:txBody>
-          <a:bodyPr wrap="square" lIns="0" tIns="0" rIns="0" bIns="0" rtlCol="0" anchor="ctr"/>
-          <a:lstStyle/>
-          <a:p>
-            <a:pPr indent="0" marL="0">
-              <a:buNone/>
-            </a:pPr>
-            <a:r>
-              <a:rPr lang="en-US" sz="1100" dirty="0">
+          <p:cNvPr id="32" name="Shape 30"/>
+          <p:cNvSpPr/>
+          <p:nvPr/>
+        </p:nvSpPr>
+        <p:spPr>
+          <a:xfrm>
+            <a:off x="8193024" y="1078992"/>
+            <a:ext cx="3657600" cy="91440"/>
+          </a:xfrm>
+          <a:prstGeom prst="rect">
+            <a:avLst/>
+          </a:prstGeom>
+          <a:solidFill>
+            <a:srgbClr val="1D8A5B"/>
+          </a:solidFill>
+          <a:ln/>
+        </p:spPr>
+      </p:sp>
+      <p:sp>
+        <p:nvSpPr>
+          <p:cNvPr id="33" name="Text 31"/>
+          <p:cNvSpPr/>
+          <p:nvPr/>
+        </p:nvSpPr>
+        <p:spPr>
+          <a:xfrm>
+            <a:off x="8375904" y="1216152"/>
+            <a:ext cx="3291840" cy="502920"/>
+          </a:xfrm>
+          <a:prstGeom prst="rect">
+            <a:avLst/>
+          </a:prstGeom>
+          <a:noFill/>
+          <a:ln/>
+        </p:spPr>
+        <p:txBody>
+          <a:bodyPr wrap="square" lIns="0" tIns="0" rIns="0" bIns="0" rtlCol="0" anchor="ctr"/>
+          <a:lstStyle/>
+          <a:p>
+            <a:pPr indent="0" marL="0">
+              <a:buNone/>
+            </a:pPr>
+            <a:r>
+              <a:rPr lang="en-US" sz="1300" b="1" dirty="0">
+                <a:solidFill>
+                  <a:srgbClr val="1D8A5B"/>
+                </a:solidFill>
+                <a:latin typeface="Calibri" pitchFamily="34" charset="0"/>
+                <a:ea typeface="Calibri" pitchFamily="34" charset="-122"/>
+                <a:cs typeface="Calibri" pitchFamily="34" charset="-120"/>
+              </a:rPr>
+              <a:t>Brand /</a:t>
+            </a:r>
+            <a:endParaRPr lang="en-US" sz="1300" dirty="0"/>
+          </a:p>
+          <a:p>
+            <a:pPr indent="0" marL="0">
+              <a:buNone/>
+            </a:pPr>
+            <a:r>
+              <a:rPr lang="en-US" sz="1300" b="1" dirty="0">
+                <a:solidFill>
+                  <a:srgbClr val="1D8A5B"/>
+                </a:solidFill>
+                <a:latin typeface="Calibri" pitchFamily="34" charset="0"/>
+                <a:ea typeface="Calibri" pitchFamily="34" charset="-122"/>
+                <a:cs typeface="Calibri" pitchFamily="34" charset="-120"/>
+              </a:rPr>
+              <a:t>Category Manager</a:t>
+            </a:r>
+            <a:endParaRPr lang="en-US" sz="1300" dirty="0"/>
+          </a:p>
+        </p:txBody>
+      </p:sp>
+      <p:sp>
+        <p:nvSpPr>
+          <p:cNvPr id="34" name="Text 32"/>
+          <p:cNvSpPr/>
+          <p:nvPr/>
+        </p:nvSpPr>
+        <p:spPr>
+          <a:xfrm>
+            <a:off x="8375904" y="1773936"/>
+            <a:ext cx="502920" cy="201168"/>
+          </a:xfrm>
+          <a:prstGeom prst="rect">
+            <a:avLst/>
+          </a:prstGeom>
+          <a:noFill/>
+          <a:ln/>
+        </p:spPr>
+        <p:txBody>
+          <a:bodyPr wrap="square" lIns="0" tIns="0" rIns="0" bIns="0" rtlCol="0" anchor="ctr"/>
+          <a:lstStyle/>
+          <a:p>
+            <a:pPr indent="0" marL="0">
+              <a:buNone/>
+            </a:pPr>
+            <a:r>
+              <a:rPr lang="en-US" sz="850" b="1" dirty="0">
+                <a:solidFill>
+                  <a:srgbClr val="718096"/>
+                </a:solidFill>
+                <a:latin typeface="Calibri" pitchFamily="34" charset="0"/>
+                <a:ea typeface="Calibri" pitchFamily="34" charset="-122"/>
+                <a:cs typeface="Calibri" pitchFamily="34" charset="-120"/>
+              </a:rPr>
+              <a:t>Owns:</a:t>
+            </a:r>
+            <a:endParaRPr lang="en-US" sz="850" dirty="0"/>
+          </a:p>
+        </p:txBody>
+      </p:sp>
+      <p:sp>
+        <p:nvSpPr>
+          <p:cNvPr id="35" name="Text 33"/>
+          <p:cNvSpPr/>
+          <p:nvPr/>
+        </p:nvSpPr>
+        <p:spPr>
+          <a:xfrm>
+            <a:off x="8878824" y="1773936"/>
+            <a:ext cx="2788920" cy="365760"/>
+          </a:xfrm>
+          <a:prstGeom prst="rect">
+            <a:avLst/>
+          </a:prstGeom>
+          <a:noFill/>
+          <a:ln/>
+        </p:spPr>
+        <p:txBody>
+          <a:bodyPr wrap="square" lIns="0" tIns="0" rIns="0" bIns="0" rtlCol="0" anchor="ctr"/>
+          <a:lstStyle/>
+          <a:p>
+            <a:pPr indent="0" marL="0">
+              <a:buNone/>
+            </a:pPr>
+            <a:r>
+              <a:rPr lang="en-US" sz="850" i="1" dirty="0">
+                <a:solidFill>
+                  <a:srgbClr val="718096"/>
+                </a:solidFill>
+                <a:latin typeface="Calibri" pitchFamily="34" charset="0"/>
+                <a:ea typeface="Calibri" pitchFamily="34" charset="-122"/>
+                <a:cs typeface="Calibri" pitchFamily="34" charset="-120"/>
+              </a:rPr>
+              <a:t>Brand P&amp;L, promotional calendar,</a:t>
+            </a:r>
+            <a:endParaRPr lang="en-US" sz="850" dirty="0"/>
+          </a:p>
+          <a:p>
+            <a:pPr indent="0" marL="0">
+              <a:buNone/>
+            </a:pPr>
+            <a:r>
+              <a:rPr lang="en-US" sz="850" i="1" dirty="0">
+                <a:solidFill>
+                  <a:srgbClr val="718096"/>
+                </a:solidFill>
+                <a:latin typeface="Calibri" pitchFamily="34" charset="0"/>
+                <a:ea typeface="Calibri" pitchFamily="34" charset="-122"/>
+                <a:cs typeface="Calibri" pitchFamily="34" charset="-120"/>
+              </a:rPr>
+              <a:t>competitive response</a:t>
+            </a:r>
+            <a:endParaRPr lang="en-US" sz="850" dirty="0"/>
+          </a:p>
+        </p:txBody>
+      </p:sp>
+      <p:sp>
+        <p:nvSpPr>
+          <p:cNvPr id="36" name="Shape 34"/>
+          <p:cNvSpPr/>
+          <p:nvPr/>
+        </p:nvSpPr>
+        <p:spPr>
+          <a:xfrm>
+            <a:off x="8375904" y="2231136"/>
+            <a:ext cx="3291840" cy="9144"/>
+          </a:xfrm>
+          <a:prstGeom prst="rect">
+            <a:avLst/>
+          </a:prstGeom>
+          <a:solidFill>
+            <a:srgbClr val="DDE4F0"/>
+          </a:solidFill>
+          <a:ln/>
+        </p:spPr>
+      </p:sp>
+      <p:sp>
+        <p:nvSpPr>
+          <p:cNvPr id="37" name="Text 35"/>
+          <p:cNvSpPr/>
+          <p:nvPr/>
+        </p:nvSpPr>
+        <p:spPr>
+          <a:xfrm>
+            <a:off x="8375904" y="2331720"/>
+            <a:ext cx="3291840" cy="201168"/>
+          </a:xfrm>
+          <a:prstGeom prst="rect">
+            <a:avLst/>
+          </a:prstGeom>
+          <a:noFill/>
+          <a:ln/>
+        </p:spPr>
+        <p:txBody>
+          <a:bodyPr wrap="square" lIns="0" tIns="0" rIns="0" bIns="0" rtlCol="0" anchor="ctr"/>
+          <a:lstStyle/>
+          <a:p>
+            <a:pPr indent="0" marL="0">
+              <a:buNone/>
+            </a:pPr>
+            <a:r>
+              <a:rPr lang="en-US" sz="850" b="1" dirty="0">
+                <a:solidFill>
+                  <a:srgbClr val="1A2B4A"/>
+                </a:solidFill>
+                <a:latin typeface="Calibri" pitchFamily="34" charset="0"/>
+                <a:ea typeface="Calibri" pitchFamily="34" charset="-122"/>
+                <a:cs typeface="Calibri" pitchFamily="34" charset="-120"/>
+              </a:rPr>
+              <a:t>Pain today:</a:t>
+            </a:r>
+            <a:endParaRPr lang="en-US" sz="850" dirty="0"/>
+          </a:p>
+        </p:txBody>
+      </p:sp>
+      <p:sp>
+        <p:nvSpPr>
+          <p:cNvPr id="38" name="Text 36"/>
+          <p:cNvSpPr/>
+          <p:nvPr/>
+        </p:nvSpPr>
+        <p:spPr>
+          <a:xfrm>
+            <a:off x="8375904" y="2551176"/>
+            <a:ext cx="3291840" cy="868680"/>
+          </a:xfrm>
+          <a:prstGeom prst="rect">
+            <a:avLst/>
+          </a:prstGeom>
+          <a:noFill/>
+          <a:ln/>
+        </p:spPr>
+        <p:txBody>
+          <a:bodyPr wrap="square" lIns="0" tIns="0" rIns="0" bIns="0" rtlCol="0" anchor="ctr"/>
+          <a:lstStyle/>
+          <a:p>
+            <a:pPr indent="0" marL="0">
+              <a:buNone/>
+            </a:pPr>
+            <a:r>
+              <a:rPr lang="en-US" sz="850" dirty="0">
                 <a:solidFill>
                   <a:srgbClr val="4A5568"/>
                 </a:solidFill>
@@ -5557,124 +7339,97 @@
                 <a:ea typeface="Calibri" pitchFamily="34" charset="-122"/>
                 <a:cs typeface="Calibri" pitchFamily="34" charset="-120"/>
               </a:rPr>
-              <a:t>Daily Reallocation</a:t>
-            </a:r>
-            <a:endParaRPr lang="en-US" sz="1100" dirty="0"/>
-          </a:p>
-        </p:txBody>
-      </p:sp>
-      <p:sp>
-        <p:nvSpPr>
-          <p:cNvPr id="17" name="Shape 15"/>
-          <p:cNvSpPr/>
-          <p:nvPr/>
-        </p:nvSpPr>
-        <p:spPr>
-          <a:xfrm>
-            <a:off x="365760" y="3127248"/>
-            <a:ext cx="3657600" cy="1645920"/>
-          </a:xfrm>
-          <a:prstGeom prst="rect">
-            <a:avLst/>
-          </a:prstGeom>
-          <a:solidFill>
-            <a:srgbClr val="FFFFFF"/>
-          </a:solidFill>
-          <a:ln/>
-          <a:effectLst>
-            <a:outerShdw sx="100000" sy="100000" kx="0" ky="0" algn="bl" rotWithShape="0" blurRad="50800" dist="25400" dir="8100000">
-              <a:srgbClr val="000000">
-                <a:alpha val="8000"/>
-              </a:srgbClr>
-            </a:outerShdw>
-          </a:effectLst>
-        </p:spPr>
-      </p:sp>
-      <p:sp>
-        <p:nvSpPr>
-          <p:cNvPr id="18" name="Shape 16"/>
-          <p:cNvSpPr/>
-          <p:nvPr/>
-        </p:nvSpPr>
-        <p:spPr>
-          <a:xfrm>
-            <a:off x="365760" y="3127248"/>
-            <a:ext cx="3657600" cy="73152"/>
-          </a:xfrm>
-          <a:prstGeom prst="rect">
-            <a:avLst/>
-          </a:prstGeom>
-          <a:solidFill>
-            <a:srgbClr val="2E5D9E"/>
-          </a:solidFill>
-          <a:ln/>
-        </p:spPr>
-      </p:sp>
-      <p:sp>
-        <p:nvSpPr>
-          <p:cNvPr id="19" name="Text 17"/>
-          <p:cNvSpPr/>
-          <p:nvPr/>
-        </p:nvSpPr>
-        <p:spPr>
-          <a:xfrm>
-            <a:off x="548640" y="3264408"/>
-            <a:ext cx="3291840" cy="640080"/>
-          </a:xfrm>
-          <a:prstGeom prst="rect">
-            <a:avLst/>
-          </a:prstGeom>
-          <a:noFill/>
-          <a:ln/>
-        </p:spPr>
-        <p:txBody>
-          <a:bodyPr wrap="square" lIns="0" tIns="0" rIns="0" bIns="0" rtlCol="0" anchor="ctr"/>
-          <a:lstStyle/>
-          <a:p>
-            <a:pPr indent="0" marL="0">
-              <a:buNone/>
-            </a:pPr>
-            <a:r>
-              <a:rPr lang="en-US" sz="4000" b="1" dirty="0">
-                <a:solidFill>
-                  <a:srgbClr val="2E5D9E"/>
-                </a:solidFill>
-                <a:latin typeface="Calibri" pitchFamily="34" charset="0"/>
-                <a:ea typeface="Calibri" pitchFamily="34" charset="-122"/>
-                <a:cs typeface="Calibri" pitchFamily="34" charset="-120"/>
-              </a:rPr>
-              <a:t>17</a:t>
-            </a:r>
-            <a:endParaRPr lang="en-US" sz="4000" dirty="0"/>
-          </a:p>
-        </p:txBody>
-      </p:sp>
-      <p:sp>
-        <p:nvSpPr>
-          <p:cNvPr id="20" name="Text 18"/>
-          <p:cNvSpPr/>
-          <p:nvPr/>
-        </p:nvSpPr>
-        <p:spPr>
-          <a:xfrm>
-            <a:off x="548640" y="3904488"/>
-            <a:ext cx="3291840" cy="594360"/>
-          </a:xfrm>
-          <a:prstGeom prst="rect">
-            <a:avLst/>
-          </a:prstGeom>
-          <a:noFill/>
-          <a:ln/>
-        </p:spPr>
-        <p:txBody>
-          <a:bodyPr wrap="square" lIns="0" tIns="0" rIns="0" bIns="0" rtlCol="0" anchor="ctr"/>
-          <a:lstStyle/>
-          <a:p>
-            <a:pPr indent="0" marL="0">
-              <a:buNone/>
-            </a:pPr>
-            <a:r>
-              <a:rPr lang="en-US" sz="1100" dirty="0">
+              <a:t>NielsenIQ tells them a competitor took 2 points of share — 6 weeks after it happened. Can't connect shelf signals to dollar impact.</a:t>
+            </a:r>
+            <a:endParaRPr lang="en-US" sz="850" dirty="0"/>
+          </a:p>
+        </p:txBody>
+      </p:sp>
+      <p:sp>
+        <p:nvSpPr>
+          <p:cNvPr id="39" name="Shape 37"/>
+          <p:cNvSpPr/>
+          <p:nvPr/>
+        </p:nvSpPr>
+        <p:spPr>
+          <a:xfrm>
+            <a:off x="8375904" y="3493008"/>
+            <a:ext cx="3291840" cy="9144"/>
+          </a:xfrm>
+          <a:prstGeom prst="rect">
+            <a:avLst/>
+          </a:prstGeom>
+          <a:solidFill>
+            <a:srgbClr val="DDE4F0"/>
+          </a:solidFill>
+          <a:ln/>
+        </p:spPr>
+      </p:sp>
+      <p:sp>
+        <p:nvSpPr>
+          <p:cNvPr id="40" name="Text 38"/>
+          <p:cNvSpPr/>
+          <p:nvPr/>
+        </p:nvSpPr>
+        <p:spPr>
+          <a:xfrm>
+            <a:off x="8375904" y="3593592"/>
+            <a:ext cx="3291840" cy="201168"/>
+          </a:xfrm>
+          <a:prstGeom prst="rect">
+            <a:avLst/>
+          </a:prstGeom>
+          <a:noFill/>
+          <a:ln/>
+        </p:spPr>
+        <p:txBody>
+          <a:bodyPr wrap="square" lIns="0" tIns="0" rIns="0" bIns="0" rtlCol="0" anchor="ctr"/>
+          <a:lstStyle/>
+          <a:p>
+            <a:pPr indent="0" marL="0">
+              <a:buNone/>
+            </a:pPr>
+            <a:r>
+              <a:rPr lang="en-US" sz="850" b="1" dirty="0">
+                <a:solidFill>
+                  <a:srgbClr val="1D8A5B"/>
+                </a:solidFill>
+                <a:latin typeface="Calibri" pitchFamily="34" charset="0"/>
+                <a:ea typeface="Calibri" pitchFamily="34" charset="-122"/>
+                <a:cs typeface="Calibri" pitchFamily="34" charset="-120"/>
+              </a:rPr>
+              <a:t>DSIM gives them:</a:t>
+            </a:r>
+            <a:endParaRPr lang="en-US" sz="850" dirty="0"/>
+          </a:p>
+        </p:txBody>
+      </p:sp>
+      <p:sp>
+        <p:nvSpPr>
+          <p:cNvPr id="41" name="Text 39"/>
+          <p:cNvSpPr/>
+          <p:nvPr/>
+        </p:nvSpPr>
+        <p:spPr>
+          <a:xfrm>
+            <a:off x="8375904" y="3813048"/>
+            <a:ext cx="3291840" cy="868680"/>
+          </a:xfrm>
+          <a:prstGeom prst="rect">
+            <a:avLst/>
+          </a:prstGeom>
+          <a:noFill/>
+          <a:ln/>
+        </p:spPr>
+        <p:txBody>
+          <a:bodyPr wrap="square" lIns="0" tIns="0" rIns="0" bIns="0" rtlCol="0" anchor="ctr"/>
+          <a:lstStyle/>
+          <a:p>
+            <a:pPr indent="0" marL="0">
+              <a:buNone/>
+            </a:pPr>
+            <a:r>
+              <a:rPr lang="en-US" sz="850" dirty="0">
                 <a:solidFill>
                   <a:srgbClr val="4A5568"/>
                 </a:solidFill>
@@ -5682,210 +7437,58 @@
                 <a:ea typeface="Calibri" pitchFamily="34" charset="-122"/>
                 <a:cs typeface="Calibri" pitchFamily="34" charset="-120"/>
               </a:rPr>
-              <a:t>Store Clusters</a:t>
-            </a:r>
-            <a:endParaRPr lang="en-US" sz="1100" dirty="0"/>
-          </a:p>
-        </p:txBody>
-      </p:sp>
-      <p:sp>
-        <p:nvSpPr>
-          <p:cNvPr id="21" name="Shape 19"/>
-          <p:cNvSpPr/>
-          <p:nvPr/>
-        </p:nvSpPr>
-        <p:spPr>
-          <a:xfrm>
-            <a:off x="4279392" y="3127248"/>
-            <a:ext cx="3657600" cy="1645920"/>
-          </a:xfrm>
-          <a:prstGeom prst="rect">
-            <a:avLst/>
-          </a:prstGeom>
-          <a:solidFill>
-            <a:srgbClr val="FFFFFF"/>
-          </a:solidFill>
-          <a:ln/>
-          <a:effectLst>
-            <a:outerShdw sx="100000" sy="100000" kx="0" ky="0" algn="bl" rotWithShape="0" blurRad="50800" dist="25400" dir="8100000">
-              <a:srgbClr val="000000">
-                <a:alpha val="8000"/>
-              </a:srgbClr>
-            </a:outerShdw>
-          </a:effectLst>
-        </p:spPr>
-      </p:sp>
-      <p:sp>
-        <p:nvSpPr>
-          <p:cNvPr id="22" name="Shape 20"/>
-          <p:cNvSpPr/>
-          <p:nvPr/>
-        </p:nvSpPr>
-        <p:spPr>
-          <a:xfrm>
-            <a:off x="4279392" y="3127248"/>
-            <a:ext cx="3657600" cy="73152"/>
-          </a:xfrm>
-          <a:prstGeom prst="rect">
-            <a:avLst/>
-          </a:prstGeom>
-          <a:solidFill>
-            <a:srgbClr val="D48B14"/>
-          </a:solidFill>
-          <a:ln/>
-        </p:spPr>
-      </p:sp>
-      <p:sp>
-        <p:nvSpPr>
-          <p:cNvPr id="23" name="Text 21"/>
-          <p:cNvSpPr/>
-          <p:nvPr/>
-        </p:nvSpPr>
-        <p:spPr>
-          <a:xfrm>
-            <a:off x="4462272" y="3264408"/>
-            <a:ext cx="3291840" cy="640080"/>
-          </a:xfrm>
-          <a:prstGeom prst="rect">
-            <a:avLst/>
-          </a:prstGeom>
-          <a:noFill/>
-          <a:ln/>
-        </p:spPr>
-        <p:txBody>
-          <a:bodyPr wrap="square" lIns="0" tIns="0" rIns="0" bIns="0" rtlCol="0" anchor="ctr"/>
-          <a:lstStyle/>
-          <a:p>
-            <a:pPr indent="0" marL="0">
-              <a:buNone/>
-            </a:pPr>
-            <a:r>
-              <a:rPr lang="en-US" sz="4000" b="1" dirty="0">
-                <a:solidFill>
-                  <a:srgbClr val="D48B14"/>
-                </a:solidFill>
-                <a:latin typeface="Calibri" pitchFamily="34" charset="0"/>
-                <a:ea typeface="Calibri" pitchFamily="34" charset="-122"/>
-                <a:cs typeface="Calibri" pitchFamily="34" charset="-120"/>
-              </a:rPr>
-              <a:t>78%</a:t>
-            </a:r>
-            <a:endParaRPr lang="en-US" sz="4000" dirty="0"/>
-          </a:p>
-        </p:txBody>
-      </p:sp>
-      <p:sp>
-        <p:nvSpPr>
-          <p:cNvPr id="24" name="Text 22"/>
-          <p:cNvSpPr/>
-          <p:nvPr/>
-        </p:nvSpPr>
-        <p:spPr>
-          <a:xfrm>
-            <a:off x="4462272" y="3904488"/>
-            <a:ext cx="3291840" cy="594360"/>
-          </a:xfrm>
-          <a:prstGeom prst="rect">
-            <a:avLst/>
-          </a:prstGeom>
-          <a:noFill/>
-          <a:ln/>
-        </p:spPr>
-        <p:txBody>
-          <a:bodyPr wrap="square" lIns="0" tIns="0" rIns="0" bIns="0" rtlCol="0" anchor="ctr"/>
-          <a:lstStyle/>
-          <a:p>
-            <a:pPr indent="0" marL="0">
-              <a:buNone/>
-            </a:pPr>
-            <a:r>
-              <a:rPr lang="en-US" sz="1100" dirty="0">
-                <a:solidFill>
-                  <a:srgbClr val="4A5568"/>
-                </a:solidFill>
-                <a:latin typeface="Calibri" pitchFamily="34" charset="0"/>
-                <a:ea typeface="Calibri" pitchFamily="34" charset="-122"/>
-                <a:cs typeface="Calibri" pitchFamily="34" charset="-120"/>
-              </a:rPr>
-              <a:t>Peak OSA</a:t>
-            </a:r>
-            <a:endParaRPr lang="en-US" sz="1100" dirty="0"/>
-          </a:p>
-        </p:txBody>
-      </p:sp>
-      <p:sp>
-        <p:nvSpPr>
-          <p:cNvPr id="25" name="Shape 23"/>
-          <p:cNvSpPr/>
-          <p:nvPr/>
-        </p:nvSpPr>
-        <p:spPr>
-          <a:xfrm>
-            <a:off x="8193024" y="3127248"/>
-            <a:ext cx="3657600" cy="1645920"/>
-          </a:xfrm>
-          <a:prstGeom prst="rect">
-            <a:avLst/>
-          </a:prstGeom>
-          <a:solidFill>
-            <a:srgbClr val="FFFFFF"/>
-          </a:solidFill>
-          <a:ln/>
-          <a:effectLst>
-            <a:outerShdw sx="100000" sy="100000" kx="0" ky="0" algn="bl" rotWithShape="0" blurRad="50800" dist="25400" dir="8100000">
-              <a:srgbClr val="000000">
-                <a:alpha val="8000"/>
-              </a:srgbClr>
-            </a:outerShdw>
-          </a:effectLst>
-        </p:spPr>
-      </p:sp>
-      <p:sp>
-        <p:nvSpPr>
-          <p:cNvPr id="26" name="Shape 24"/>
-          <p:cNvSpPr/>
-          <p:nvPr/>
-        </p:nvSpPr>
-        <p:spPr>
-          <a:xfrm>
-            <a:off x="8193024" y="3127248"/>
-            <a:ext cx="3657600" cy="73152"/>
-          </a:xfrm>
-          <a:prstGeom prst="rect">
-            <a:avLst/>
-          </a:prstGeom>
-          <a:solidFill>
-            <a:srgbClr val="1D8A5B"/>
-          </a:solidFill>
-          <a:ln/>
-        </p:spPr>
-      </p:sp>
-      <p:sp>
-        <p:nvSpPr>
-          <p:cNvPr id="27" name="Text 25"/>
-          <p:cNvSpPr/>
-          <p:nvPr/>
-        </p:nvSpPr>
-        <p:spPr>
-          <a:xfrm>
-            <a:off x="8375904" y="3264408"/>
-            <a:ext cx="3291840" cy="640080"/>
-          </a:xfrm>
-          <a:prstGeom prst="rect">
-            <a:avLst/>
-          </a:prstGeom>
-          <a:noFill/>
-          <a:ln/>
-        </p:spPr>
-        <p:txBody>
-          <a:bodyPr wrap="square" lIns="0" tIns="0" rIns="0" bIns="0" rtlCol="0" anchor="ctr"/>
-          <a:lstStyle/>
-          <a:p>
-            <a:pPr indent="0" marL="0">
-              <a:buNone/>
-            </a:pPr>
-            <a:r>
-              <a:rPr lang="en-US" sz="4000" b="1" dirty="0">
+              <a:t>Quantifies what a competitor's SoS gain is worth in weekly lost sales — by store cluster. Early enough to respond.</a:t>
+            </a:r>
+            <a:endParaRPr lang="en-US" sz="850" dirty="0"/>
+          </a:p>
+        </p:txBody>
+      </p:sp>
+      <p:sp>
+        <p:nvSpPr>
+          <p:cNvPr id="42" name="Shape 40"/>
+          <p:cNvSpPr/>
+          <p:nvPr/>
+        </p:nvSpPr>
+        <p:spPr>
+          <a:xfrm>
+            <a:off x="8375904" y="4754880"/>
+            <a:ext cx="3291840" cy="9144"/>
+          </a:xfrm>
+          <a:prstGeom prst="rect">
+            <a:avLst/>
+          </a:prstGeom>
+          <a:solidFill>
+            <a:srgbClr val="DDE4F0"/>
+          </a:solidFill>
+          <a:ln/>
+        </p:spPr>
+      </p:sp>
+      <p:sp>
+        <p:nvSpPr>
+          <p:cNvPr id="43" name="Text 41"/>
+          <p:cNvSpPr/>
+          <p:nvPr/>
+        </p:nvSpPr>
+        <p:spPr>
+          <a:xfrm>
+            <a:off x="8375904" y="4846320"/>
+            <a:ext cx="3291840" cy="1371600"/>
+          </a:xfrm>
+          <a:prstGeom prst="rect">
+            <a:avLst/>
+          </a:prstGeom>
+          <a:noFill/>
+          <a:ln/>
+        </p:spPr>
+        <p:txBody>
+          <a:bodyPr wrap="square" lIns="0" tIns="0" rIns="0" bIns="0" rtlCol="0" anchor="ctr"/>
+          <a:lstStyle/>
+          <a:p>
+            <a:pPr indent="0" marL="0">
+              <a:buNone/>
+            </a:pPr>
+            <a:r>
+              <a:rPr lang="en-US" sz="800" b="1" i="1" dirty="0">
                 <a:solidFill>
                   <a:srgbClr val="1D8A5B"/>
                 </a:solidFill>
@@ -5893,127 +7496,9 @@
                 <a:ea typeface="Calibri" pitchFamily="34" charset="-122"/>
                 <a:cs typeface="Calibri" pitchFamily="34" charset="-120"/>
               </a:rPr>
-              <a:t>+12%</a:t>
-            </a:r>
-            <a:endParaRPr lang="en-US" sz="4000" dirty="0"/>
-          </a:p>
-        </p:txBody>
-      </p:sp>
-      <p:sp>
-        <p:nvSpPr>
-          <p:cNvPr id="28" name="Text 26"/>
-          <p:cNvSpPr/>
-          <p:nvPr/>
-        </p:nvSpPr>
-        <p:spPr>
-          <a:xfrm>
-            <a:off x="8375904" y="3904488"/>
-            <a:ext cx="3291840" cy="594360"/>
-          </a:xfrm>
-          <a:prstGeom prst="rect">
-            <a:avLst/>
-          </a:prstGeom>
-          <a:noFill/>
-          <a:ln/>
-        </p:spPr>
-        <p:txBody>
-          <a:bodyPr wrap="square" lIns="0" tIns="0" rIns="0" bIns="0" rtlCol="0" anchor="ctr"/>
-          <a:lstStyle/>
-          <a:p>
-            <a:pPr indent="0" marL="0">
-              <a:buNone/>
-            </a:pPr>
-            <a:r>
-              <a:rPr lang="en-US" sz="1100" dirty="0">
-                <a:solidFill>
-                  <a:srgbClr val="4A5568"/>
-                </a:solidFill>
-                <a:latin typeface="Calibri" pitchFamily="34" charset="0"/>
-                <a:ea typeface="Calibri" pitchFamily="34" charset="-122"/>
-                <a:cs typeface="Calibri" pitchFamily="34" charset="-120"/>
-              </a:rPr>
-              <a:t>Adult Halo Lift</a:t>
-            </a:r>
-            <a:endParaRPr lang="en-US" sz="1100" dirty="0"/>
-          </a:p>
-        </p:txBody>
-      </p:sp>
-      <p:sp>
-        <p:nvSpPr>
-          <p:cNvPr id="29" name="Shape 27"/>
-          <p:cNvSpPr/>
-          <p:nvPr/>
-        </p:nvSpPr>
-        <p:spPr>
-          <a:xfrm>
-            <a:off x="365760" y="5029200"/>
-            <a:ext cx="11430000" cy="1097280"/>
-          </a:xfrm>
-          <a:prstGeom prst="rect">
-            <a:avLst/>
-          </a:prstGeom>
-          <a:solidFill>
-            <a:srgbClr val="EBF1FB"/>
-          </a:solidFill>
-          <a:ln/>
-        </p:spPr>
-      </p:sp>
-      <p:sp>
-        <p:nvSpPr>
-          <p:cNvPr id="30" name="Shape 28"/>
-          <p:cNvSpPr/>
-          <p:nvPr/>
-        </p:nvSpPr>
-        <p:spPr>
-          <a:xfrm>
-            <a:off x="365760" y="5029200"/>
-            <a:ext cx="73152" cy="1097280"/>
-          </a:xfrm>
-          <a:prstGeom prst="rect">
-            <a:avLst/>
-          </a:prstGeom>
-          <a:solidFill>
-            <a:srgbClr val="2E5D9E"/>
-          </a:solidFill>
-          <a:ln/>
-        </p:spPr>
-      </p:sp>
-      <p:sp>
-        <p:nvSpPr>
-          <p:cNvPr id="31" name="Text 29"/>
-          <p:cNvSpPr/>
-          <p:nvPr/>
-        </p:nvSpPr>
-        <p:spPr>
-          <a:xfrm>
-            <a:off x="594360" y="5138928"/>
-            <a:ext cx="10972800" cy="914400"/>
-          </a:xfrm>
-          <a:prstGeom prst="rect">
-            <a:avLst/>
-          </a:prstGeom>
-          <a:noFill/>
-          <a:ln/>
-        </p:spPr>
-        <p:txBody>
-          <a:bodyPr wrap="square" lIns="0" tIns="0" rIns="0" bIns="0" rtlCol="0" anchor="ctr"/>
-          <a:lstStyle/>
-          <a:p>
-            <a:pPr indent="0" marL="0">
-              <a:buNone/>
-            </a:pPr>
-            <a:r>
-              <a:rPr lang="en-US" sz="1300" dirty="0">
-                <a:solidFill>
-                  <a:srgbClr val="1A2B4A"/>
-                </a:solidFill>
-                <a:latin typeface="Calibri" pitchFamily="34" charset="0"/>
-                <a:ea typeface="Calibri" pitchFamily="34" charset="-122"/>
-                <a:cs typeface="Calibri" pitchFamily="34" charset="-120"/>
-              </a:rPr>
-              <a:t>The PoC validates shelf-signal integration into incrementality models. Kids/Baby category showed +12% incremental lift in Adult segment, proving category halo effect — a lever CommerceIQ and Pacvue cannot decompose, and one that Incremental.com would strip out as a confounder rather than surface as an opportunity.</a:t>
-            </a:r>
-            <a:endParaRPr lang="en-US" sz="1300" dirty="0"/>
+              <a:t>“By the time Nielsen tells you a competitor took share, it happened 6 weeks ago. DSIM shows the signal that preceded it.”</a:t>
+            </a:r>
+            <a:endParaRPr lang="en-US" sz="800" dirty="0"/>
           </a:p>
         </p:txBody>
       </p:sp>
@@ -6102,7 +7587,7 @@
                 <a:ea typeface="Calibri" pitchFamily="34" charset="-122"/>
                 <a:cs typeface="Calibri" pitchFamily="34" charset="-120"/>
               </a:rPr>
-              <a:t>Incremental ROI by Channel (Lactalis)</a:t>
+              <a:t>Lactalis PoC: Proof of Impact</a:t>
             </a:r>
             <a:endParaRPr lang="en-US" sz="2400" dirty="0"/>
           </a:p>
@@ -6128,36 +7613,810 @@
           <a:ln/>
         </p:spPr>
       </p:sp>
-      <p:graphicFrame>
-        <p:nvGraphicFramePr>
-          <p:cNvPr id="5" name="Chart 0" descr=""/>
-          <p:cNvGraphicFramePr/>
-          <p:nvPr/>
-        </p:nvGraphicFramePr>
-        <p:xfrm>
-          <a:off x="365760" y="1298448"/>
-          <a:ext cx="11430000" cy="2926080"/>
-        </p:xfrm>
-        <a:graphic xmlns:a="http://schemas.openxmlformats.org/drawingml/2006/main">
-          <a:graphicData uri="http://schemas.openxmlformats.org/drawingml/2006/chart">
-            <c:chart xmlns:c="http://schemas.openxmlformats.org/drawingml/2006/chart" r:id="rId1"/>
-          </a:graphicData>
-        </a:graphic>
-      </p:graphicFrame>
-      <p:sp>
-        <p:nvSpPr>
-          <p:cNvPr id="6" name="Text 3"/>
-          <p:cNvSpPr/>
-          <p:nvPr/>
-        </p:nvSpPr>
-        <p:spPr>
-          <a:xfrm>
-            <a:off x="365760" y="4389120"/>
+      <p:sp>
+        <p:nvSpPr>
+          <p:cNvPr id="5" name="Shape 3"/>
+          <p:cNvSpPr/>
+          <p:nvPr/>
+        </p:nvSpPr>
+        <p:spPr>
+          <a:xfrm>
+            <a:off x="365760" y="1298448"/>
+            <a:ext cx="3657600" cy="1645920"/>
+          </a:xfrm>
+          <a:prstGeom prst="rect">
+            <a:avLst/>
+          </a:prstGeom>
+          <a:solidFill>
+            <a:srgbClr val="FFFFFF"/>
+          </a:solidFill>
+          <a:ln/>
+          <a:effectLst>
+            <a:outerShdw sx="100000" sy="100000" kx="0" ky="0" algn="bl" rotWithShape="0" blurRad="50800" dist="25400" dir="8100000">
+              <a:srgbClr val="000000">
+                <a:alpha val="8000"/>
+              </a:srgbClr>
+            </a:outerShdw>
+          </a:effectLst>
+        </p:spPr>
+      </p:sp>
+      <p:sp>
+        <p:nvSpPr>
+          <p:cNvPr id="6" name="Shape 4"/>
+          <p:cNvSpPr/>
+          <p:nvPr/>
+        </p:nvSpPr>
+        <p:spPr>
+          <a:xfrm>
+            <a:off x="365760" y="1298448"/>
+            <a:ext cx="3657600" cy="73152"/>
+          </a:xfrm>
+          <a:prstGeom prst="rect">
+            <a:avLst/>
+          </a:prstGeom>
+          <a:solidFill>
+            <a:srgbClr val="1D8A5B"/>
+          </a:solidFill>
+          <a:ln/>
+        </p:spPr>
+      </p:sp>
+      <p:sp>
+        <p:nvSpPr>
+          <p:cNvPr id="7" name="Text 5"/>
+          <p:cNvSpPr/>
+          <p:nvPr/>
+        </p:nvSpPr>
+        <p:spPr>
+          <a:xfrm>
+            <a:off x="548640" y="1435608"/>
+            <a:ext cx="3291840" cy="640080"/>
+          </a:xfrm>
+          <a:prstGeom prst="rect">
+            <a:avLst/>
+          </a:prstGeom>
+          <a:noFill/>
+          <a:ln/>
+        </p:spPr>
+        <p:txBody>
+          <a:bodyPr wrap="square" lIns="0" tIns="0" rIns="0" bIns="0" rtlCol="0" anchor="ctr"/>
+          <a:lstStyle/>
+          <a:p>
+            <a:pPr indent="0" marL="0">
+              <a:buNone/>
+            </a:pPr>
+            <a:r>
+              <a:rPr lang="en-US" sz="4000" b="1" dirty="0">
+                <a:solidFill>
+                  <a:srgbClr val="1D8A5B"/>
+                </a:solidFill>
+                <a:latin typeface="Calibri" pitchFamily="34" charset="0"/>
+                <a:ea typeface="Calibri" pitchFamily="34" charset="-122"/>
+                <a:cs typeface="Calibri" pitchFamily="34" charset="-120"/>
+              </a:rPr>
+              <a:t>91%</a:t>
+            </a:r>
+            <a:endParaRPr lang="en-US" sz="4000" dirty="0"/>
+          </a:p>
+        </p:txBody>
+      </p:sp>
+      <p:sp>
+        <p:nvSpPr>
+          <p:cNvPr id="8" name="Text 6"/>
+          <p:cNvSpPr/>
+          <p:nvPr/>
+        </p:nvSpPr>
+        <p:spPr>
+          <a:xfrm>
+            <a:off x="548640" y="2075688"/>
+            <a:ext cx="3291840" cy="594360"/>
+          </a:xfrm>
+          <a:prstGeom prst="rect">
+            <a:avLst/>
+          </a:prstGeom>
+          <a:noFill/>
+          <a:ln/>
+        </p:spPr>
+        <p:txBody>
+          <a:bodyPr wrap="square" lIns="0" tIns="0" rIns="0" bIns="0" rtlCol="0" anchor="ctr"/>
+          <a:lstStyle/>
+          <a:p>
+            <a:pPr indent="0" marL="0">
+              <a:buNone/>
+            </a:pPr>
+            <a:r>
+              <a:rPr lang="en-US" sz="1100" dirty="0">
+                <a:solidFill>
+                  <a:srgbClr val="4A5568"/>
+                </a:solidFill>
+                <a:latin typeface="Calibri" pitchFamily="34" charset="0"/>
+                <a:ea typeface="Calibri" pitchFamily="34" charset="-122"/>
+                <a:cs typeface="Calibri" pitchFamily="34" charset="-120"/>
+              </a:rPr>
+              <a:t>R² / Model Fit</a:t>
+            </a:r>
+            <a:endParaRPr lang="en-US" sz="1100" dirty="0"/>
+          </a:p>
+        </p:txBody>
+      </p:sp>
+      <p:sp>
+        <p:nvSpPr>
+          <p:cNvPr id="9" name="Shape 7"/>
+          <p:cNvSpPr/>
+          <p:nvPr/>
+        </p:nvSpPr>
+        <p:spPr>
+          <a:xfrm>
+            <a:off x="4279392" y="1298448"/>
+            <a:ext cx="3657600" cy="1645920"/>
+          </a:xfrm>
+          <a:prstGeom prst="rect">
+            <a:avLst/>
+          </a:prstGeom>
+          <a:solidFill>
+            <a:srgbClr val="FFFFFF"/>
+          </a:solidFill>
+          <a:ln/>
+          <a:effectLst>
+            <a:outerShdw sx="100000" sy="100000" kx="0" ky="0" algn="bl" rotWithShape="0" blurRad="50800" dist="25400" dir="8100000">
+              <a:srgbClr val="000000">
+                <a:alpha val="8000"/>
+              </a:srgbClr>
+            </a:outerShdw>
+          </a:effectLst>
+        </p:spPr>
+      </p:sp>
+      <p:sp>
+        <p:nvSpPr>
+          <p:cNvPr id="10" name="Shape 8"/>
+          <p:cNvSpPr/>
+          <p:nvPr/>
+        </p:nvSpPr>
+        <p:spPr>
+          <a:xfrm>
+            <a:off x="4279392" y="1298448"/>
+            <a:ext cx="3657600" cy="73152"/>
+          </a:xfrm>
+          <a:prstGeom prst="rect">
+            <a:avLst/>
+          </a:prstGeom>
+          <a:solidFill>
+            <a:srgbClr val="1D8A5B"/>
+          </a:solidFill>
+          <a:ln/>
+        </p:spPr>
+      </p:sp>
+      <p:sp>
+        <p:nvSpPr>
+          <p:cNvPr id="11" name="Text 9"/>
+          <p:cNvSpPr/>
+          <p:nvPr/>
+        </p:nvSpPr>
+        <p:spPr>
+          <a:xfrm>
+            <a:off x="4462272" y="1435608"/>
+            <a:ext cx="3291840" cy="640080"/>
+          </a:xfrm>
+          <a:prstGeom prst="rect">
+            <a:avLst/>
+          </a:prstGeom>
+          <a:noFill/>
+          <a:ln/>
+        </p:spPr>
+        <p:txBody>
+          <a:bodyPr wrap="square" lIns="0" tIns="0" rIns="0" bIns="0" rtlCol="0" anchor="ctr"/>
+          <a:lstStyle/>
+          <a:p>
+            <a:pPr indent="0" marL="0">
+              <a:buNone/>
+            </a:pPr>
+            <a:r>
+              <a:rPr lang="en-US" sz="4000" b="1" dirty="0">
+                <a:solidFill>
+                  <a:srgbClr val="1D8A5B"/>
+                </a:solidFill>
+                <a:latin typeface="Calibri" pitchFamily="34" charset="0"/>
+                <a:ea typeface="Calibri" pitchFamily="34" charset="-122"/>
+                <a:cs typeface="Calibri" pitchFamily="34" charset="-120"/>
+              </a:rPr>
+              <a:t>5.9%</a:t>
+            </a:r>
+            <a:endParaRPr lang="en-US" sz="4000" dirty="0"/>
+          </a:p>
+        </p:txBody>
+      </p:sp>
+      <p:sp>
+        <p:nvSpPr>
+          <p:cNvPr id="12" name="Text 10"/>
+          <p:cNvSpPr/>
+          <p:nvPr/>
+        </p:nvSpPr>
+        <p:spPr>
+          <a:xfrm>
+            <a:off x="4462272" y="2075688"/>
+            <a:ext cx="3291840" cy="594360"/>
+          </a:xfrm>
+          <a:prstGeom prst="rect">
+            <a:avLst/>
+          </a:prstGeom>
+          <a:noFill/>
+          <a:ln/>
+        </p:spPr>
+        <p:txBody>
+          <a:bodyPr wrap="square" lIns="0" tIns="0" rIns="0" bIns="0" rtlCol="0" anchor="ctr"/>
+          <a:lstStyle/>
+          <a:p>
+            <a:pPr indent="0" marL="0">
+              <a:buNone/>
+            </a:pPr>
+            <a:r>
+              <a:rPr lang="en-US" sz="1100" dirty="0">
+                <a:solidFill>
+                  <a:srgbClr val="4A5568"/>
+                </a:solidFill>
+                <a:latin typeface="Calibri" pitchFamily="34" charset="0"/>
+                <a:ea typeface="Calibri" pitchFamily="34" charset="-122"/>
+                <a:cs typeface="Calibri" pitchFamily="34" charset="-120"/>
+              </a:rPr>
+              <a:t>MAPE / Accuracy</a:t>
+            </a:r>
+            <a:endParaRPr lang="en-US" sz="1100" dirty="0"/>
+          </a:p>
+        </p:txBody>
+      </p:sp>
+      <p:sp>
+        <p:nvSpPr>
+          <p:cNvPr id="13" name="Shape 11"/>
+          <p:cNvSpPr/>
+          <p:nvPr/>
+        </p:nvSpPr>
+        <p:spPr>
+          <a:xfrm>
+            <a:off x="8193024" y="1298448"/>
+            <a:ext cx="3657600" cy="1645920"/>
+          </a:xfrm>
+          <a:prstGeom prst="rect">
+            <a:avLst/>
+          </a:prstGeom>
+          <a:solidFill>
+            <a:srgbClr val="FFFFFF"/>
+          </a:solidFill>
+          <a:ln/>
+          <a:effectLst>
+            <a:outerShdw sx="100000" sy="100000" kx="0" ky="0" algn="bl" rotWithShape="0" blurRad="50800" dist="25400" dir="8100000">
+              <a:srgbClr val="000000">
+                <a:alpha val="8000"/>
+              </a:srgbClr>
+            </a:outerShdw>
+          </a:effectLst>
+        </p:spPr>
+      </p:sp>
+      <p:sp>
+        <p:nvSpPr>
+          <p:cNvPr id="14" name="Shape 12"/>
+          <p:cNvSpPr/>
+          <p:nvPr/>
+        </p:nvSpPr>
+        <p:spPr>
+          <a:xfrm>
+            <a:off x="8193024" y="1298448"/>
+            <a:ext cx="3657600" cy="73152"/>
+          </a:xfrm>
+          <a:prstGeom prst="rect">
+            <a:avLst/>
+          </a:prstGeom>
+          <a:solidFill>
+            <a:srgbClr val="E8612C"/>
+          </a:solidFill>
+          <a:ln/>
+        </p:spPr>
+      </p:sp>
+      <p:sp>
+        <p:nvSpPr>
+          <p:cNvPr id="15" name="Text 13"/>
+          <p:cNvSpPr/>
+          <p:nvPr/>
+        </p:nvSpPr>
+        <p:spPr>
+          <a:xfrm>
+            <a:off x="8375904" y="1435608"/>
+            <a:ext cx="3291840" cy="640080"/>
+          </a:xfrm>
+          <a:prstGeom prst="rect">
+            <a:avLst/>
+          </a:prstGeom>
+          <a:noFill/>
+          <a:ln/>
+        </p:spPr>
+        <p:txBody>
+          <a:bodyPr wrap="square" lIns="0" tIns="0" rIns="0" bIns="0" rtlCol="0" anchor="ctr"/>
+          <a:lstStyle/>
+          <a:p>
+            <a:pPr indent="0" marL="0">
+              <a:buNone/>
+            </a:pPr>
+            <a:r>
+              <a:rPr lang="en-US" sz="4000" b="1" dirty="0">
+                <a:solidFill>
+                  <a:srgbClr val="E8612C"/>
+                </a:solidFill>
+                <a:latin typeface="Calibri" pitchFamily="34" charset="0"/>
+                <a:ea typeface="Calibri" pitchFamily="34" charset="-122"/>
+                <a:cs typeface="Calibri" pitchFamily="34" charset="-120"/>
+              </a:rPr>
+              <a:t>$30K+</a:t>
+            </a:r>
+            <a:endParaRPr lang="en-US" sz="4000" dirty="0"/>
+          </a:p>
+        </p:txBody>
+      </p:sp>
+      <p:sp>
+        <p:nvSpPr>
+          <p:cNvPr id="16" name="Text 14"/>
+          <p:cNvSpPr/>
+          <p:nvPr/>
+        </p:nvSpPr>
+        <p:spPr>
+          <a:xfrm>
+            <a:off x="8375904" y="2075688"/>
+            <a:ext cx="3291840" cy="594360"/>
+          </a:xfrm>
+          <a:prstGeom prst="rect">
+            <a:avLst/>
+          </a:prstGeom>
+          <a:noFill/>
+          <a:ln/>
+        </p:spPr>
+        <p:txBody>
+          <a:bodyPr wrap="square" lIns="0" tIns="0" rIns="0" bIns="0" rtlCol="0" anchor="ctr"/>
+          <a:lstStyle/>
+          <a:p>
+            <a:pPr indent="0" marL="0">
+              <a:buNone/>
+            </a:pPr>
+            <a:r>
+              <a:rPr lang="en-US" sz="1100" dirty="0">
+                <a:solidFill>
+                  <a:srgbClr val="4A5568"/>
+                </a:solidFill>
+                <a:latin typeface="Calibri" pitchFamily="34" charset="0"/>
+                <a:ea typeface="Calibri" pitchFamily="34" charset="-122"/>
+                <a:cs typeface="Calibri" pitchFamily="34" charset="-120"/>
+              </a:rPr>
+              <a:t>Daily Reallocation</a:t>
+            </a:r>
+            <a:endParaRPr lang="en-US" sz="1100" dirty="0"/>
+          </a:p>
+        </p:txBody>
+      </p:sp>
+      <p:sp>
+        <p:nvSpPr>
+          <p:cNvPr id="17" name="Shape 15"/>
+          <p:cNvSpPr/>
+          <p:nvPr/>
+        </p:nvSpPr>
+        <p:spPr>
+          <a:xfrm>
+            <a:off x="365760" y="3127248"/>
+            <a:ext cx="3657600" cy="1645920"/>
+          </a:xfrm>
+          <a:prstGeom prst="rect">
+            <a:avLst/>
+          </a:prstGeom>
+          <a:solidFill>
+            <a:srgbClr val="FFFFFF"/>
+          </a:solidFill>
+          <a:ln/>
+          <a:effectLst>
+            <a:outerShdw sx="100000" sy="100000" kx="0" ky="0" algn="bl" rotWithShape="0" blurRad="50800" dist="25400" dir="8100000">
+              <a:srgbClr val="000000">
+                <a:alpha val="8000"/>
+              </a:srgbClr>
+            </a:outerShdw>
+          </a:effectLst>
+        </p:spPr>
+      </p:sp>
+      <p:sp>
+        <p:nvSpPr>
+          <p:cNvPr id="18" name="Shape 16"/>
+          <p:cNvSpPr/>
+          <p:nvPr/>
+        </p:nvSpPr>
+        <p:spPr>
+          <a:xfrm>
+            <a:off x="365760" y="3127248"/>
+            <a:ext cx="3657600" cy="73152"/>
+          </a:xfrm>
+          <a:prstGeom prst="rect">
+            <a:avLst/>
+          </a:prstGeom>
+          <a:solidFill>
+            <a:srgbClr val="2E5D9E"/>
+          </a:solidFill>
+          <a:ln/>
+        </p:spPr>
+      </p:sp>
+      <p:sp>
+        <p:nvSpPr>
+          <p:cNvPr id="19" name="Text 17"/>
+          <p:cNvSpPr/>
+          <p:nvPr/>
+        </p:nvSpPr>
+        <p:spPr>
+          <a:xfrm>
+            <a:off x="548640" y="3264408"/>
+            <a:ext cx="3291840" cy="640080"/>
+          </a:xfrm>
+          <a:prstGeom prst="rect">
+            <a:avLst/>
+          </a:prstGeom>
+          <a:noFill/>
+          <a:ln/>
+        </p:spPr>
+        <p:txBody>
+          <a:bodyPr wrap="square" lIns="0" tIns="0" rIns="0" bIns="0" rtlCol="0" anchor="ctr"/>
+          <a:lstStyle/>
+          <a:p>
+            <a:pPr indent="0" marL="0">
+              <a:buNone/>
+            </a:pPr>
+            <a:r>
+              <a:rPr lang="en-US" sz="4000" b="1" dirty="0">
+                <a:solidFill>
+                  <a:srgbClr val="2E5D9E"/>
+                </a:solidFill>
+                <a:latin typeface="Calibri" pitchFamily="34" charset="0"/>
+                <a:ea typeface="Calibri" pitchFamily="34" charset="-122"/>
+                <a:cs typeface="Calibri" pitchFamily="34" charset="-120"/>
+              </a:rPr>
+              <a:t>17</a:t>
+            </a:r>
+            <a:endParaRPr lang="en-US" sz="4000" dirty="0"/>
+          </a:p>
+        </p:txBody>
+      </p:sp>
+      <p:sp>
+        <p:nvSpPr>
+          <p:cNvPr id="20" name="Text 18"/>
+          <p:cNvSpPr/>
+          <p:nvPr/>
+        </p:nvSpPr>
+        <p:spPr>
+          <a:xfrm>
+            <a:off x="548640" y="3904488"/>
+            <a:ext cx="3291840" cy="594360"/>
+          </a:xfrm>
+          <a:prstGeom prst="rect">
+            <a:avLst/>
+          </a:prstGeom>
+          <a:noFill/>
+          <a:ln/>
+        </p:spPr>
+        <p:txBody>
+          <a:bodyPr wrap="square" lIns="0" tIns="0" rIns="0" bIns="0" rtlCol="0" anchor="ctr"/>
+          <a:lstStyle/>
+          <a:p>
+            <a:pPr indent="0" marL="0">
+              <a:buNone/>
+            </a:pPr>
+            <a:r>
+              <a:rPr lang="en-US" sz="1100" dirty="0">
+                <a:solidFill>
+                  <a:srgbClr val="4A5568"/>
+                </a:solidFill>
+                <a:latin typeface="Calibri" pitchFamily="34" charset="0"/>
+                <a:ea typeface="Calibri" pitchFamily="34" charset="-122"/>
+                <a:cs typeface="Calibri" pitchFamily="34" charset="-120"/>
+              </a:rPr>
+              <a:t>Store Clusters</a:t>
+            </a:r>
+            <a:endParaRPr lang="en-US" sz="1100" dirty="0"/>
+          </a:p>
+        </p:txBody>
+      </p:sp>
+      <p:sp>
+        <p:nvSpPr>
+          <p:cNvPr id="21" name="Shape 19"/>
+          <p:cNvSpPr/>
+          <p:nvPr/>
+        </p:nvSpPr>
+        <p:spPr>
+          <a:xfrm>
+            <a:off x="4279392" y="3127248"/>
+            <a:ext cx="3657600" cy="1645920"/>
+          </a:xfrm>
+          <a:prstGeom prst="rect">
+            <a:avLst/>
+          </a:prstGeom>
+          <a:solidFill>
+            <a:srgbClr val="FFFFFF"/>
+          </a:solidFill>
+          <a:ln/>
+          <a:effectLst>
+            <a:outerShdw sx="100000" sy="100000" kx="0" ky="0" algn="bl" rotWithShape="0" blurRad="50800" dist="25400" dir="8100000">
+              <a:srgbClr val="000000">
+                <a:alpha val="8000"/>
+              </a:srgbClr>
+            </a:outerShdw>
+          </a:effectLst>
+        </p:spPr>
+      </p:sp>
+      <p:sp>
+        <p:nvSpPr>
+          <p:cNvPr id="22" name="Shape 20"/>
+          <p:cNvSpPr/>
+          <p:nvPr/>
+        </p:nvSpPr>
+        <p:spPr>
+          <a:xfrm>
+            <a:off x="4279392" y="3127248"/>
+            <a:ext cx="3657600" cy="73152"/>
+          </a:xfrm>
+          <a:prstGeom prst="rect">
+            <a:avLst/>
+          </a:prstGeom>
+          <a:solidFill>
+            <a:srgbClr val="D48B14"/>
+          </a:solidFill>
+          <a:ln/>
+        </p:spPr>
+      </p:sp>
+      <p:sp>
+        <p:nvSpPr>
+          <p:cNvPr id="23" name="Text 21"/>
+          <p:cNvSpPr/>
+          <p:nvPr/>
+        </p:nvSpPr>
+        <p:spPr>
+          <a:xfrm>
+            <a:off x="4462272" y="3264408"/>
+            <a:ext cx="3291840" cy="640080"/>
+          </a:xfrm>
+          <a:prstGeom prst="rect">
+            <a:avLst/>
+          </a:prstGeom>
+          <a:noFill/>
+          <a:ln/>
+        </p:spPr>
+        <p:txBody>
+          <a:bodyPr wrap="square" lIns="0" tIns="0" rIns="0" bIns="0" rtlCol="0" anchor="ctr"/>
+          <a:lstStyle/>
+          <a:p>
+            <a:pPr indent="0" marL="0">
+              <a:buNone/>
+            </a:pPr>
+            <a:r>
+              <a:rPr lang="en-US" sz="4000" b="1" dirty="0">
+                <a:solidFill>
+                  <a:srgbClr val="D48B14"/>
+                </a:solidFill>
+                <a:latin typeface="Calibri" pitchFamily="34" charset="0"/>
+                <a:ea typeface="Calibri" pitchFamily="34" charset="-122"/>
+                <a:cs typeface="Calibri" pitchFamily="34" charset="-120"/>
+              </a:rPr>
+              <a:t>78%</a:t>
+            </a:r>
+            <a:endParaRPr lang="en-US" sz="4000" dirty="0"/>
+          </a:p>
+        </p:txBody>
+      </p:sp>
+      <p:sp>
+        <p:nvSpPr>
+          <p:cNvPr id="24" name="Text 22"/>
+          <p:cNvSpPr/>
+          <p:nvPr/>
+        </p:nvSpPr>
+        <p:spPr>
+          <a:xfrm>
+            <a:off x="4462272" y="3904488"/>
+            <a:ext cx="3291840" cy="594360"/>
+          </a:xfrm>
+          <a:prstGeom prst="rect">
+            <a:avLst/>
+          </a:prstGeom>
+          <a:noFill/>
+          <a:ln/>
+        </p:spPr>
+        <p:txBody>
+          <a:bodyPr wrap="square" lIns="0" tIns="0" rIns="0" bIns="0" rtlCol="0" anchor="ctr"/>
+          <a:lstStyle/>
+          <a:p>
+            <a:pPr indent="0" marL="0">
+              <a:buNone/>
+            </a:pPr>
+            <a:r>
+              <a:rPr lang="en-US" sz="1100" dirty="0">
+                <a:solidFill>
+                  <a:srgbClr val="4A5568"/>
+                </a:solidFill>
+                <a:latin typeface="Calibri" pitchFamily="34" charset="0"/>
+                <a:ea typeface="Calibri" pitchFamily="34" charset="-122"/>
+                <a:cs typeface="Calibri" pitchFamily="34" charset="-120"/>
+              </a:rPr>
+              <a:t>Peak OSA</a:t>
+            </a:r>
+            <a:endParaRPr lang="en-US" sz="1100" dirty="0"/>
+          </a:p>
+        </p:txBody>
+      </p:sp>
+      <p:sp>
+        <p:nvSpPr>
+          <p:cNvPr id="25" name="Shape 23"/>
+          <p:cNvSpPr/>
+          <p:nvPr/>
+        </p:nvSpPr>
+        <p:spPr>
+          <a:xfrm>
+            <a:off x="8193024" y="3127248"/>
+            <a:ext cx="3657600" cy="1645920"/>
+          </a:xfrm>
+          <a:prstGeom prst="rect">
+            <a:avLst/>
+          </a:prstGeom>
+          <a:solidFill>
+            <a:srgbClr val="FFFFFF"/>
+          </a:solidFill>
+          <a:ln/>
+          <a:effectLst>
+            <a:outerShdw sx="100000" sy="100000" kx="0" ky="0" algn="bl" rotWithShape="0" blurRad="50800" dist="25400" dir="8100000">
+              <a:srgbClr val="000000">
+                <a:alpha val="8000"/>
+              </a:srgbClr>
+            </a:outerShdw>
+          </a:effectLst>
+        </p:spPr>
+      </p:sp>
+      <p:sp>
+        <p:nvSpPr>
+          <p:cNvPr id="26" name="Shape 24"/>
+          <p:cNvSpPr/>
+          <p:nvPr/>
+        </p:nvSpPr>
+        <p:spPr>
+          <a:xfrm>
+            <a:off x="8193024" y="3127248"/>
+            <a:ext cx="3657600" cy="73152"/>
+          </a:xfrm>
+          <a:prstGeom prst="rect">
+            <a:avLst/>
+          </a:prstGeom>
+          <a:solidFill>
+            <a:srgbClr val="1D8A5B"/>
+          </a:solidFill>
+          <a:ln/>
+        </p:spPr>
+      </p:sp>
+      <p:sp>
+        <p:nvSpPr>
+          <p:cNvPr id="27" name="Text 25"/>
+          <p:cNvSpPr/>
+          <p:nvPr/>
+        </p:nvSpPr>
+        <p:spPr>
+          <a:xfrm>
+            <a:off x="8375904" y="3264408"/>
+            <a:ext cx="3291840" cy="640080"/>
+          </a:xfrm>
+          <a:prstGeom prst="rect">
+            <a:avLst/>
+          </a:prstGeom>
+          <a:noFill/>
+          <a:ln/>
+        </p:spPr>
+        <p:txBody>
+          <a:bodyPr wrap="square" lIns="0" tIns="0" rIns="0" bIns="0" rtlCol="0" anchor="ctr"/>
+          <a:lstStyle/>
+          <a:p>
+            <a:pPr indent="0" marL="0">
+              <a:buNone/>
+            </a:pPr>
+            <a:r>
+              <a:rPr lang="en-US" sz="4000" b="1" dirty="0">
+                <a:solidFill>
+                  <a:srgbClr val="1D8A5B"/>
+                </a:solidFill>
+                <a:latin typeface="Calibri" pitchFamily="34" charset="0"/>
+                <a:ea typeface="Calibri" pitchFamily="34" charset="-122"/>
+                <a:cs typeface="Calibri" pitchFamily="34" charset="-120"/>
+              </a:rPr>
+              <a:t>+12%</a:t>
+            </a:r>
+            <a:endParaRPr lang="en-US" sz="4000" dirty="0"/>
+          </a:p>
+        </p:txBody>
+      </p:sp>
+      <p:sp>
+        <p:nvSpPr>
+          <p:cNvPr id="28" name="Text 26"/>
+          <p:cNvSpPr/>
+          <p:nvPr/>
+        </p:nvSpPr>
+        <p:spPr>
+          <a:xfrm>
+            <a:off x="8375904" y="3904488"/>
+            <a:ext cx="3291840" cy="594360"/>
+          </a:xfrm>
+          <a:prstGeom prst="rect">
+            <a:avLst/>
+          </a:prstGeom>
+          <a:noFill/>
+          <a:ln/>
+        </p:spPr>
+        <p:txBody>
+          <a:bodyPr wrap="square" lIns="0" tIns="0" rIns="0" bIns="0" rtlCol="0" anchor="ctr"/>
+          <a:lstStyle/>
+          <a:p>
+            <a:pPr indent="0" marL="0">
+              <a:buNone/>
+            </a:pPr>
+            <a:r>
+              <a:rPr lang="en-US" sz="1100" dirty="0">
+                <a:solidFill>
+                  <a:srgbClr val="4A5568"/>
+                </a:solidFill>
+                <a:latin typeface="Calibri" pitchFamily="34" charset="0"/>
+                <a:ea typeface="Calibri" pitchFamily="34" charset="-122"/>
+                <a:cs typeface="Calibri" pitchFamily="34" charset="-120"/>
+              </a:rPr>
+              <a:t>Adult Halo Lift</a:t>
+            </a:r>
+            <a:endParaRPr lang="en-US" sz="1100" dirty="0"/>
+          </a:p>
+        </p:txBody>
+      </p:sp>
+      <p:sp>
+        <p:nvSpPr>
+          <p:cNvPr id="29" name="Shape 27"/>
+          <p:cNvSpPr/>
+          <p:nvPr/>
+        </p:nvSpPr>
+        <p:spPr>
+          <a:xfrm>
+            <a:off x="365760" y="5029200"/>
             <a:ext cx="11430000" cy="1097280"/>
           </a:xfrm>
           <a:prstGeom prst="rect">
             <a:avLst/>
           </a:prstGeom>
+          <a:solidFill>
+            <a:srgbClr val="EBF1FB"/>
+          </a:solidFill>
+          <a:ln/>
+        </p:spPr>
+      </p:sp>
+      <p:sp>
+        <p:nvSpPr>
+          <p:cNvPr id="30" name="Shape 28"/>
+          <p:cNvSpPr/>
+          <p:nvPr/>
+        </p:nvSpPr>
+        <p:spPr>
+          <a:xfrm>
+            <a:off x="365760" y="5029200"/>
+            <a:ext cx="73152" cy="1097280"/>
+          </a:xfrm>
+          <a:prstGeom prst="rect">
+            <a:avLst/>
+          </a:prstGeom>
+          <a:solidFill>
+            <a:srgbClr val="2E5D9E"/>
+          </a:solidFill>
+          <a:ln/>
+        </p:spPr>
+      </p:sp>
+      <p:sp>
+        <p:nvSpPr>
+          <p:cNvPr id="31" name="Text 29"/>
+          <p:cNvSpPr/>
+          <p:nvPr/>
+        </p:nvSpPr>
+        <p:spPr>
+          <a:xfrm>
+            <a:off x="594360" y="5138928"/>
+            <a:ext cx="10972800" cy="914400"/>
+          </a:xfrm>
+          <a:prstGeom prst="rect">
+            <a:avLst/>
+          </a:prstGeom>
           <a:noFill/>
           <a:ln/>
         </p:spPr>
@@ -6177,7 +8436,7 @@
                 <a:ea typeface="Calibri" pitchFamily="34" charset="-122"/>
                 <a:cs typeface="Calibri" pitchFamily="34" charset="-120"/>
               </a:rPr>
-              <a:t>Offsite Display shows strongest incremental return. Onsite Search consuming 63% of budget despite weakest iROI — prime reallocation opportunity.</a:t>
+              <a:t>The PoC validates shelf-signal integration into incrementality models. Kids/Baby category showed +12% incremental lift in Adult segment, proving category halo effect — a lever CommerceIQ and Pacvue cannot decompose, and one that Incremental.com would strip out as a confounder rather than surface as an opportunity.</a:t>
             </a:r>
             <a:endParaRPr lang="en-US" sz="1300" dirty="0"/>
           </a:p>
@@ -6268,7 +8527,7 @@
                 <a:ea typeface="Calibri" pitchFamily="34" charset="-122"/>
                 <a:cs typeface="Calibri" pitchFamily="34" charset="-120"/>
               </a:rPr>
-              <a:t>Defensible Positioning vs. Activation Players</a:t>
+              <a:t>Incremental ROI by Channel (Lactalis)</a:t>
             </a:r>
             <a:endParaRPr lang="en-US" sz="2400" dirty="0"/>
           </a:p>
@@ -6294,79 +8553,48 @@
           <a:ln/>
         </p:spPr>
       </p:sp>
-      <p:sp>
-        <p:nvSpPr>
-          <p:cNvPr id="5" name="Shape 3"/>
-          <p:cNvSpPr/>
-          <p:nvPr/>
-        </p:nvSpPr>
-        <p:spPr>
-          <a:xfrm>
-            <a:off x="365760" y="1298448"/>
-            <a:ext cx="11430000" cy="1005840"/>
-          </a:xfrm>
-          <a:prstGeom prst="rect">
-            <a:avLst/>
-          </a:prstGeom>
-          <a:solidFill>
-            <a:srgbClr val="FFFFFF"/>
-          </a:solidFill>
-          <a:ln/>
-          <a:effectLst>
-            <a:outerShdw sx="100000" sy="100000" kx="0" ky="0" algn="bl" rotWithShape="0" blurRad="50800" dist="25400" dir="8100000">
-              <a:srgbClr val="000000">
-                <a:alpha val="8000"/>
-              </a:srgbClr>
-            </a:outerShdw>
-          </a:effectLst>
-        </p:spPr>
-      </p:sp>
-      <p:sp>
-        <p:nvSpPr>
-          <p:cNvPr id="6" name="Shape 4"/>
-          <p:cNvSpPr/>
-          <p:nvPr/>
-        </p:nvSpPr>
-        <p:spPr>
-          <a:xfrm>
-            <a:off x="365760" y="1298448"/>
-            <a:ext cx="73152" cy="1005840"/>
-          </a:xfrm>
-          <a:prstGeom prst="rect">
-            <a:avLst/>
-          </a:prstGeom>
-          <a:solidFill>
-            <a:srgbClr val="DDE4F0"/>
-          </a:solidFill>
-          <a:ln/>
-        </p:spPr>
-      </p:sp>
-      <p:sp>
-        <p:nvSpPr>
-          <p:cNvPr id="7" name="Text 5"/>
-          <p:cNvSpPr/>
-          <p:nvPr/>
-        </p:nvSpPr>
-        <p:spPr>
-          <a:xfrm>
-            <a:off x="594360" y="1371600"/>
-            <a:ext cx="3657600" cy="365760"/>
-          </a:xfrm>
-          <a:prstGeom prst="rect">
-            <a:avLst/>
-          </a:prstGeom>
-          <a:noFill/>
-          <a:ln/>
-        </p:spPr>
-        <p:txBody>
-          <a:bodyPr wrap="square" lIns="0" tIns="0" rIns="0" bIns="0" rtlCol="0" anchor="ctr"/>
-          <a:lstStyle/>
-          <a:p>
-            <a:pPr indent="0" marL="0">
-              <a:buNone/>
-            </a:pPr>
-            <a:r>
-              <a:rPr lang="en-US" sz="1200" b="1" dirty="0">
+      <p:graphicFrame>
+        <p:nvGraphicFramePr>
+          <p:cNvPr id="5" name="Chart 0" descr=""/>
+          <p:cNvGraphicFramePr/>
+          <p:nvPr/>
+        </p:nvGraphicFramePr>
+        <p:xfrm>
+          <a:off x="365760" y="1298448"/>
+          <a:ext cx="11430000" cy="2926080"/>
+        </p:xfrm>
+        <a:graphic xmlns:a="http://schemas.openxmlformats.org/drawingml/2006/main">
+          <a:graphicData uri="http://schemas.openxmlformats.org/drawingml/2006/chart">
+            <c:chart xmlns:c="http://schemas.openxmlformats.org/drawingml/2006/chart" r:id="rId1"/>
+          </a:graphicData>
+        </a:graphic>
+      </p:graphicFrame>
+      <p:sp>
+        <p:nvSpPr>
+          <p:cNvPr id="6" name="Text 3"/>
+          <p:cNvSpPr/>
+          <p:nvPr/>
+        </p:nvSpPr>
+        <p:spPr>
+          <a:xfrm>
+            <a:off x="365760" y="4389120"/>
+            <a:ext cx="11430000" cy="1097280"/>
+          </a:xfrm>
+          <a:prstGeom prst="rect">
+            <a:avLst/>
+          </a:prstGeom>
+          <a:noFill/>
+          <a:ln/>
+        </p:spPr>
+        <p:txBody>
+          <a:bodyPr wrap="square" lIns="0" tIns="0" rIns="0" bIns="0" rtlCol="0" anchor="ctr"/>
+          <a:lstStyle/>
+          <a:p>
+            <a:pPr indent="0" marL="0">
+              <a:buNone/>
+            </a:pPr>
+            <a:r>
+              <a:rPr lang="en-US" sz="1300" dirty="0">
                 <a:solidFill>
                   <a:srgbClr val="1A2B4A"/>
                 </a:solidFill>
@@ -6374,891 +8602,9 @@
                 <a:ea typeface="Calibri" pitchFamily="34" charset="-122"/>
                 <a:cs typeface="Calibri" pitchFamily="34" charset="-120"/>
               </a:rPr>
-              <a:t>Channel Conflict?</a:t>
-            </a:r>
-            <a:endParaRPr lang="en-US" sz="1200" dirty="0"/>
-          </a:p>
-        </p:txBody>
-      </p:sp>
-      <p:sp>
-        <p:nvSpPr>
-          <p:cNvPr id="8" name="Text 6"/>
-          <p:cNvSpPr/>
-          <p:nvPr/>
-        </p:nvSpPr>
-        <p:spPr>
-          <a:xfrm>
-            <a:off x="4572000" y="1371600"/>
-            <a:ext cx="1097280" cy="365760"/>
-          </a:xfrm>
-          <a:prstGeom prst="rect">
-            <a:avLst/>
-          </a:prstGeom>
-          <a:noFill/>
-          <a:ln/>
-        </p:spPr>
-        <p:txBody>
-          <a:bodyPr wrap="square" lIns="0" tIns="0" rIns="0" bIns="0" rtlCol="0" anchor="ctr"/>
-          <a:lstStyle/>
-          <a:p>
-            <a:pPr indent="0" marL="0">
-              <a:buNone/>
-            </a:pPr>
-            <a:r>
-              <a:rPr lang="en-US" sz="1100" b="1" dirty="0">
-                <a:solidFill>
-                  <a:srgbClr val="1D8A5B"/>
-                </a:solidFill>
-                <a:latin typeface="Calibri" pitchFamily="34" charset="0"/>
-                <a:ea typeface="Calibri" pitchFamily="34" charset="-122"/>
-                <a:cs typeface="Calibri" pitchFamily="34" charset="-120"/>
-              </a:rPr>
-              <a:t>DataWeave:</a:t>
-            </a:r>
-            <a:endParaRPr lang="en-US" sz="1100" dirty="0"/>
-          </a:p>
-        </p:txBody>
-      </p:sp>
-      <p:sp>
-        <p:nvSpPr>
-          <p:cNvPr id="9" name="Text 7"/>
-          <p:cNvSpPr/>
-          <p:nvPr/>
-        </p:nvSpPr>
-        <p:spPr>
-          <a:xfrm>
-            <a:off x="5760720" y="1371600"/>
-            <a:ext cx="2743200" cy="822960"/>
-          </a:xfrm>
-          <a:prstGeom prst="rect">
-            <a:avLst/>
-          </a:prstGeom>
-          <a:noFill/>
-          <a:ln/>
-        </p:spPr>
-        <p:txBody>
-          <a:bodyPr wrap="square" lIns="0" tIns="0" rIns="0" bIns="0" rtlCol="0" anchor="ctr"/>
-          <a:lstStyle/>
-          <a:p>
-            <a:pPr indent="0" marL="0">
-              <a:buNone/>
-            </a:pPr>
-            <a:r>
-              <a:rPr lang="en-US" sz="1100" dirty="0">
-                <a:solidFill>
-                  <a:srgbClr val="4A5568"/>
-                </a:solidFill>
-                <a:latin typeface="Calibri" pitchFamily="34" charset="0"/>
-                <a:ea typeface="Calibri" pitchFamily="34" charset="-122"/>
-                <a:cs typeface="Calibri" pitchFamily="34" charset="-120"/>
-              </a:rPr>
-              <a:t>None</a:t>
-            </a:r>
-            <a:endParaRPr lang="en-US" sz="1100" dirty="0"/>
-          </a:p>
-        </p:txBody>
-      </p:sp>
-      <p:sp>
-        <p:nvSpPr>
-          <p:cNvPr id="10" name="Text 8"/>
-          <p:cNvSpPr/>
-          <p:nvPr/>
-        </p:nvSpPr>
-        <p:spPr>
-          <a:xfrm>
-            <a:off x="8686800" y="1371600"/>
-            <a:ext cx="1097280" cy="365760"/>
-          </a:xfrm>
-          <a:prstGeom prst="rect">
-            <a:avLst/>
-          </a:prstGeom>
-          <a:noFill/>
-          <a:ln/>
-        </p:spPr>
-        <p:txBody>
-          <a:bodyPr wrap="square" lIns="0" tIns="0" rIns="0" bIns="0" rtlCol="0" anchor="ctr"/>
-          <a:lstStyle/>
-          <a:p>
-            <a:pPr indent="0" marL="0">
-              <a:buNone/>
-            </a:pPr>
-            <a:r>
-              <a:rPr lang="en-US" sz="1100" b="1" dirty="0">
-                <a:solidFill>
-                  <a:srgbClr val="718096"/>
-                </a:solidFill>
-                <a:latin typeface="Calibri" pitchFamily="34" charset="0"/>
-                <a:ea typeface="Calibri" pitchFamily="34" charset="-122"/>
-                <a:cs typeface="Calibri" pitchFamily="34" charset="-120"/>
-              </a:rPr>
-              <a:t>Competitors:</a:t>
-            </a:r>
-            <a:endParaRPr lang="en-US" sz="1100" dirty="0"/>
-          </a:p>
-        </p:txBody>
-      </p:sp>
-      <p:sp>
-        <p:nvSpPr>
-          <p:cNvPr id="11" name="Text 9"/>
-          <p:cNvSpPr/>
-          <p:nvPr/>
-        </p:nvSpPr>
-        <p:spPr>
-          <a:xfrm>
-            <a:off x="9875520" y="1371600"/>
-            <a:ext cx="1737360" cy="822960"/>
-          </a:xfrm>
-          <a:prstGeom prst="rect">
-            <a:avLst/>
-          </a:prstGeom>
-          <a:noFill/>
-          <a:ln/>
-        </p:spPr>
-        <p:txBody>
-          <a:bodyPr wrap="square" lIns="0" tIns="0" rIns="0" bIns="0" rtlCol="0" anchor="ctr"/>
-          <a:lstStyle/>
-          <a:p>
-            <a:pPr indent="0" marL="0">
-              <a:buNone/>
-            </a:pPr>
-            <a:r>
-              <a:rPr lang="en-US" sz="1100" dirty="0">
-                <a:solidFill>
-                  <a:srgbClr val="718096"/>
-                </a:solidFill>
-                <a:latin typeface="Calibri" pitchFamily="34" charset="0"/>
-                <a:ea typeface="Calibri" pitchFamily="34" charset="-122"/>
-                <a:cs typeface="Calibri" pitchFamily="34" charset="-120"/>
-              </a:rPr>
-              <a:t>Tied to own bids</a:t>
-            </a:r>
-            <a:endParaRPr lang="en-US" sz="1100" dirty="0"/>
-          </a:p>
-        </p:txBody>
-      </p:sp>
-      <p:sp>
-        <p:nvSpPr>
-          <p:cNvPr id="12" name="Shape 10"/>
-          <p:cNvSpPr/>
-          <p:nvPr/>
-        </p:nvSpPr>
-        <p:spPr>
-          <a:xfrm>
-            <a:off x="365760" y="2395728"/>
-            <a:ext cx="11430000" cy="1005840"/>
-          </a:xfrm>
-          <a:prstGeom prst="rect">
-            <a:avLst/>
-          </a:prstGeom>
-          <a:solidFill>
-            <a:srgbClr val="FFFFFF"/>
-          </a:solidFill>
-          <a:ln/>
-          <a:effectLst>
-            <a:outerShdw sx="100000" sy="100000" kx="0" ky="0" algn="bl" rotWithShape="0" blurRad="50800" dist="25400" dir="8100000">
-              <a:srgbClr val="000000">
-                <a:alpha val="8000"/>
-              </a:srgbClr>
-            </a:outerShdw>
-          </a:effectLst>
-        </p:spPr>
-      </p:sp>
-      <p:sp>
-        <p:nvSpPr>
-          <p:cNvPr id="13" name="Shape 11"/>
-          <p:cNvSpPr/>
-          <p:nvPr/>
-        </p:nvSpPr>
-        <p:spPr>
-          <a:xfrm>
-            <a:off x="365760" y="2395728"/>
-            <a:ext cx="73152" cy="1005840"/>
-          </a:xfrm>
-          <a:prstGeom prst="rect">
-            <a:avLst/>
-          </a:prstGeom>
-          <a:solidFill>
-            <a:srgbClr val="DDE4F0"/>
-          </a:solidFill>
-          <a:ln/>
-        </p:spPr>
-      </p:sp>
-      <p:sp>
-        <p:nvSpPr>
-          <p:cNvPr id="14" name="Text 12"/>
-          <p:cNvSpPr/>
-          <p:nvPr/>
-        </p:nvSpPr>
-        <p:spPr>
-          <a:xfrm>
-            <a:off x="594360" y="2468880"/>
-            <a:ext cx="3657600" cy="365760"/>
-          </a:xfrm>
-          <a:prstGeom prst="rect">
-            <a:avLst/>
-          </a:prstGeom>
-          <a:noFill/>
-          <a:ln/>
-        </p:spPr>
-        <p:txBody>
-          <a:bodyPr wrap="square" lIns="0" tIns="0" rIns="0" bIns="0" rtlCol="0" anchor="ctr"/>
-          <a:lstStyle/>
-          <a:p>
-            <a:pPr indent="0" marL="0">
-              <a:buNone/>
-            </a:pPr>
-            <a:r>
-              <a:rPr lang="en-US" sz="1200" b="1" dirty="0">
-                <a:solidFill>
-                  <a:srgbClr val="1A2B4A"/>
-                </a:solidFill>
-                <a:latin typeface="Calibri" pitchFamily="34" charset="0"/>
-                <a:ea typeface="Calibri" pitchFamily="34" charset="-122"/>
-                <a:cs typeface="Calibri" pitchFamily="34" charset="-120"/>
-              </a:rPr>
-              <a:t>Shelf Signals as Levers?</a:t>
-            </a:r>
-            <a:endParaRPr lang="en-US" sz="1200" dirty="0"/>
-          </a:p>
-        </p:txBody>
-      </p:sp>
-      <p:sp>
-        <p:nvSpPr>
-          <p:cNvPr id="15" name="Text 13"/>
-          <p:cNvSpPr/>
-          <p:nvPr/>
-        </p:nvSpPr>
-        <p:spPr>
-          <a:xfrm>
-            <a:off x="4572000" y="2468880"/>
-            <a:ext cx="1097280" cy="365760"/>
-          </a:xfrm>
-          <a:prstGeom prst="rect">
-            <a:avLst/>
-          </a:prstGeom>
-          <a:noFill/>
-          <a:ln/>
-        </p:spPr>
-        <p:txBody>
-          <a:bodyPr wrap="square" lIns="0" tIns="0" rIns="0" bIns="0" rtlCol="0" anchor="ctr"/>
-          <a:lstStyle/>
-          <a:p>
-            <a:pPr indent="0" marL="0">
-              <a:buNone/>
-            </a:pPr>
-            <a:r>
-              <a:rPr lang="en-US" sz="1100" b="1" dirty="0">
-                <a:solidFill>
-                  <a:srgbClr val="1D8A5B"/>
-                </a:solidFill>
-                <a:latin typeface="Calibri" pitchFamily="34" charset="0"/>
-                <a:ea typeface="Calibri" pitchFamily="34" charset="-122"/>
-                <a:cs typeface="Calibri" pitchFamily="34" charset="-120"/>
-              </a:rPr>
-              <a:t>DataWeave:</a:t>
-            </a:r>
-            <a:endParaRPr lang="en-US" sz="1100" dirty="0"/>
-          </a:p>
-        </p:txBody>
-      </p:sp>
-      <p:sp>
-        <p:nvSpPr>
-          <p:cNvPr id="16" name="Text 14"/>
-          <p:cNvSpPr/>
-          <p:nvPr/>
-        </p:nvSpPr>
-        <p:spPr>
-          <a:xfrm>
-            <a:off x="5760720" y="2468880"/>
-            <a:ext cx="2743200" cy="822960"/>
-          </a:xfrm>
-          <a:prstGeom prst="rect">
-            <a:avLst/>
-          </a:prstGeom>
-          <a:noFill/>
-          <a:ln/>
-        </p:spPr>
-        <p:txBody>
-          <a:bodyPr wrap="square" lIns="0" tIns="0" rIns="0" bIns="0" rtlCol="0" anchor="ctr"/>
-          <a:lstStyle/>
-          <a:p>
-            <a:pPr indent="0" marL="0">
-              <a:buNone/>
-            </a:pPr>
-            <a:r>
-              <a:rPr lang="en-US" sz="1100" dirty="0">
-                <a:solidFill>
-                  <a:srgbClr val="4A5568"/>
-                </a:solidFill>
-                <a:latin typeface="Calibri" pitchFamily="34" charset="0"/>
-                <a:ea typeface="Calibri" pitchFamily="34" charset="-122"/>
-                <a:cs typeface="Calibri" pitchFamily="34" charset="-120"/>
-              </a:rPr>
-              <a:t>First-class inputs</a:t>
-            </a:r>
-            <a:endParaRPr lang="en-US" sz="1100" dirty="0"/>
-          </a:p>
-        </p:txBody>
-      </p:sp>
-      <p:sp>
-        <p:nvSpPr>
-          <p:cNvPr id="17" name="Text 15"/>
-          <p:cNvSpPr/>
-          <p:nvPr/>
-        </p:nvSpPr>
-        <p:spPr>
-          <a:xfrm>
-            <a:off x="8686800" y="2468880"/>
-            <a:ext cx="1097280" cy="365760"/>
-          </a:xfrm>
-          <a:prstGeom prst="rect">
-            <a:avLst/>
-          </a:prstGeom>
-          <a:noFill/>
-          <a:ln/>
-        </p:spPr>
-        <p:txBody>
-          <a:bodyPr wrap="square" lIns="0" tIns="0" rIns="0" bIns="0" rtlCol="0" anchor="ctr"/>
-          <a:lstStyle/>
-          <a:p>
-            <a:pPr indent="0" marL="0">
-              <a:buNone/>
-            </a:pPr>
-            <a:r>
-              <a:rPr lang="en-US" sz="1100" b="1" dirty="0">
-                <a:solidFill>
-                  <a:srgbClr val="718096"/>
-                </a:solidFill>
-                <a:latin typeface="Calibri" pitchFamily="34" charset="0"/>
-                <a:ea typeface="Calibri" pitchFamily="34" charset="-122"/>
-                <a:cs typeface="Calibri" pitchFamily="34" charset="-120"/>
-              </a:rPr>
-              <a:t>Competitors:</a:t>
-            </a:r>
-            <a:endParaRPr lang="en-US" sz="1100" dirty="0"/>
-          </a:p>
-        </p:txBody>
-      </p:sp>
-      <p:sp>
-        <p:nvSpPr>
-          <p:cNvPr id="18" name="Text 16"/>
-          <p:cNvSpPr/>
-          <p:nvPr/>
-        </p:nvSpPr>
-        <p:spPr>
-          <a:xfrm>
-            <a:off x="9875520" y="2468880"/>
-            <a:ext cx="1737360" cy="822960"/>
-          </a:xfrm>
-          <a:prstGeom prst="rect">
-            <a:avLst/>
-          </a:prstGeom>
-          <a:noFill/>
-          <a:ln/>
-        </p:spPr>
-        <p:txBody>
-          <a:bodyPr wrap="square" lIns="0" tIns="0" rIns="0" bIns="0" rtlCol="0" anchor="ctr"/>
-          <a:lstStyle/>
-          <a:p>
-            <a:pPr indent="0" marL="0">
-              <a:buNone/>
-            </a:pPr>
-            <a:r>
-              <a:rPr lang="en-US" sz="1100" dirty="0">
-                <a:solidFill>
-                  <a:srgbClr val="718096"/>
-                </a:solidFill>
-                <a:latin typeface="Calibri" pitchFamily="34" charset="0"/>
-                <a:ea typeface="Calibri" pitchFamily="34" charset="-122"/>
-                <a:cs typeface="Calibri" pitchFamily="34" charset="-120"/>
-              </a:rPr>
-              <a:t>Secondary signals</a:t>
-            </a:r>
-            <a:endParaRPr lang="en-US" sz="1100" dirty="0"/>
-          </a:p>
-        </p:txBody>
-      </p:sp>
-      <p:sp>
-        <p:nvSpPr>
-          <p:cNvPr id="19" name="Shape 17"/>
-          <p:cNvSpPr/>
-          <p:nvPr/>
-        </p:nvSpPr>
-        <p:spPr>
-          <a:xfrm>
-            <a:off x="365760" y="3493008"/>
-            <a:ext cx="11430000" cy="1005840"/>
-          </a:xfrm>
-          <a:prstGeom prst="rect">
-            <a:avLst/>
-          </a:prstGeom>
-          <a:solidFill>
-            <a:srgbClr val="FFFFFF"/>
-          </a:solidFill>
-          <a:ln/>
-          <a:effectLst>
-            <a:outerShdw sx="100000" sy="100000" kx="0" ky="0" algn="bl" rotWithShape="0" blurRad="50800" dist="25400" dir="8100000">
-              <a:srgbClr val="000000">
-                <a:alpha val="8000"/>
-              </a:srgbClr>
-            </a:outerShdw>
-          </a:effectLst>
-        </p:spPr>
-      </p:sp>
-      <p:sp>
-        <p:nvSpPr>
-          <p:cNvPr id="20" name="Shape 18"/>
-          <p:cNvSpPr/>
-          <p:nvPr/>
-        </p:nvSpPr>
-        <p:spPr>
-          <a:xfrm>
-            <a:off x="365760" y="3493008"/>
-            <a:ext cx="73152" cy="1005840"/>
-          </a:xfrm>
-          <a:prstGeom prst="rect">
-            <a:avLst/>
-          </a:prstGeom>
-          <a:solidFill>
-            <a:srgbClr val="DDE4F0"/>
-          </a:solidFill>
-          <a:ln/>
-        </p:spPr>
-      </p:sp>
-      <p:sp>
-        <p:nvSpPr>
-          <p:cNvPr id="21" name="Text 19"/>
-          <p:cNvSpPr/>
-          <p:nvPr/>
-        </p:nvSpPr>
-        <p:spPr>
-          <a:xfrm>
-            <a:off x="594360" y="3566160"/>
-            <a:ext cx="3657600" cy="365760"/>
-          </a:xfrm>
-          <a:prstGeom prst="rect">
-            <a:avLst/>
-          </a:prstGeom>
-          <a:noFill/>
-          <a:ln/>
-        </p:spPr>
-        <p:txBody>
-          <a:bodyPr wrap="square" lIns="0" tIns="0" rIns="0" bIns="0" rtlCol="0" anchor="ctr"/>
-          <a:lstStyle/>
-          <a:p>
-            <a:pPr indent="0" marL="0">
-              <a:buNone/>
-            </a:pPr>
-            <a:r>
-              <a:rPr lang="en-US" sz="1200" b="1" dirty="0">
-                <a:solidFill>
-                  <a:srgbClr val="1A2B4A"/>
-                </a:solidFill>
-                <a:latin typeface="Calibri" pitchFamily="34" charset="0"/>
-                <a:ea typeface="Calibri" pitchFamily="34" charset="-122"/>
-                <a:cs typeface="Calibri" pitchFamily="34" charset="-120"/>
-              </a:rPr>
-              <a:t>Store-Cluster Decomposition?</a:t>
-            </a:r>
-            <a:endParaRPr lang="en-US" sz="1200" dirty="0"/>
-          </a:p>
-        </p:txBody>
-      </p:sp>
-      <p:sp>
-        <p:nvSpPr>
-          <p:cNvPr id="22" name="Text 20"/>
-          <p:cNvSpPr/>
-          <p:nvPr/>
-        </p:nvSpPr>
-        <p:spPr>
-          <a:xfrm>
-            <a:off x="4572000" y="3566160"/>
-            <a:ext cx="1097280" cy="365760"/>
-          </a:xfrm>
-          <a:prstGeom prst="rect">
-            <a:avLst/>
-          </a:prstGeom>
-          <a:noFill/>
-          <a:ln/>
-        </p:spPr>
-        <p:txBody>
-          <a:bodyPr wrap="square" lIns="0" tIns="0" rIns="0" bIns="0" rtlCol="0" anchor="ctr"/>
-          <a:lstStyle/>
-          <a:p>
-            <a:pPr indent="0" marL="0">
-              <a:buNone/>
-            </a:pPr>
-            <a:r>
-              <a:rPr lang="en-US" sz="1100" b="1" dirty="0">
-                <a:solidFill>
-                  <a:srgbClr val="1D8A5B"/>
-                </a:solidFill>
-                <a:latin typeface="Calibri" pitchFamily="34" charset="0"/>
-                <a:ea typeface="Calibri" pitchFamily="34" charset="-122"/>
-                <a:cs typeface="Calibri" pitchFamily="34" charset="-120"/>
-              </a:rPr>
-              <a:t>DataWeave:</a:t>
-            </a:r>
-            <a:endParaRPr lang="en-US" sz="1100" dirty="0"/>
-          </a:p>
-        </p:txBody>
-      </p:sp>
-      <p:sp>
-        <p:nvSpPr>
-          <p:cNvPr id="23" name="Text 21"/>
-          <p:cNvSpPr/>
-          <p:nvPr/>
-        </p:nvSpPr>
-        <p:spPr>
-          <a:xfrm>
-            <a:off x="5760720" y="3566160"/>
-            <a:ext cx="2743200" cy="822960"/>
-          </a:xfrm>
-          <a:prstGeom prst="rect">
-            <a:avLst/>
-          </a:prstGeom>
-          <a:noFill/>
-          <a:ln/>
-        </p:spPr>
-        <p:txBody>
-          <a:bodyPr wrap="square" lIns="0" tIns="0" rIns="0" bIns="0" rtlCol="0" anchor="ctr"/>
-          <a:lstStyle/>
-          <a:p>
-            <a:pPr indent="0" marL="0">
-              <a:buNone/>
-            </a:pPr>
-            <a:r>
-              <a:rPr lang="en-US" sz="1100" dirty="0">
-                <a:solidFill>
-                  <a:srgbClr val="4A5568"/>
-                </a:solidFill>
-                <a:latin typeface="Calibri" pitchFamily="34" charset="0"/>
-                <a:ea typeface="Calibri" pitchFamily="34" charset="-122"/>
-                <a:cs typeface="Calibri" pitchFamily="34" charset="-120"/>
-              </a:rPr>
-              <a:t>Yes — 17 clusters tested</a:t>
-            </a:r>
-            <a:endParaRPr lang="en-US" sz="1100" dirty="0"/>
-          </a:p>
-        </p:txBody>
-      </p:sp>
-      <p:sp>
-        <p:nvSpPr>
-          <p:cNvPr id="24" name="Text 22"/>
-          <p:cNvSpPr/>
-          <p:nvPr/>
-        </p:nvSpPr>
-        <p:spPr>
-          <a:xfrm>
-            <a:off x="8686800" y="3566160"/>
-            <a:ext cx="1097280" cy="365760"/>
-          </a:xfrm>
-          <a:prstGeom prst="rect">
-            <a:avLst/>
-          </a:prstGeom>
-          <a:noFill/>
-          <a:ln/>
-        </p:spPr>
-        <p:txBody>
-          <a:bodyPr wrap="square" lIns="0" tIns="0" rIns="0" bIns="0" rtlCol="0" anchor="ctr"/>
-          <a:lstStyle/>
-          <a:p>
-            <a:pPr indent="0" marL="0">
-              <a:buNone/>
-            </a:pPr>
-            <a:r>
-              <a:rPr lang="en-US" sz="1100" b="1" dirty="0">
-                <a:solidFill>
-                  <a:srgbClr val="718096"/>
-                </a:solidFill>
-                <a:latin typeface="Calibri" pitchFamily="34" charset="0"/>
-                <a:ea typeface="Calibri" pitchFamily="34" charset="-122"/>
-                <a:cs typeface="Calibri" pitchFamily="34" charset="-120"/>
-              </a:rPr>
-              <a:t>Competitors:</a:t>
-            </a:r>
-            <a:endParaRPr lang="en-US" sz="1100" dirty="0"/>
-          </a:p>
-        </p:txBody>
-      </p:sp>
-      <p:sp>
-        <p:nvSpPr>
-          <p:cNvPr id="25" name="Text 23"/>
-          <p:cNvSpPr/>
-          <p:nvPr/>
-        </p:nvSpPr>
-        <p:spPr>
-          <a:xfrm>
-            <a:off x="9875520" y="3566160"/>
-            <a:ext cx="1737360" cy="822960"/>
-          </a:xfrm>
-          <a:prstGeom prst="rect">
-            <a:avLst/>
-          </a:prstGeom>
-          <a:noFill/>
-          <a:ln/>
-        </p:spPr>
-        <p:txBody>
-          <a:bodyPr wrap="square" lIns="0" tIns="0" rIns="0" bIns="0" rtlCol="0" anchor="ctr"/>
-          <a:lstStyle/>
-          <a:p>
-            <a:pPr indent="0" marL="0">
-              <a:buNone/>
-            </a:pPr>
-            <a:r>
-              <a:rPr lang="en-US" sz="1100" dirty="0">
-                <a:solidFill>
-                  <a:srgbClr val="718096"/>
-                </a:solidFill>
-                <a:latin typeface="Calibri" pitchFamily="34" charset="0"/>
-                <a:ea typeface="Calibri" pitchFamily="34" charset="-122"/>
-                <a:cs typeface="Calibri" pitchFamily="34" charset="-120"/>
-              </a:rPr>
-              <a:t>No — channel-level only</a:t>
-            </a:r>
-            <a:endParaRPr lang="en-US" sz="1100" dirty="0"/>
-          </a:p>
-        </p:txBody>
-      </p:sp>
-      <p:sp>
-        <p:nvSpPr>
-          <p:cNvPr id="26" name="Shape 24"/>
-          <p:cNvSpPr/>
-          <p:nvPr/>
-        </p:nvSpPr>
-        <p:spPr>
-          <a:xfrm>
-            <a:off x="365760" y="4590288"/>
-            <a:ext cx="11430000" cy="1005840"/>
-          </a:xfrm>
-          <a:prstGeom prst="rect">
-            <a:avLst/>
-          </a:prstGeom>
-          <a:solidFill>
-            <a:srgbClr val="FFFFFF"/>
-          </a:solidFill>
-          <a:ln/>
-          <a:effectLst>
-            <a:outerShdw sx="100000" sy="100000" kx="0" ky="0" algn="bl" rotWithShape="0" blurRad="50800" dist="25400" dir="8100000">
-              <a:srgbClr val="000000">
-                <a:alpha val="8000"/>
-              </a:srgbClr>
-            </a:outerShdw>
-          </a:effectLst>
-        </p:spPr>
-      </p:sp>
-      <p:sp>
-        <p:nvSpPr>
-          <p:cNvPr id="27" name="Shape 25"/>
-          <p:cNvSpPr/>
-          <p:nvPr/>
-        </p:nvSpPr>
-        <p:spPr>
-          <a:xfrm>
-            <a:off x="365760" y="4590288"/>
-            <a:ext cx="73152" cy="1005840"/>
-          </a:xfrm>
-          <a:prstGeom prst="rect">
-            <a:avLst/>
-          </a:prstGeom>
-          <a:solidFill>
-            <a:srgbClr val="DDE4F0"/>
-          </a:solidFill>
-          <a:ln/>
-        </p:spPr>
-      </p:sp>
-      <p:sp>
-        <p:nvSpPr>
-          <p:cNvPr id="28" name="Text 26"/>
-          <p:cNvSpPr/>
-          <p:nvPr/>
-        </p:nvSpPr>
-        <p:spPr>
-          <a:xfrm>
-            <a:off x="594360" y="4663440"/>
-            <a:ext cx="3657600" cy="365760"/>
-          </a:xfrm>
-          <a:prstGeom prst="rect">
-            <a:avLst/>
-          </a:prstGeom>
-          <a:noFill/>
-          <a:ln/>
-        </p:spPr>
-        <p:txBody>
-          <a:bodyPr wrap="square" lIns="0" tIns="0" rIns="0" bIns="0" rtlCol="0" anchor="ctr"/>
-          <a:lstStyle/>
-          <a:p>
-            <a:pPr indent="0" marL="0">
-              <a:buNone/>
-            </a:pPr>
-            <a:r>
-              <a:rPr lang="en-US" sz="1200" b="1" dirty="0">
-                <a:solidFill>
-                  <a:srgbClr val="1A2B4A"/>
-                </a:solidFill>
-                <a:latin typeface="Calibri" pitchFamily="34" charset="0"/>
-                <a:ea typeface="Calibri" pitchFamily="34" charset="-122"/>
-                <a:cs typeface="Calibri" pitchFamily="34" charset="-120"/>
-              </a:rPr>
-              <a:t>CFO-Ready Output?</a:t>
-            </a:r>
-            <a:endParaRPr lang="en-US" sz="1200" dirty="0"/>
-          </a:p>
-        </p:txBody>
-      </p:sp>
-      <p:sp>
-        <p:nvSpPr>
-          <p:cNvPr id="29" name="Text 27"/>
-          <p:cNvSpPr/>
-          <p:nvPr/>
-        </p:nvSpPr>
-        <p:spPr>
-          <a:xfrm>
-            <a:off x="4572000" y="4663440"/>
-            <a:ext cx="1097280" cy="365760"/>
-          </a:xfrm>
-          <a:prstGeom prst="rect">
-            <a:avLst/>
-          </a:prstGeom>
-          <a:noFill/>
-          <a:ln/>
-        </p:spPr>
-        <p:txBody>
-          <a:bodyPr wrap="square" lIns="0" tIns="0" rIns="0" bIns="0" rtlCol="0" anchor="ctr"/>
-          <a:lstStyle/>
-          <a:p>
-            <a:pPr indent="0" marL="0">
-              <a:buNone/>
-            </a:pPr>
-            <a:r>
-              <a:rPr lang="en-US" sz="1100" b="1" dirty="0">
-                <a:solidFill>
-                  <a:srgbClr val="1D8A5B"/>
-                </a:solidFill>
-                <a:latin typeface="Calibri" pitchFamily="34" charset="0"/>
-                <a:ea typeface="Calibri" pitchFamily="34" charset="-122"/>
-                <a:cs typeface="Calibri" pitchFamily="34" charset="-120"/>
-              </a:rPr>
-              <a:t>DataWeave:</a:t>
-            </a:r>
-            <a:endParaRPr lang="en-US" sz="1100" dirty="0"/>
-          </a:p>
-        </p:txBody>
-      </p:sp>
-      <p:sp>
-        <p:nvSpPr>
-          <p:cNvPr id="30" name="Text 28"/>
-          <p:cNvSpPr/>
-          <p:nvPr/>
-        </p:nvSpPr>
-        <p:spPr>
-          <a:xfrm>
-            <a:off x="5760720" y="4663440"/>
-            <a:ext cx="2743200" cy="822960"/>
-          </a:xfrm>
-          <a:prstGeom prst="rect">
-            <a:avLst/>
-          </a:prstGeom>
-          <a:noFill/>
-          <a:ln/>
-        </p:spPr>
-        <p:txBody>
-          <a:bodyPr wrap="square" lIns="0" tIns="0" rIns="0" bIns="0" rtlCol="0" anchor="ctr"/>
-          <a:lstStyle/>
-          <a:p>
-            <a:pPr indent="0" marL="0">
-              <a:buNone/>
-            </a:pPr>
-            <a:r>
-              <a:rPr lang="en-US" sz="1100" dirty="0">
-                <a:solidFill>
-                  <a:srgbClr val="4A5568"/>
-                </a:solidFill>
-                <a:latin typeface="Calibri" pitchFamily="34" charset="0"/>
-                <a:ea typeface="Calibri" pitchFamily="34" charset="-122"/>
-                <a:cs typeface="Calibri" pitchFamily="34" charset="-120"/>
-              </a:rPr>
-              <a:t>Attribution + reallocation recommendations</a:t>
-            </a:r>
-            <a:endParaRPr lang="en-US" sz="1100" dirty="0"/>
-          </a:p>
-        </p:txBody>
-      </p:sp>
-      <p:sp>
-        <p:nvSpPr>
-          <p:cNvPr id="31" name="Text 29"/>
-          <p:cNvSpPr/>
-          <p:nvPr/>
-        </p:nvSpPr>
-        <p:spPr>
-          <a:xfrm>
-            <a:off x="8686800" y="4663440"/>
-            <a:ext cx="1097280" cy="365760"/>
-          </a:xfrm>
-          <a:prstGeom prst="rect">
-            <a:avLst/>
-          </a:prstGeom>
-          <a:noFill/>
-          <a:ln/>
-        </p:spPr>
-        <p:txBody>
-          <a:bodyPr wrap="square" lIns="0" tIns="0" rIns="0" bIns="0" rtlCol="0" anchor="ctr"/>
-          <a:lstStyle/>
-          <a:p>
-            <a:pPr indent="0" marL="0">
-              <a:buNone/>
-            </a:pPr>
-            <a:r>
-              <a:rPr lang="en-US" sz="1100" b="1" dirty="0">
-                <a:solidFill>
-                  <a:srgbClr val="718096"/>
-                </a:solidFill>
-                <a:latin typeface="Calibri" pitchFamily="34" charset="0"/>
-                <a:ea typeface="Calibri" pitchFamily="34" charset="-122"/>
-                <a:cs typeface="Calibri" pitchFamily="34" charset="-120"/>
-              </a:rPr>
-              <a:t>Competitors:</a:t>
-            </a:r>
-            <a:endParaRPr lang="en-US" sz="1100" dirty="0"/>
-          </a:p>
-        </p:txBody>
-      </p:sp>
-      <p:sp>
-        <p:nvSpPr>
-          <p:cNvPr id="32" name="Text 30"/>
-          <p:cNvSpPr/>
-          <p:nvPr/>
-        </p:nvSpPr>
-        <p:spPr>
-          <a:xfrm>
-            <a:off x="9875520" y="4663440"/>
-            <a:ext cx="1737360" cy="822960"/>
-          </a:xfrm>
-          <a:prstGeom prst="rect">
-            <a:avLst/>
-          </a:prstGeom>
-          <a:noFill/>
-          <a:ln/>
-        </p:spPr>
-        <p:txBody>
-          <a:bodyPr wrap="square" lIns="0" tIns="0" rIns="0" bIns="0" rtlCol="0" anchor="ctr"/>
-          <a:lstStyle/>
-          <a:p>
-            <a:pPr indent="0" marL="0">
-              <a:buNone/>
-            </a:pPr>
-            <a:r>
-              <a:rPr lang="en-US" sz="1100" dirty="0">
-                <a:solidFill>
-                  <a:srgbClr val="718096"/>
-                </a:solidFill>
-                <a:latin typeface="Calibri" pitchFamily="34" charset="0"/>
-                <a:ea typeface="Calibri" pitchFamily="34" charset="-122"/>
-                <a:cs typeface="Calibri" pitchFamily="34" charset="-120"/>
-              </a:rPr>
-              <a:t>Optimization suggestions</a:t>
-            </a:r>
-            <a:endParaRPr lang="en-US" sz="1100" dirty="0"/>
+              <a:t>Offsite Display shows strongest incremental return. Onsite Search consuming 63% of budget despite weakest iROI — prime reallocation opportunity.</a:t>
+            </a:r>
+            <a:endParaRPr lang="en-US" sz="1300" dirty="0"/>
           </a:p>
         </p:txBody>
       </p:sp>
@@ -7347,7 +8693,7 @@
                 <a:ea typeface="Calibri" pitchFamily="34" charset="-122"/>
                 <a:cs typeface="Calibri" pitchFamily="34" charset="-120"/>
               </a:rPr>
-              <a:t>6-Month GTM: Services-Led, Tableau Delivery</a:t>
+              <a:t>Defensible Positioning vs. Activation Players</a:t>
             </a:r>
             <a:endParaRPr lang="en-US" sz="2400" dirty="0"/>
           </a:p>
@@ -7361,8 +8707,28 @@
         </p:nvSpPr>
         <p:spPr>
           <a:xfrm>
-            <a:off x="365760" y="1097280"/>
-            <a:ext cx="3657600" cy="3657600"/>
+            <a:off x="365760" y="1115568"/>
+            <a:ext cx="11430000" cy="18288"/>
+          </a:xfrm>
+          <a:prstGeom prst="rect">
+            <a:avLst/>
+          </a:prstGeom>
+          <a:solidFill>
+            <a:srgbClr val="DDE4F0"/>
+          </a:solidFill>
+          <a:ln/>
+        </p:spPr>
+      </p:sp>
+      <p:sp>
+        <p:nvSpPr>
+          <p:cNvPr id="5" name="Shape 3"/>
+          <p:cNvSpPr/>
+          <p:nvPr/>
+        </p:nvSpPr>
+        <p:spPr>
+          <a:xfrm>
+            <a:off x="365760" y="1298448"/>
+            <a:ext cx="11430000" cy="1005840"/>
           </a:xfrm>
           <a:prstGeom prst="rect">
             <a:avLst/>
@@ -7382,62 +8748,23 @@
       </p:sp>
       <p:sp>
         <p:nvSpPr>
-          <p:cNvPr id="5" name="Shape 3"/>
-          <p:cNvSpPr/>
-          <p:nvPr/>
-        </p:nvSpPr>
-        <p:spPr>
-          <a:xfrm>
-            <a:off x="365760" y="1097280"/>
-            <a:ext cx="3657600" cy="73152"/>
-          </a:xfrm>
-          <a:prstGeom prst="rect">
-            <a:avLst/>
-          </a:prstGeom>
-          <a:solidFill>
-            <a:srgbClr val="2E5D9E"/>
-          </a:solidFill>
-          <a:ln/>
-        </p:spPr>
-      </p:sp>
-      <p:sp>
-        <p:nvSpPr>
-          <p:cNvPr id="6" name="Text 4"/>
-          <p:cNvSpPr/>
-          <p:nvPr/>
-        </p:nvSpPr>
-        <p:spPr>
-          <a:xfrm>
-            <a:off x="548640" y="1234440"/>
-            <a:ext cx="3291840" cy="274320"/>
-          </a:xfrm>
-          <a:prstGeom prst="rect">
-            <a:avLst/>
-          </a:prstGeom>
-          <a:noFill/>
-          <a:ln/>
-        </p:spPr>
-        <p:txBody>
-          <a:bodyPr wrap="square" lIns="0" tIns="0" rIns="0" bIns="0" rtlCol="0" anchor="ctr"/>
-          <a:lstStyle/>
-          <a:p>
-            <a:pPr indent="0" marL="0">
-              <a:buNone/>
-            </a:pPr>
-            <a:r>
-              <a:rPr lang="en-US" sz="1400" b="1" dirty="0">
-                <a:solidFill>
-                  <a:srgbClr val="2E5D9E"/>
-                </a:solidFill>
-                <a:latin typeface="Calibri" pitchFamily="34" charset="0"/>
-                <a:ea typeface="Calibri" pitchFamily="34" charset="-122"/>
-                <a:cs typeface="Calibri" pitchFamily="34" charset="-120"/>
-              </a:rPr>
-              <a:t>Q2 2026</a:t>
-            </a:r>
-            <a:endParaRPr lang="en-US" sz="1400" dirty="0"/>
-          </a:p>
-        </p:txBody>
+          <p:cNvPr id="6" name="Shape 4"/>
+          <p:cNvSpPr/>
+          <p:nvPr/>
+        </p:nvSpPr>
+        <p:spPr>
+          <a:xfrm>
+            <a:off x="365760" y="1298448"/>
+            <a:ext cx="73152" cy="1005840"/>
+          </a:xfrm>
+          <a:prstGeom prst="rect">
+            <a:avLst/>
+          </a:prstGeom>
+          <a:solidFill>
+            <a:srgbClr val="DDE4F0"/>
+          </a:solidFill>
+          <a:ln/>
+        </p:spPr>
       </p:sp>
       <p:sp>
         <p:nvSpPr>
@@ -7447,24 +8774,24 @@
         </p:nvSpPr>
         <p:spPr>
           <a:xfrm>
-            <a:off x="548640" y="1554480"/>
-            <a:ext cx="3291840" cy="457200"/>
-          </a:xfrm>
-          <a:prstGeom prst="rect">
-            <a:avLst/>
-          </a:prstGeom>
-          <a:noFill/>
-          <a:ln/>
-        </p:spPr>
-        <p:txBody>
-          <a:bodyPr wrap="square" lIns="0" tIns="0" rIns="0" bIns="0" rtlCol="0" anchor="ctr"/>
-          <a:lstStyle/>
-          <a:p>
-            <a:pPr indent="0" marL="0">
-              <a:buNone/>
-            </a:pPr>
-            <a:r>
-              <a:rPr lang="en-US" sz="1600" b="1" dirty="0">
+            <a:off x="594360" y="1371600"/>
+            <a:ext cx="3657600" cy="365760"/>
+          </a:xfrm>
+          <a:prstGeom prst="rect">
+            <a:avLst/>
+          </a:prstGeom>
+          <a:noFill/>
+          <a:ln/>
+        </p:spPr>
+        <p:txBody>
+          <a:bodyPr wrap="square" lIns="0" tIns="0" rIns="0" bIns="0" rtlCol="0" anchor="ctr"/>
+          <a:lstStyle/>
+          <a:p>
+            <a:pPr indent="0" marL="0">
+              <a:buNone/>
+            </a:pPr>
+            <a:r>
+              <a:rPr lang="en-US" sz="1200" b="1" dirty="0">
                 <a:solidFill>
                   <a:srgbClr val="1A2B4A"/>
                 </a:solidFill>
@@ -7472,31 +8799,50 @@
                 <a:ea typeface="Calibri" pitchFamily="34" charset="-122"/>
                 <a:cs typeface="Calibri" pitchFamily="34" charset="-120"/>
               </a:rPr>
-              <a:t>Beta Launch</a:t>
-            </a:r>
-            <a:endParaRPr lang="en-US" sz="1600" dirty="0"/>
-          </a:p>
-        </p:txBody>
-      </p:sp>
-      <p:sp>
-        <p:nvSpPr>
-          <p:cNvPr id="8" name="Shape 6"/>
-          <p:cNvSpPr/>
-          <p:nvPr/>
-        </p:nvSpPr>
-        <p:spPr>
-          <a:xfrm>
-            <a:off x="548640" y="2103120"/>
-            <a:ext cx="3291840" cy="9144"/>
-          </a:xfrm>
-          <a:prstGeom prst="rect">
-            <a:avLst/>
-          </a:prstGeom>
-          <a:solidFill>
-            <a:srgbClr val="DDE4F0"/>
-          </a:solidFill>
-          <a:ln/>
-        </p:spPr>
+              <a:t>Channel Conflict?</a:t>
+            </a:r>
+            <a:endParaRPr lang="en-US" sz="1200" dirty="0"/>
+          </a:p>
+        </p:txBody>
+      </p:sp>
+      <p:sp>
+        <p:nvSpPr>
+          <p:cNvPr id="8" name="Text 6"/>
+          <p:cNvSpPr/>
+          <p:nvPr/>
+        </p:nvSpPr>
+        <p:spPr>
+          <a:xfrm>
+            <a:off x="4572000" y="1371600"/>
+            <a:ext cx="1097280" cy="365760"/>
+          </a:xfrm>
+          <a:prstGeom prst="rect">
+            <a:avLst/>
+          </a:prstGeom>
+          <a:noFill/>
+          <a:ln/>
+        </p:spPr>
+        <p:txBody>
+          <a:bodyPr wrap="square" lIns="0" tIns="0" rIns="0" bIns="0" rtlCol="0" anchor="ctr"/>
+          <a:lstStyle/>
+          <a:p>
+            <a:pPr indent="0" marL="0">
+              <a:buNone/>
+            </a:pPr>
+            <a:r>
+              <a:rPr lang="en-US" sz="1100" b="1" dirty="0">
+                <a:solidFill>
+                  <a:srgbClr val="1D8A5B"/>
+                </a:solidFill>
+                <a:latin typeface="Calibri" pitchFamily="34" charset="0"/>
+                <a:ea typeface="Calibri" pitchFamily="34" charset="-122"/>
+                <a:cs typeface="Calibri" pitchFamily="34" charset="-120"/>
+              </a:rPr>
+              <a:t>DataWeave:</a:t>
+            </a:r>
+            <a:endParaRPr lang="en-US" sz="1100" dirty="0"/>
+          </a:p>
+        </p:txBody>
       </p:sp>
       <p:sp>
         <p:nvSpPr>
@@ -7506,8 +8852,8 @@
         </p:nvSpPr>
         <p:spPr>
           <a:xfrm>
-            <a:off x="548640" y="2240280"/>
-            <a:ext cx="3291840" cy="2103120"/>
+            <a:off x="5760720" y="1371600"/>
+            <a:ext cx="2743200" cy="822960"/>
           </a:xfrm>
           <a:prstGeom prst="rect">
             <a:avLst/>
@@ -7531,7 +8877,7 @@
                 <a:ea typeface="Calibri" pitchFamily="34" charset="-122"/>
                 <a:cs typeface="Calibri" pitchFamily="34" charset="-120"/>
               </a:rPr>
-              <a:t>Lactalis + 1-2 fast followers</a:t>
+              <a:t>None</a:t>
             </a:r>
             <a:endParaRPr lang="en-US" sz="1100" dirty="0"/>
           </a:p>
@@ -7539,14 +8885,92 @@
       </p:sp>
       <p:sp>
         <p:nvSpPr>
-          <p:cNvPr id="10" name="Shape 8"/>
-          <p:cNvSpPr/>
-          <p:nvPr/>
-        </p:nvSpPr>
-        <p:spPr>
-          <a:xfrm>
-            <a:off x="4434840" y="1097280"/>
-            <a:ext cx="3657600" cy="3657600"/>
+          <p:cNvPr id="10" name="Text 8"/>
+          <p:cNvSpPr/>
+          <p:nvPr/>
+        </p:nvSpPr>
+        <p:spPr>
+          <a:xfrm>
+            <a:off x="8686800" y="1371600"/>
+            <a:ext cx="1097280" cy="365760"/>
+          </a:xfrm>
+          <a:prstGeom prst="rect">
+            <a:avLst/>
+          </a:prstGeom>
+          <a:noFill/>
+          <a:ln/>
+        </p:spPr>
+        <p:txBody>
+          <a:bodyPr wrap="square" lIns="0" tIns="0" rIns="0" bIns="0" rtlCol="0" anchor="ctr"/>
+          <a:lstStyle/>
+          <a:p>
+            <a:pPr indent="0" marL="0">
+              <a:buNone/>
+            </a:pPr>
+            <a:r>
+              <a:rPr lang="en-US" sz="1100" b="1" dirty="0">
+                <a:solidFill>
+                  <a:srgbClr val="718096"/>
+                </a:solidFill>
+                <a:latin typeface="Calibri" pitchFamily="34" charset="0"/>
+                <a:ea typeface="Calibri" pitchFamily="34" charset="-122"/>
+                <a:cs typeface="Calibri" pitchFamily="34" charset="-120"/>
+              </a:rPr>
+              <a:t>Competitors:</a:t>
+            </a:r>
+            <a:endParaRPr lang="en-US" sz="1100" dirty="0"/>
+          </a:p>
+        </p:txBody>
+      </p:sp>
+      <p:sp>
+        <p:nvSpPr>
+          <p:cNvPr id="11" name="Text 9"/>
+          <p:cNvSpPr/>
+          <p:nvPr/>
+        </p:nvSpPr>
+        <p:spPr>
+          <a:xfrm>
+            <a:off x="9875520" y="1371600"/>
+            <a:ext cx="1737360" cy="822960"/>
+          </a:xfrm>
+          <a:prstGeom prst="rect">
+            <a:avLst/>
+          </a:prstGeom>
+          <a:noFill/>
+          <a:ln/>
+        </p:spPr>
+        <p:txBody>
+          <a:bodyPr wrap="square" lIns="0" tIns="0" rIns="0" bIns="0" rtlCol="0" anchor="ctr"/>
+          <a:lstStyle/>
+          <a:p>
+            <a:pPr indent="0" marL="0">
+              <a:buNone/>
+            </a:pPr>
+            <a:r>
+              <a:rPr lang="en-US" sz="1100" dirty="0">
+                <a:solidFill>
+                  <a:srgbClr val="718096"/>
+                </a:solidFill>
+                <a:latin typeface="Calibri" pitchFamily="34" charset="0"/>
+                <a:ea typeface="Calibri" pitchFamily="34" charset="-122"/>
+                <a:cs typeface="Calibri" pitchFamily="34" charset="-120"/>
+              </a:rPr>
+              <a:t>Tied to own bids</a:t>
+            </a:r>
+            <a:endParaRPr lang="en-US" sz="1100" dirty="0"/>
+          </a:p>
+        </p:txBody>
+      </p:sp>
+      <p:sp>
+        <p:nvSpPr>
+          <p:cNvPr id="12" name="Shape 10"/>
+          <p:cNvSpPr/>
+          <p:nvPr/>
+        </p:nvSpPr>
+        <p:spPr>
+          <a:xfrm>
+            <a:off x="365760" y="2395728"/>
+            <a:ext cx="11430000" cy="1005840"/>
           </a:xfrm>
           <a:prstGeom prst="rect">
             <a:avLst/>
@@ -7566,89 +8990,50 @@
       </p:sp>
       <p:sp>
         <p:nvSpPr>
-          <p:cNvPr id="11" name="Shape 9"/>
-          <p:cNvSpPr/>
-          <p:nvPr/>
-        </p:nvSpPr>
-        <p:spPr>
-          <a:xfrm>
-            <a:off x="4434840" y="1097280"/>
-            <a:ext cx="3657600" cy="73152"/>
-          </a:xfrm>
-          <a:prstGeom prst="rect">
-            <a:avLst/>
-          </a:prstGeom>
-          <a:solidFill>
-            <a:srgbClr val="E8612C"/>
-          </a:solidFill>
-          <a:ln/>
-        </p:spPr>
-      </p:sp>
-      <p:sp>
-        <p:nvSpPr>
-          <p:cNvPr id="12" name="Text 10"/>
-          <p:cNvSpPr/>
-          <p:nvPr/>
-        </p:nvSpPr>
-        <p:spPr>
-          <a:xfrm>
-            <a:off x="4617720" y="1234440"/>
-            <a:ext cx="3291840" cy="274320"/>
-          </a:xfrm>
-          <a:prstGeom prst="rect">
-            <a:avLst/>
-          </a:prstGeom>
-          <a:noFill/>
-          <a:ln/>
-        </p:spPr>
-        <p:txBody>
-          <a:bodyPr wrap="square" lIns="0" tIns="0" rIns="0" bIns="0" rtlCol="0" anchor="ctr"/>
-          <a:lstStyle/>
-          <a:p>
-            <a:pPr indent="0" marL="0">
-              <a:buNone/>
-            </a:pPr>
-            <a:r>
-              <a:rPr lang="en-US" sz="1400" b="1" dirty="0">
-                <a:solidFill>
-                  <a:srgbClr val="E8612C"/>
-                </a:solidFill>
-                <a:latin typeface="Calibri" pitchFamily="34" charset="0"/>
-                <a:ea typeface="Calibri" pitchFamily="34" charset="-122"/>
-                <a:cs typeface="Calibri" pitchFamily="34" charset="-120"/>
-              </a:rPr>
-              <a:t>Q3 2026</a:t>
-            </a:r>
-            <a:endParaRPr lang="en-US" sz="1400" dirty="0"/>
-          </a:p>
-        </p:txBody>
-      </p:sp>
-      <p:sp>
-        <p:nvSpPr>
-          <p:cNvPr id="13" name="Text 11"/>
-          <p:cNvSpPr/>
-          <p:nvPr/>
-        </p:nvSpPr>
-        <p:spPr>
-          <a:xfrm>
-            <a:off x="4617720" y="1554480"/>
-            <a:ext cx="3291840" cy="457200"/>
-          </a:xfrm>
-          <a:prstGeom prst="rect">
-            <a:avLst/>
-          </a:prstGeom>
-          <a:noFill/>
-          <a:ln/>
-        </p:spPr>
-        <p:txBody>
-          <a:bodyPr wrap="square" lIns="0" tIns="0" rIns="0" bIns="0" rtlCol="0" anchor="ctr"/>
-          <a:lstStyle/>
-          <a:p>
-            <a:pPr indent="0" marL="0">
-              <a:buNone/>
-            </a:pPr>
-            <a:r>
-              <a:rPr lang="en-US" sz="1600" b="1" dirty="0">
+          <p:cNvPr id="13" name="Shape 11"/>
+          <p:cNvSpPr/>
+          <p:nvPr/>
+        </p:nvSpPr>
+        <p:spPr>
+          <a:xfrm>
+            <a:off x="365760" y="2395728"/>
+            <a:ext cx="73152" cy="1005840"/>
+          </a:xfrm>
+          <a:prstGeom prst="rect">
+            <a:avLst/>
+          </a:prstGeom>
+          <a:solidFill>
+            <a:srgbClr val="DDE4F0"/>
+          </a:solidFill>
+          <a:ln/>
+        </p:spPr>
+      </p:sp>
+      <p:sp>
+        <p:nvSpPr>
+          <p:cNvPr id="14" name="Text 12"/>
+          <p:cNvSpPr/>
+          <p:nvPr/>
+        </p:nvSpPr>
+        <p:spPr>
+          <a:xfrm>
+            <a:off x="594360" y="2468880"/>
+            <a:ext cx="3657600" cy="365760"/>
+          </a:xfrm>
+          <a:prstGeom prst="rect">
+            <a:avLst/>
+          </a:prstGeom>
+          <a:noFill/>
+          <a:ln/>
+        </p:spPr>
+        <p:txBody>
+          <a:bodyPr wrap="square" lIns="0" tIns="0" rIns="0" bIns="0" rtlCol="0" anchor="ctr"/>
+          <a:lstStyle/>
+          <a:p>
+            <a:pPr indent="0" marL="0">
+              <a:buNone/>
+            </a:pPr>
+            <a:r>
+              <a:rPr lang="en-US" sz="1200" b="1" dirty="0">
                 <a:solidFill>
                   <a:srgbClr val="1A2B4A"/>
                 </a:solidFill>
@@ -7656,31 +9041,11 @@
                 <a:ea typeface="Calibri" pitchFamily="34" charset="-122"/>
                 <a:cs typeface="Calibri" pitchFamily="34" charset="-120"/>
               </a:rPr>
-              <a:t>5 Pilot Accounts</a:t>
-            </a:r>
-            <a:endParaRPr lang="en-US" sz="1600" dirty="0"/>
-          </a:p>
-        </p:txBody>
-      </p:sp>
-      <p:sp>
-        <p:nvSpPr>
-          <p:cNvPr id="14" name="Shape 12"/>
-          <p:cNvSpPr/>
-          <p:nvPr/>
-        </p:nvSpPr>
-        <p:spPr>
-          <a:xfrm>
-            <a:off x="4617720" y="2103120"/>
-            <a:ext cx="3291840" cy="9144"/>
-          </a:xfrm>
-          <a:prstGeom prst="rect">
-            <a:avLst/>
-          </a:prstGeom>
-          <a:solidFill>
-            <a:srgbClr val="DDE4F0"/>
-          </a:solidFill>
-          <a:ln/>
-        </p:spPr>
+              <a:t>Shelf Signals as Levers?</a:t>
+            </a:r>
+            <a:endParaRPr lang="en-US" sz="1200" dirty="0"/>
+          </a:p>
+        </p:txBody>
       </p:sp>
       <p:sp>
         <p:nvSpPr>
@@ -7690,8 +9055,47 @@
         </p:nvSpPr>
         <p:spPr>
           <a:xfrm>
-            <a:off x="4617720" y="2240280"/>
-            <a:ext cx="3291840" cy="2103120"/>
+            <a:off x="4572000" y="2468880"/>
+            <a:ext cx="1097280" cy="365760"/>
+          </a:xfrm>
+          <a:prstGeom prst="rect">
+            <a:avLst/>
+          </a:prstGeom>
+          <a:noFill/>
+          <a:ln/>
+        </p:spPr>
+        <p:txBody>
+          <a:bodyPr wrap="square" lIns="0" tIns="0" rIns="0" bIns="0" rtlCol="0" anchor="ctr"/>
+          <a:lstStyle/>
+          <a:p>
+            <a:pPr indent="0" marL="0">
+              <a:buNone/>
+            </a:pPr>
+            <a:r>
+              <a:rPr lang="en-US" sz="1100" b="1" dirty="0">
+                <a:solidFill>
+                  <a:srgbClr val="1D8A5B"/>
+                </a:solidFill>
+                <a:latin typeface="Calibri" pitchFamily="34" charset="0"/>
+                <a:ea typeface="Calibri" pitchFamily="34" charset="-122"/>
+                <a:cs typeface="Calibri" pitchFamily="34" charset="-120"/>
+              </a:rPr>
+              <a:t>DataWeave:</a:t>
+            </a:r>
+            <a:endParaRPr lang="en-US" sz="1100" dirty="0"/>
+          </a:p>
+        </p:txBody>
+      </p:sp>
+      <p:sp>
+        <p:nvSpPr>
+          <p:cNvPr id="16" name="Text 14"/>
+          <p:cNvSpPr/>
+          <p:nvPr/>
+        </p:nvSpPr>
+        <p:spPr>
+          <a:xfrm>
+            <a:off x="5760720" y="2468880"/>
+            <a:ext cx="2743200" cy="822960"/>
           </a:xfrm>
           <a:prstGeom prst="rect">
             <a:avLst/>
@@ -7715,7 +9119,7 @@
                 <a:ea typeface="Calibri" pitchFamily="34" charset="-122"/>
                 <a:cs typeface="Calibri" pitchFamily="34" charset="-120"/>
               </a:rPr>
-              <a:t>Tableau dashboards, weekly QBRs</a:t>
+              <a:t>First-class inputs</a:t>
             </a:r>
             <a:endParaRPr lang="en-US" sz="1100" dirty="0"/>
           </a:p>
@@ -7723,14 +9127,92 @@
       </p:sp>
       <p:sp>
         <p:nvSpPr>
-          <p:cNvPr id="16" name="Shape 14"/>
-          <p:cNvSpPr/>
-          <p:nvPr/>
-        </p:nvSpPr>
-        <p:spPr>
-          <a:xfrm>
-            <a:off x="8503920" y="1097280"/>
-            <a:ext cx="3657600" cy="3657600"/>
+          <p:cNvPr id="17" name="Text 15"/>
+          <p:cNvSpPr/>
+          <p:nvPr/>
+        </p:nvSpPr>
+        <p:spPr>
+          <a:xfrm>
+            <a:off x="8686800" y="2468880"/>
+            <a:ext cx="1097280" cy="365760"/>
+          </a:xfrm>
+          <a:prstGeom prst="rect">
+            <a:avLst/>
+          </a:prstGeom>
+          <a:noFill/>
+          <a:ln/>
+        </p:spPr>
+        <p:txBody>
+          <a:bodyPr wrap="square" lIns="0" tIns="0" rIns="0" bIns="0" rtlCol="0" anchor="ctr"/>
+          <a:lstStyle/>
+          <a:p>
+            <a:pPr indent="0" marL="0">
+              <a:buNone/>
+            </a:pPr>
+            <a:r>
+              <a:rPr lang="en-US" sz="1100" b="1" dirty="0">
+                <a:solidFill>
+                  <a:srgbClr val="718096"/>
+                </a:solidFill>
+                <a:latin typeface="Calibri" pitchFamily="34" charset="0"/>
+                <a:ea typeface="Calibri" pitchFamily="34" charset="-122"/>
+                <a:cs typeface="Calibri" pitchFamily="34" charset="-120"/>
+              </a:rPr>
+              <a:t>Competitors:</a:t>
+            </a:r>
+            <a:endParaRPr lang="en-US" sz="1100" dirty="0"/>
+          </a:p>
+        </p:txBody>
+      </p:sp>
+      <p:sp>
+        <p:nvSpPr>
+          <p:cNvPr id="18" name="Text 16"/>
+          <p:cNvSpPr/>
+          <p:nvPr/>
+        </p:nvSpPr>
+        <p:spPr>
+          <a:xfrm>
+            <a:off x="9875520" y="2468880"/>
+            <a:ext cx="1737360" cy="822960"/>
+          </a:xfrm>
+          <a:prstGeom prst="rect">
+            <a:avLst/>
+          </a:prstGeom>
+          <a:noFill/>
+          <a:ln/>
+        </p:spPr>
+        <p:txBody>
+          <a:bodyPr wrap="square" lIns="0" tIns="0" rIns="0" bIns="0" rtlCol="0" anchor="ctr"/>
+          <a:lstStyle/>
+          <a:p>
+            <a:pPr indent="0" marL="0">
+              <a:buNone/>
+            </a:pPr>
+            <a:r>
+              <a:rPr lang="en-US" sz="1100" dirty="0">
+                <a:solidFill>
+                  <a:srgbClr val="718096"/>
+                </a:solidFill>
+                <a:latin typeface="Calibri" pitchFamily="34" charset="0"/>
+                <a:ea typeface="Calibri" pitchFamily="34" charset="-122"/>
+                <a:cs typeface="Calibri" pitchFamily="34" charset="-120"/>
+              </a:rPr>
+              <a:t>Secondary signals</a:t>
+            </a:r>
+            <a:endParaRPr lang="en-US" sz="1100" dirty="0"/>
+          </a:p>
+        </p:txBody>
+      </p:sp>
+      <p:sp>
+        <p:nvSpPr>
+          <p:cNvPr id="19" name="Shape 17"/>
+          <p:cNvSpPr/>
+          <p:nvPr/>
+        </p:nvSpPr>
+        <p:spPr>
+          <a:xfrm>
+            <a:off x="365760" y="3493008"/>
+            <a:ext cx="11430000" cy="1005840"/>
           </a:xfrm>
           <a:prstGeom prst="rect">
             <a:avLst/>
@@ -7750,50 +9232,89 @@
       </p:sp>
       <p:sp>
         <p:nvSpPr>
-          <p:cNvPr id="17" name="Shape 15"/>
-          <p:cNvSpPr/>
-          <p:nvPr/>
-        </p:nvSpPr>
-        <p:spPr>
-          <a:xfrm>
-            <a:off x="8503920" y="1097280"/>
-            <a:ext cx="3657600" cy="73152"/>
-          </a:xfrm>
-          <a:prstGeom prst="rect">
-            <a:avLst/>
-          </a:prstGeom>
-          <a:solidFill>
-            <a:srgbClr val="1D8A5B"/>
-          </a:solidFill>
-          <a:ln/>
-        </p:spPr>
-      </p:sp>
-      <p:sp>
-        <p:nvSpPr>
-          <p:cNvPr id="18" name="Text 16"/>
-          <p:cNvSpPr/>
-          <p:nvPr/>
-        </p:nvSpPr>
-        <p:spPr>
-          <a:xfrm>
-            <a:off x="8686800" y="1234440"/>
-            <a:ext cx="3291840" cy="274320"/>
-          </a:xfrm>
-          <a:prstGeom prst="rect">
-            <a:avLst/>
-          </a:prstGeom>
-          <a:noFill/>
-          <a:ln/>
-        </p:spPr>
-        <p:txBody>
-          <a:bodyPr wrap="square" lIns="0" tIns="0" rIns="0" bIns="0" rtlCol="0" anchor="ctr"/>
-          <a:lstStyle/>
-          <a:p>
-            <a:pPr indent="0" marL="0">
-              <a:buNone/>
-            </a:pPr>
-            <a:r>
-              <a:rPr lang="en-US" sz="1400" b="1" dirty="0">
+          <p:cNvPr id="20" name="Shape 18"/>
+          <p:cNvSpPr/>
+          <p:nvPr/>
+        </p:nvSpPr>
+        <p:spPr>
+          <a:xfrm>
+            <a:off x="365760" y="3493008"/>
+            <a:ext cx="73152" cy="1005840"/>
+          </a:xfrm>
+          <a:prstGeom prst="rect">
+            <a:avLst/>
+          </a:prstGeom>
+          <a:solidFill>
+            <a:srgbClr val="DDE4F0"/>
+          </a:solidFill>
+          <a:ln/>
+        </p:spPr>
+      </p:sp>
+      <p:sp>
+        <p:nvSpPr>
+          <p:cNvPr id="21" name="Text 19"/>
+          <p:cNvSpPr/>
+          <p:nvPr/>
+        </p:nvSpPr>
+        <p:spPr>
+          <a:xfrm>
+            <a:off x="594360" y="3566160"/>
+            <a:ext cx="3657600" cy="365760"/>
+          </a:xfrm>
+          <a:prstGeom prst="rect">
+            <a:avLst/>
+          </a:prstGeom>
+          <a:noFill/>
+          <a:ln/>
+        </p:spPr>
+        <p:txBody>
+          <a:bodyPr wrap="square" lIns="0" tIns="0" rIns="0" bIns="0" rtlCol="0" anchor="ctr"/>
+          <a:lstStyle/>
+          <a:p>
+            <a:pPr indent="0" marL="0">
+              <a:buNone/>
+            </a:pPr>
+            <a:r>
+              <a:rPr lang="en-US" sz="1200" b="1" dirty="0">
+                <a:solidFill>
+                  <a:srgbClr val="1A2B4A"/>
+                </a:solidFill>
+                <a:latin typeface="Calibri" pitchFamily="34" charset="0"/>
+                <a:ea typeface="Calibri" pitchFamily="34" charset="-122"/>
+                <a:cs typeface="Calibri" pitchFamily="34" charset="-120"/>
+              </a:rPr>
+              <a:t>Store-Cluster Decomposition?</a:t>
+            </a:r>
+            <a:endParaRPr lang="en-US" sz="1200" dirty="0"/>
+          </a:p>
+        </p:txBody>
+      </p:sp>
+      <p:sp>
+        <p:nvSpPr>
+          <p:cNvPr id="22" name="Text 20"/>
+          <p:cNvSpPr/>
+          <p:nvPr/>
+        </p:nvSpPr>
+        <p:spPr>
+          <a:xfrm>
+            <a:off x="4572000" y="3566160"/>
+            <a:ext cx="1097280" cy="365760"/>
+          </a:xfrm>
+          <a:prstGeom prst="rect">
+            <a:avLst/>
+          </a:prstGeom>
+          <a:noFill/>
+          <a:ln/>
+        </p:spPr>
+        <p:txBody>
+          <a:bodyPr wrap="square" lIns="0" tIns="0" rIns="0" bIns="0" rtlCol="0" anchor="ctr"/>
+          <a:lstStyle/>
+          <a:p>
+            <a:pPr indent="0" marL="0">
+              <a:buNone/>
+            </a:pPr>
+            <a:r>
+              <a:rPr lang="en-US" sz="1100" b="1" dirty="0">
                 <a:solidFill>
                   <a:srgbClr val="1D8A5B"/>
                 </a:solidFill>
@@ -7801,38 +9322,202 @@
                 <a:ea typeface="Calibri" pitchFamily="34" charset="-122"/>
                 <a:cs typeface="Calibri" pitchFamily="34" charset="-120"/>
               </a:rPr>
-              <a:t>Q4 2026</a:t>
-            </a:r>
-            <a:endParaRPr lang="en-US" sz="1400" dirty="0"/>
-          </a:p>
-        </p:txBody>
-      </p:sp>
-      <p:sp>
-        <p:nvSpPr>
-          <p:cNvPr id="19" name="Text 17"/>
-          <p:cNvSpPr/>
-          <p:nvPr/>
-        </p:nvSpPr>
-        <p:spPr>
-          <a:xfrm>
-            <a:off x="8686800" y="1554480"/>
-            <a:ext cx="3291840" cy="457200"/>
-          </a:xfrm>
-          <a:prstGeom prst="rect">
-            <a:avLst/>
-          </a:prstGeom>
-          <a:noFill/>
-          <a:ln/>
-        </p:spPr>
-        <p:txBody>
-          <a:bodyPr wrap="square" lIns="0" tIns="0" rIns="0" bIns="0" rtlCol="0" anchor="ctr"/>
-          <a:lstStyle/>
-          <a:p>
-            <a:pPr indent="0" marL="0">
-              <a:buNone/>
-            </a:pPr>
-            <a:r>
-              <a:rPr lang="en-US" sz="1600" b="1" dirty="0">
+              <a:t>DataWeave:</a:t>
+            </a:r>
+            <a:endParaRPr lang="en-US" sz="1100" dirty="0"/>
+          </a:p>
+        </p:txBody>
+      </p:sp>
+      <p:sp>
+        <p:nvSpPr>
+          <p:cNvPr id="23" name="Text 21"/>
+          <p:cNvSpPr/>
+          <p:nvPr/>
+        </p:nvSpPr>
+        <p:spPr>
+          <a:xfrm>
+            <a:off x="5760720" y="3566160"/>
+            <a:ext cx="2743200" cy="822960"/>
+          </a:xfrm>
+          <a:prstGeom prst="rect">
+            <a:avLst/>
+          </a:prstGeom>
+          <a:noFill/>
+          <a:ln/>
+        </p:spPr>
+        <p:txBody>
+          <a:bodyPr wrap="square" lIns="0" tIns="0" rIns="0" bIns="0" rtlCol="0" anchor="ctr"/>
+          <a:lstStyle/>
+          <a:p>
+            <a:pPr indent="0" marL="0">
+              <a:buNone/>
+            </a:pPr>
+            <a:r>
+              <a:rPr lang="en-US" sz="1100" dirty="0">
+                <a:solidFill>
+                  <a:srgbClr val="4A5568"/>
+                </a:solidFill>
+                <a:latin typeface="Calibri" pitchFamily="34" charset="0"/>
+                <a:ea typeface="Calibri" pitchFamily="34" charset="-122"/>
+                <a:cs typeface="Calibri" pitchFamily="34" charset="-120"/>
+              </a:rPr>
+              <a:t>Yes — 17 clusters tested</a:t>
+            </a:r>
+            <a:endParaRPr lang="en-US" sz="1100" dirty="0"/>
+          </a:p>
+        </p:txBody>
+      </p:sp>
+      <p:sp>
+        <p:nvSpPr>
+          <p:cNvPr id="24" name="Text 22"/>
+          <p:cNvSpPr/>
+          <p:nvPr/>
+        </p:nvSpPr>
+        <p:spPr>
+          <a:xfrm>
+            <a:off x="8686800" y="3566160"/>
+            <a:ext cx="1097280" cy="365760"/>
+          </a:xfrm>
+          <a:prstGeom prst="rect">
+            <a:avLst/>
+          </a:prstGeom>
+          <a:noFill/>
+          <a:ln/>
+        </p:spPr>
+        <p:txBody>
+          <a:bodyPr wrap="square" lIns="0" tIns="0" rIns="0" bIns="0" rtlCol="0" anchor="ctr"/>
+          <a:lstStyle/>
+          <a:p>
+            <a:pPr indent="0" marL="0">
+              <a:buNone/>
+            </a:pPr>
+            <a:r>
+              <a:rPr lang="en-US" sz="1100" b="1" dirty="0">
+                <a:solidFill>
+                  <a:srgbClr val="718096"/>
+                </a:solidFill>
+                <a:latin typeface="Calibri" pitchFamily="34" charset="0"/>
+                <a:ea typeface="Calibri" pitchFamily="34" charset="-122"/>
+                <a:cs typeface="Calibri" pitchFamily="34" charset="-120"/>
+              </a:rPr>
+              <a:t>Competitors:</a:t>
+            </a:r>
+            <a:endParaRPr lang="en-US" sz="1100" dirty="0"/>
+          </a:p>
+        </p:txBody>
+      </p:sp>
+      <p:sp>
+        <p:nvSpPr>
+          <p:cNvPr id="25" name="Text 23"/>
+          <p:cNvSpPr/>
+          <p:nvPr/>
+        </p:nvSpPr>
+        <p:spPr>
+          <a:xfrm>
+            <a:off x="9875520" y="3566160"/>
+            <a:ext cx="1737360" cy="822960"/>
+          </a:xfrm>
+          <a:prstGeom prst="rect">
+            <a:avLst/>
+          </a:prstGeom>
+          <a:noFill/>
+          <a:ln/>
+        </p:spPr>
+        <p:txBody>
+          <a:bodyPr wrap="square" lIns="0" tIns="0" rIns="0" bIns="0" rtlCol="0" anchor="ctr"/>
+          <a:lstStyle/>
+          <a:p>
+            <a:pPr indent="0" marL="0">
+              <a:buNone/>
+            </a:pPr>
+            <a:r>
+              <a:rPr lang="en-US" sz="1100" dirty="0">
+                <a:solidFill>
+                  <a:srgbClr val="718096"/>
+                </a:solidFill>
+                <a:latin typeface="Calibri" pitchFamily="34" charset="0"/>
+                <a:ea typeface="Calibri" pitchFamily="34" charset="-122"/>
+                <a:cs typeface="Calibri" pitchFamily="34" charset="-120"/>
+              </a:rPr>
+              <a:t>No — channel-level only</a:t>
+            </a:r>
+            <a:endParaRPr lang="en-US" sz="1100" dirty="0"/>
+          </a:p>
+        </p:txBody>
+      </p:sp>
+      <p:sp>
+        <p:nvSpPr>
+          <p:cNvPr id="26" name="Shape 24"/>
+          <p:cNvSpPr/>
+          <p:nvPr/>
+        </p:nvSpPr>
+        <p:spPr>
+          <a:xfrm>
+            <a:off x="365760" y="4590288"/>
+            <a:ext cx="11430000" cy="1005840"/>
+          </a:xfrm>
+          <a:prstGeom prst="rect">
+            <a:avLst/>
+          </a:prstGeom>
+          <a:solidFill>
+            <a:srgbClr val="FFFFFF"/>
+          </a:solidFill>
+          <a:ln/>
+          <a:effectLst>
+            <a:outerShdw sx="100000" sy="100000" kx="0" ky="0" algn="bl" rotWithShape="0" blurRad="50800" dist="25400" dir="8100000">
+              <a:srgbClr val="000000">
+                <a:alpha val="8000"/>
+              </a:srgbClr>
+            </a:outerShdw>
+          </a:effectLst>
+        </p:spPr>
+      </p:sp>
+      <p:sp>
+        <p:nvSpPr>
+          <p:cNvPr id="27" name="Shape 25"/>
+          <p:cNvSpPr/>
+          <p:nvPr/>
+        </p:nvSpPr>
+        <p:spPr>
+          <a:xfrm>
+            <a:off x="365760" y="4590288"/>
+            <a:ext cx="73152" cy="1005840"/>
+          </a:xfrm>
+          <a:prstGeom prst="rect">
+            <a:avLst/>
+          </a:prstGeom>
+          <a:solidFill>
+            <a:srgbClr val="DDE4F0"/>
+          </a:solidFill>
+          <a:ln/>
+        </p:spPr>
+      </p:sp>
+      <p:sp>
+        <p:nvSpPr>
+          <p:cNvPr id="28" name="Text 26"/>
+          <p:cNvSpPr/>
+          <p:nvPr/>
+        </p:nvSpPr>
+        <p:spPr>
+          <a:xfrm>
+            <a:off x="594360" y="4663440"/>
+            <a:ext cx="3657600" cy="365760"/>
+          </a:xfrm>
+          <a:prstGeom prst="rect">
+            <a:avLst/>
+          </a:prstGeom>
+          <a:noFill/>
+          <a:ln/>
+        </p:spPr>
+        <p:txBody>
+          <a:bodyPr wrap="square" lIns="0" tIns="0" rIns="0" bIns="0" rtlCol="0" anchor="ctr"/>
+          <a:lstStyle/>
+          <a:p>
+            <a:pPr indent="0" marL="0">
+              <a:buNone/>
+            </a:pPr>
+            <a:r>
+              <a:rPr lang="en-US" sz="1200" b="1" dirty="0">
                 <a:solidFill>
                   <a:srgbClr val="1A2B4A"/>
                 </a:solidFill>
@@ -7840,42 +9525,61 @@
                 <a:ea typeface="Calibri" pitchFamily="34" charset="-122"/>
                 <a:cs typeface="Calibri" pitchFamily="34" charset="-120"/>
               </a:rPr>
-              <a:t>Automated Model Run</a:t>
-            </a:r>
-            <a:endParaRPr lang="en-US" sz="1600" dirty="0"/>
-          </a:p>
-        </p:txBody>
-      </p:sp>
-      <p:sp>
-        <p:nvSpPr>
-          <p:cNvPr id="20" name="Shape 18"/>
-          <p:cNvSpPr/>
-          <p:nvPr/>
-        </p:nvSpPr>
-        <p:spPr>
-          <a:xfrm>
-            <a:off x="8686800" y="2103120"/>
-            <a:ext cx="3291840" cy="9144"/>
-          </a:xfrm>
-          <a:prstGeom prst="rect">
-            <a:avLst/>
-          </a:prstGeom>
-          <a:solidFill>
-            <a:srgbClr val="DDE4F0"/>
-          </a:solidFill>
-          <a:ln/>
-        </p:spPr>
-      </p:sp>
-      <p:sp>
-        <p:nvSpPr>
-          <p:cNvPr id="21" name="Text 19"/>
-          <p:cNvSpPr/>
-          <p:nvPr/>
-        </p:nvSpPr>
-        <p:spPr>
-          <a:xfrm>
-            <a:off x="8686800" y="2240280"/>
-            <a:ext cx="3291840" cy="2103120"/>
+              <a:t>CFO-Ready Output?</a:t>
+            </a:r>
+            <a:endParaRPr lang="en-US" sz="1200" dirty="0"/>
+          </a:p>
+        </p:txBody>
+      </p:sp>
+      <p:sp>
+        <p:nvSpPr>
+          <p:cNvPr id="29" name="Text 27"/>
+          <p:cNvSpPr/>
+          <p:nvPr/>
+        </p:nvSpPr>
+        <p:spPr>
+          <a:xfrm>
+            <a:off x="4572000" y="4663440"/>
+            <a:ext cx="1097280" cy="365760"/>
+          </a:xfrm>
+          <a:prstGeom prst="rect">
+            <a:avLst/>
+          </a:prstGeom>
+          <a:noFill/>
+          <a:ln/>
+        </p:spPr>
+        <p:txBody>
+          <a:bodyPr wrap="square" lIns="0" tIns="0" rIns="0" bIns="0" rtlCol="0" anchor="ctr"/>
+          <a:lstStyle/>
+          <a:p>
+            <a:pPr indent="0" marL="0">
+              <a:buNone/>
+            </a:pPr>
+            <a:r>
+              <a:rPr lang="en-US" sz="1100" b="1" dirty="0">
+                <a:solidFill>
+                  <a:srgbClr val="1D8A5B"/>
+                </a:solidFill>
+                <a:latin typeface="Calibri" pitchFamily="34" charset="0"/>
+                <a:ea typeface="Calibri" pitchFamily="34" charset="-122"/>
+                <a:cs typeface="Calibri" pitchFamily="34" charset="-120"/>
+              </a:rPr>
+              <a:t>DataWeave:</a:t>
+            </a:r>
+            <a:endParaRPr lang="en-US" sz="1100" dirty="0"/>
+          </a:p>
+        </p:txBody>
+      </p:sp>
+      <p:sp>
+        <p:nvSpPr>
+          <p:cNvPr id="30" name="Text 28"/>
+          <p:cNvSpPr/>
+          <p:nvPr/>
+        </p:nvSpPr>
+        <p:spPr>
+          <a:xfrm>
+            <a:off x="5760720" y="4663440"/>
+            <a:ext cx="2743200" cy="822960"/>
           </a:xfrm>
           <a:prstGeom prst="rect">
             <a:avLst/>
@@ -7899,7 +9603,7 @@
                 <a:ea typeface="Calibri" pitchFamily="34" charset="-122"/>
                 <a:cs typeface="Calibri" pitchFamily="34" charset="-120"/>
               </a:rPr>
-              <a:t>Transition to product, scale to 20+ accounts</a:t>
+              <a:t>Attribution + reallocation recommendations</a:t>
             </a:r>
             <a:endParaRPr lang="en-US" sz="1100" dirty="0"/>
           </a:p>
@@ -7907,80 +9611,79 @@
       </p:sp>
       <p:sp>
         <p:nvSpPr>
-          <p:cNvPr id="22" name="Shape 20"/>
-          <p:cNvSpPr/>
-          <p:nvPr/>
-        </p:nvSpPr>
-        <p:spPr>
-          <a:xfrm>
-            <a:off x="365760" y="5029200"/>
-            <a:ext cx="11430000" cy="1097280"/>
-          </a:xfrm>
-          <a:prstGeom prst="rect">
-            <a:avLst/>
-          </a:prstGeom>
-          <a:solidFill>
-            <a:srgbClr val="EBF1FB"/>
-          </a:solidFill>
-          <a:ln/>
-        </p:spPr>
-      </p:sp>
-      <p:sp>
-        <p:nvSpPr>
-          <p:cNvPr id="23" name="Shape 21"/>
-          <p:cNvSpPr/>
-          <p:nvPr/>
-        </p:nvSpPr>
-        <p:spPr>
-          <a:xfrm>
-            <a:off x="365760" y="5029200"/>
-            <a:ext cx="73152" cy="1097280"/>
-          </a:xfrm>
-          <a:prstGeom prst="rect">
-            <a:avLst/>
-          </a:prstGeom>
-          <a:solidFill>
-            <a:srgbClr val="2E5D9E"/>
-          </a:solidFill>
-          <a:ln/>
-        </p:spPr>
-      </p:sp>
-      <p:sp>
-        <p:nvSpPr>
-          <p:cNvPr id="24" name="Text 22"/>
-          <p:cNvSpPr/>
-          <p:nvPr/>
-        </p:nvSpPr>
-        <p:spPr>
-          <a:xfrm>
-            <a:off x="594360" y="5138928"/>
-            <a:ext cx="10972800" cy="914400"/>
-          </a:xfrm>
-          <a:prstGeom prst="rect">
-            <a:avLst/>
-          </a:prstGeom>
-          <a:noFill/>
-          <a:ln/>
-        </p:spPr>
-        <p:txBody>
-          <a:bodyPr wrap="square" lIns="0" tIns="0" rIns="0" bIns="0" rtlCol="0" anchor="ctr"/>
-          <a:lstStyle/>
-          <a:p>
-            <a:pPr indent="0" marL="0">
-              <a:buNone/>
-            </a:pPr>
-            <a:r>
-              <a:rPr lang="en-US" sz="1300" dirty="0">
-                <a:solidFill>
-                  <a:srgbClr val="1A2B4A"/>
-                </a:solidFill>
-                <a:latin typeface="Calibri" pitchFamily="34" charset="0"/>
-                <a:ea typeface="Calibri" pitchFamily="34" charset="-122"/>
-                <a:cs typeface="Calibri" pitchFamily="34" charset="-120"/>
-              </a:rPr>
-              <a:t>ICP: RGM personas at CPG brands ($500M+ revenue, active on Walmart). Lead with Lactalis success case; deliver PoC via Tableau before productization.</a:t>
-            </a:r>
-            <a:endParaRPr lang="en-US" sz="1300" dirty="0"/>
+          <p:cNvPr id="31" name="Text 29"/>
+          <p:cNvSpPr/>
+          <p:nvPr/>
+        </p:nvSpPr>
+        <p:spPr>
+          <a:xfrm>
+            <a:off x="8686800" y="4663440"/>
+            <a:ext cx="1097280" cy="365760"/>
+          </a:xfrm>
+          <a:prstGeom prst="rect">
+            <a:avLst/>
+          </a:prstGeom>
+          <a:noFill/>
+          <a:ln/>
+        </p:spPr>
+        <p:txBody>
+          <a:bodyPr wrap="square" lIns="0" tIns="0" rIns="0" bIns="0" rtlCol="0" anchor="ctr"/>
+          <a:lstStyle/>
+          <a:p>
+            <a:pPr indent="0" marL="0">
+              <a:buNone/>
+            </a:pPr>
+            <a:r>
+              <a:rPr lang="en-US" sz="1100" b="1" dirty="0">
+                <a:solidFill>
+                  <a:srgbClr val="718096"/>
+                </a:solidFill>
+                <a:latin typeface="Calibri" pitchFamily="34" charset="0"/>
+                <a:ea typeface="Calibri" pitchFamily="34" charset="-122"/>
+                <a:cs typeface="Calibri" pitchFamily="34" charset="-120"/>
+              </a:rPr>
+              <a:t>Competitors:</a:t>
+            </a:r>
+            <a:endParaRPr lang="en-US" sz="1100" dirty="0"/>
+          </a:p>
+        </p:txBody>
+      </p:sp>
+      <p:sp>
+        <p:nvSpPr>
+          <p:cNvPr id="32" name="Text 30"/>
+          <p:cNvSpPr/>
+          <p:nvPr/>
+        </p:nvSpPr>
+        <p:spPr>
+          <a:xfrm>
+            <a:off x="9875520" y="4663440"/>
+            <a:ext cx="1737360" cy="822960"/>
+          </a:xfrm>
+          <a:prstGeom prst="rect">
+            <a:avLst/>
+          </a:prstGeom>
+          <a:noFill/>
+          <a:ln/>
+        </p:spPr>
+        <p:txBody>
+          <a:bodyPr wrap="square" lIns="0" tIns="0" rIns="0" bIns="0" rtlCol="0" anchor="ctr"/>
+          <a:lstStyle/>
+          <a:p>
+            <a:pPr indent="0" marL="0">
+              <a:buNone/>
+            </a:pPr>
+            <a:r>
+              <a:rPr lang="en-US" sz="1100" dirty="0">
+                <a:solidFill>
+                  <a:srgbClr val="718096"/>
+                </a:solidFill>
+                <a:latin typeface="Calibri" pitchFamily="34" charset="0"/>
+                <a:ea typeface="Calibri" pitchFamily="34" charset="-122"/>
+                <a:cs typeface="Calibri" pitchFamily="34" charset="-120"/>
+              </a:rPr>
+              <a:t>Optimization suggestions</a:t>
+            </a:r>
+            <a:endParaRPr lang="en-US" sz="1100" dirty="0"/>
           </a:p>
         </p:txBody>
       </p:sp>
@@ -8069,7 +9772,7 @@
                 <a:ea typeface="Calibri" pitchFamily="34" charset="-122"/>
                 <a:cs typeface="Calibri" pitchFamily="34" charset="-120"/>
               </a:rPr>
-              <a:t>Four-Phase Productization (P0→P3)</a:t>
+              <a:t>6-Month GTM: Services-Led, Tableau Delivery</a:t>
             </a:r>
             <a:endParaRPr lang="en-US" sz="2400" dirty="0"/>
           </a:p>
@@ -8083,28 +9786,8 @@
         </p:nvSpPr>
         <p:spPr>
           <a:xfrm>
-            <a:off x="365760" y="1115568"/>
-            <a:ext cx="11430000" cy="18288"/>
-          </a:xfrm>
-          <a:prstGeom prst="rect">
-            <a:avLst/>
-          </a:prstGeom>
-          <a:solidFill>
-            <a:srgbClr val="DDE4F0"/>
-          </a:solidFill>
-          <a:ln/>
-        </p:spPr>
-      </p:sp>
-      <p:sp>
-        <p:nvSpPr>
-          <p:cNvPr id="5" name="Shape 3"/>
-          <p:cNvSpPr/>
-          <p:nvPr/>
-        </p:nvSpPr>
-        <p:spPr>
-          <a:xfrm>
-            <a:off x="365760" y="1298448"/>
-            <a:ext cx="11430000" cy="1078992"/>
+            <a:off x="365760" y="1097280"/>
+            <a:ext cx="3657600" cy="3657600"/>
           </a:xfrm>
           <a:prstGeom prst="rect">
             <a:avLst/>
@@ -8124,14 +9807,14 @@
       </p:sp>
       <p:sp>
         <p:nvSpPr>
-          <p:cNvPr id="6" name="Shape 4"/>
-          <p:cNvSpPr/>
-          <p:nvPr/>
-        </p:nvSpPr>
-        <p:spPr>
-          <a:xfrm>
-            <a:off x="365760" y="1298448"/>
-            <a:ext cx="73152" cy="1078992"/>
+          <p:cNvPr id="5" name="Shape 3"/>
+          <p:cNvSpPr/>
+          <p:nvPr/>
+        </p:nvSpPr>
+        <p:spPr>
+          <a:xfrm>
+            <a:off x="365760" y="1097280"/>
+            <a:ext cx="3657600" cy="73152"/>
           </a:xfrm>
           <a:prstGeom prst="rect">
             <a:avLst/>
@@ -8144,81 +9827,101 @@
       </p:sp>
       <p:sp>
         <p:nvSpPr>
+          <p:cNvPr id="6" name="Text 4"/>
+          <p:cNvSpPr/>
+          <p:nvPr/>
+        </p:nvSpPr>
+        <p:spPr>
+          <a:xfrm>
+            <a:off x="548640" y="1234440"/>
+            <a:ext cx="3291840" cy="274320"/>
+          </a:xfrm>
+          <a:prstGeom prst="rect">
+            <a:avLst/>
+          </a:prstGeom>
+          <a:noFill/>
+          <a:ln/>
+        </p:spPr>
+        <p:txBody>
+          <a:bodyPr wrap="square" lIns="0" tIns="0" rIns="0" bIns="0" rtlCol="0" anchor="ctr"/>
+          <a:lstStyle/>
+          <a:p>
+            <a:pPr indent="0" marL="0">
+              <a:buNone/>
+            </a:pPr>
+            <a:r>
+              <a:rPr lang="en-US" sz="1400" b="1" dirty="0">
+                <a:solidFill>
+                  <a:srgbClr val="2E5D9E"/>
+                </a:solidFill>
+                <a:latin typeface="Calibri" pitchFamily="34" charset="0"/>
+                <a:ea typeface="Calibri" pitchFamily="34" charset="-122"/>
+                <a:cs typeface="Calibri" pitchFamily="34" charset="-120"/>
+              </a:rPr>
+              <a:t>Q2 2026</a:t>
+            </a:r>
+            <a:endParaRPr lang="en-US" sz="1400" dirty="0"/>
+          </a:p>
+        </p:txBody>
+      </p:sp>
+      <p:sp>
+        <p:nvSpPr>
           <p:cNvPr id="7" name="Text 5"/>
           <p:cNvSpPr/>
           <p:nvPr/>
         </p:nvSpPr>
         <p:spPr>
           <a:xfrm>
-            <a:off x="594360" y="1344168"/>
-            <a:ext cx="2286000" cy="320040"/>
-          </a:xfrm>
-          <a:prstGeom prst="rect">
-            <a:avLst/>
-          </a:prstGeom>
-          <a:noFill/>
-          <a:ln/>
-        </p:spPr>
-        <p:txBody>
-          <a:bodyPr wrap="square" lIns="0" tIns="0" rIns="0" bIns="0" rtlCol="0" anchor="ctr"/>
-          <a:lstStyle/>
-          <a:p>
-            <a:pPr indent="0" marL="0">
-              <a:buNone/>
-            </a:pPr>
-            <a:r>
-              <a:rPr lang="en-US" sz="1200" b="1" dirty="0">
-                <a:solidFill>
-                  <a:srgbClr val="2E5D9E"/>
-                </a:solidFill>
-                <a:latin typeface="Calibri" pitchFamily="34" charset="0"/>
-                <a:ea typeface="Calibri" pitchFamily="34" charset="-122"/>
-                <a:cs typeface="Calibri" pitchFamily="34" charset="-120"/>
-              </a:rPr>
-              <a:t>P0: Services-Led</a:t>
-            </a:r>
-            <a:endParaRPr lang="en-US" sz="1200" dirty="0"/>
-          </a:p>
-        </p:txBody>
-      </p:sp>
-      <p:sp>
-        <p:nvSpPr>
-          <p:cNvPr id="8" name="Text 6"/>
-          <p:cNvSpPr/>
-          <p:nvPr/>
-        </p:nvSpPr>
-        <p:spPr>
-          <a:xfrm>
-            <a:off x="3017520" y="1344168"/>
-            <a:ext cx="1371600" cy="320040"/>
-          </a:xfrm>
-          <a:prstGeom prst="rect">
-            <a:avLst/>
-          </a:prstGeom>
-          <a:noFill/>
-          <a:ln/>
-        </p:spPr>
-        <p:txBody>
-          <a:bodyPr wrap="square" lIns="0" tIns="0" rIns="0" bIns="0" rtlCol="0" anchor="ctr"/>
-          <a:lstStyle/>
-          <a:p>
-            <a:pPr indent="0" marL="0">
-              <a:buNone/>
-            </a:pPr>
-            <a:r>
-              <a:rPr lang="en-US" sz="1000" i="1" dirty="0">
-                <a:solidFill>
-                  <a:srgbClr val="718096"/>
-                </a:solidFill>
-                <a:latin typeface="Calibri" pitchFamily="34" charset="0"/>
-                <a:ea typeface="Calibri" pitchFamily="34" charset="-122"/>
-                <a:cs typeface="Calibri" pitchFamily="34" charset="-120"/>
-              </a:rPr>
-              <a:t>Now–Q3</a:t>
-            </a:r>
-            <a:endParaRPr lang="en-US" sz="1000" dirty="0"/>
-          </a:p>
-        </p:txBody>
+            <a:off x="548640" y="1554480"/>
+            <a:ext cx="3291840" cy="457200"/>
+          </a:xfrm>
+          <a:prstGeom prst="rect">
+            <a:avLst/>
+          </a:prstGeom>
+          <a:noFill/>
+          <a:ln/>
+        </p:spPr>
+        <p:txBody>
+          <a:bodyPr wrap="square" lIns="0" tIns="0" rIns="0" bIns="0" rtlCol="0" anchor="ctr"/>
+          <a:lstStyle/>
+          <a:p>
+            <a:pPr indent="0" marL="0">
+              <a:buNone/>
+            </a:pPr>
+            <a:r>
+              <a:rPr lang="en-US" sz="1600" b="1" dirty="0">
+                <a:solidFill>
+                  <a:srgbClr val="1A2B4A"/>
+                </a:solidFill>
+                <a:latin typeface="Calibri" pitchFamily="34" charset="0"/>
+                <a:ea typeface="Calibri" pitchFamily="34" charset="-122"/>
+                <a:cs typeface="Calibri" pitchFamily="34" charset="-120"/>
+              </a:rPr>
+              <a:t>Beta Launch</a:t>
+            </a:r>
+            <a:endParaRPr lang="en-US" sz="1600" dirty="0"/>
+          </a:p>
+        </p:txBody>
+      </p:sp>
+      <p:sp>
+        <p:nvSpPr>
+          <p:cNvPr id="8" name="Shape 6"/>
+          <p:cNvSpPr/>
+          <p:nvPr/>
+        </p:nvSpPr>
+        <p:spPr>
+          <a:xfrm>
+            <a:off x="548640" y="2103120"/>
+            <a:ext cx="3291840" cy="9144"/>
+          </a:xfrm>
+          <a:prstGeom prst="rect">
+            <a:avLst/>
+          </a:prstGeom>
+          <a:solidFill>
+            <a:srgbClr val="DDE4F0"/>
+          </a:solidFill>
+          <a:ln/>
+        </p:spPr>
       </p:sp>
       <p:sp>
         <p:nvSpPr>
@@ -8228,8 +9931,8 @@
         </p:nvSpPr>
         <p:spPr>
           <a:xfrm>
-            <a:off x="4572000" y="1344168"/>
-            <a:ext cx="3200400" cy="822960"/>
+            <a:off x="548640" y="2240280"/>
+            <a:ext cx="3291840" cy="2103120"/>
           </a:xfrm>
           <a:prstGeom prst="rect">
             <a:avLst/>
@@ -8253,7 +9956,7 @@
                 <a:ea typeface="Calibri" pitchFamily="34" charset="-122"/>
                 <a:cs typeface="Calibri" pitchFamily="34" charset="-120"/>
               </a:rPr>
-              <a:t>Lactalis PoC + fast-follower betas</a:t>
+              <a:t>Lactalis + 1-2 fast followers</a:t>
             </a:r>
             <a:endParaRPr lang="en-US" sz="1100" dirty="0"/>
           </a:p>
@@ -8261,53 +9964,14 @@
       </p:sp>
       <p:sp>
         <p:nvSpPr>
-          <p:cNvPr id="10" name="Text 8"/>
-          <p:cNvSpPr/>
-          <p:nvPr/>
-        </p:nvSpPr>
-        <p:spPr>
-          <a:xfrm>
-            <a:off x="7955280" y="1344168"/>
-            <a:ext cx="3474720" cy="822960"/>
-          </a:xfrm>
-          <a:prstGeom prst="rect">
-            <a:avLst/>
-          </a:prstGeom>
-          <a:noFill/>
-          <a:ln/>
-        </p:spPr>
-        <p:txBody>
-          <a:bodyPr wrap="square" lIns="0" tIns="0" rIns="0" bIns="0" rtlCol="0" anchor="ctr"/>
-          <a:lstStyle/>
-          <a:p>
-            <a:pPr indent="0" marL="0">
-              <a:buNone/>
-            </a:pPr>
-            <a:r>
-              <a:rPr lang="en-US" sz="1100" b="1" dirty="0">
-                <a:solidFill>
-                  <a:srgbClr val="1A2B4A"/>
-                </a:solidFill>
-                <a:latin typeface="Calibri" pitchFamily="34" charset="0"/>
-                <a:ea typeface="Calibri" pitchFamily="34" charset="-122"/>
-                <a:cs typeface="Calibri" pitchFamily="34" charset="-120"/>
-              </a:rPr>
-              <a:t>$50–75K per PoC</a:t>
-            </a:r>
-            <a:endParaRPr lang="en-US" sz="1100" dirty="0"/>
-          </a:p>
-        </p:txBody>
-      </p:sp>
-      <p:sp>
-        <p:nvSpPr>
-          <p:cNvPr id="11" name="Shape 9"/>
-          <p:cNvSpPr/>
-          <p:nvPr/>
-        </p:nvSpPr>
-        <p:spPr>
-          <a:xfrm>
-            <a:off x="365760" y="2468880"/>
-            <a:ext cx="11430000" cy="1078992"/>
+          <p:cNvPr id="10" name="Shape 8"/>
+          <p:cNvSpPr/>
+          <p:nvPr/>
+        </p:nvSpPr>
+        <p:spPr>
+          <a:xfrm>
+            <a:off x="4434840" y="1097280"/>
+            <a:ext cx="3657600" cy="3657600"/>
           </a:xfrm>
           <a:prstGeom prst="rect">
             <a:avLst/>
@@ -8327,14 +9991,14 @@
       </p:sp>
       <p:sp>
         <p:nvSpPr>
-          <p:cNvPr id="12" name="Shape 10"/>
-          <p:cNvSpPr/>
-          <p:nvPr/>
-        </p:nvSpPr>
-        <p:spPr>
-          <a:xfrm>
-            <a:off x="365760" y="2468880"/>
-            <a:ext cx="73152" cy="1078992"/>
+          <p:cNvPr id="11" name="Shape 9"/>
+          <p:cNvSpPr/>
+          <p:nvPr/>
+        </p:nvSpPr>
+        <p:spPr>
+          <a:xfrm>
+            <a:off x="4434840" y="1097280"/>
+            <a:ext cx="3657600" cy="73152"/>
           </a:xfrm>
           <a:prstGeom prst="rect">
             <a:avLst/>
@@ -8347,81 +10011,101 @@
       </p:sp>
       <p:sp>
         <p:nvSpPr>
+          <p:cNvPr id="12" name="Text 10"/>
+          <p:cNvSpPr/>
+          <p:nvPr/>
+        </p:nvSpPr>
+        <p:spPr>
+          <a:xfrm>
+            <a:off x="4617720" y="1234440"/>
+            <a:ext cx="3291840" cy="274320"/>
+          </a:xfrm>
+          <a:prstGeom prst="rect">
+            <a:avLst/>
+          </a:prstGeom>
+          <a:noFill/>
+          <a:ln/>
+        </p:spPr>
+        <p:txBody>
+          <a:bodyPr wrap="square" lIns="0" tIns="0" rIns="0" bIns="0" rtlCol="0" anchor="ctr"/>
+          <a:lstStyle/>
+          <a:p>
+            <a:pPr indent="0" marL="0">
+              <a:buNone/>
+            </a:pPr>
+            <a:r>
+              <a:rPr lang="en-US" sz="1400" b="1" dirty="0">
+                <a:solidFill>
+                  <a:srgbClr val="E8612C"/>
+                </a:solidFill>
+                <a:latin typeface="Calibri" pitchFamily="34" charset="0"/>
+                <a:ea typeface="Calibri" pitchFamily="34" charset="-122"/>
+                <a:cs typeface="Calibri" pitchFamily="34" charset="-120"/>
+              </a:rPr>
+              <a:t>Q3 2026</a:t>
+            </a:r>
+            <a:endParaRPr lang="en-US" sz="1400" dirty="0"/>
+          </a:p>
+        </p:txBody>
+      </p:sp>
+      <p:sp>
+        <p:nvSpPr>
           <p:cNvPr id="13" name="Text 11"/>
           <p:cNvSpPr/>
           <p:nvPr/>
         </p:nvSpPr>
         <p:spPr>
           <a:xfrm>
-            <a:off x="594360" y="2514600"/>
-            <a:ext cx="2286000" cy="320040"/>
-          </a:xfrm>
-          <a:prstGeom prst="rect">
-            <a:avLst/>
-          </a:prstGeom>
-          <a:noFill/>
-          <a:ln/>
-        </p:spPr>
-        <p:txBody>
-          <a:bodyPr wrap="square" lIns="0" tIns="0" rIns="0" bIns="0" rtlCol="0" anchor="ctr"/>
-          <a:lstStyle/>
-          <a:p>
-            <a:pPr indent="0" marL="0">
-              <a:buNone/>
-            </a:pPr>
-            <a:r>
-              <a:rPr lang="en-US" sz="1200" b="1" dirty="0">
-                <a:solidFill>
-                  <a:srgbClr val="E8612C"/>
-                </a:solidFill>
-                <a:latin typeface="Calibri" pitchFamily="34" charset="0"/>
-                <a:ea typeface="Calibri" pitchFamily="34" charset="-122"/>
-                <a:cs typeface="Calibri" pitchFamily="34" charset="-120"/>
-              </a:rPr>
-              <a:t>P1: Automated Model</a:t>
-            </a:r>
-            <a:endParaRPr lang="en-US" sz="1200" dirty="0"/>
-          </a:p>
-        </p:txBody>
-      </p:sp>
-      <p:sp>
-        <p:nvSpPr>
-          <p:cNvPr id="14" name="Text 12"/>
-          <p:cNvSpPr/>
-          <p:nvPr/>
-        </p:nvSpPr>
-        <p:spPr>
-          <a:xfrm>
-            <a:off x="3017520" y="2514600"/>
-            <a:ext cx="1371600" cy="320040"/>
-          </a:xfrm>
-          <a:prstGeom prst="rect">
-            <a:avLst/>
-          </a:prstGeom>
-          <a:noFill/>
-          <a:ln/>
-        </p:spPr>
-        <p:txBody>
-          <a:bodyPr wrap="square" lIns="0" tIns="0" rIns="0" bIns="0" rtlCol="0" anchor="ctr"/>
-          <a:lstStyle/>
-          <a:p>
-            <a:pPr indent="0" marL="0">
-              <a:buNone/>
-            </a:pPr>
-            <a:r>
-              <a:rPr lang="en-US" sz="1000" i="1" dirty="0">
-                <a:solidFill>
-                  <a:srgbClr val="718096"/>
-                </a:solidFill>
-                <a:latin typeface="Calibri" pitchFamily="34" charset="0"/>
-                <a:ea typeface="Calibri" pitchFamily="34" charset="-122"/>
-                <a:cs typeface="Calibri" pitchFamily="34" charset="-120"/>
-              </a:rPr>
-              <a:t>Q4 2026</a:t>
-            </a:r>
-            <a:endParaRPr lang="en-US" sz="1000" dirty="0"/>
-          </a:p>
-        </p:txBody>
+            <a:off x="4617720" y="1554480"/>
+            <a:ext cx="3291840" cy="457200"/>
+          </a:xfrm>
+          <a:prstGeom prst="rect">
+            <a:avLst/>
+          </a:prstGeom>
+          <a:noFill/>
+          <a:ln/>
+        </p:spPr>
+        <p:txBody>
+          <a:bodyPr wrap="square" lIns="0" tIns="0" rIns="0" bIns="0" rtlCol="0" anchor="ctr"/>
+          <a:lstStyle/>
+          <a:p>
+            <a:pPr indent="0" marL="0">
+              <a:buNone/>
+            </a:pPr>
+            <a:r>
+              <a:rPr lang="en-US" sz="1600" b="1" dirty="0">
+                <a:solidFill>
+                  <a:srgbClr val="1A2B4A"/>
+                </a:solidFill>
+                <a:latin typeface="Calibri" pitchFamily="34" charset="0"/>
+                <a:ea typeface="Calibri" pitchFamily="34" charset="-122"/>
+                <a:cs typeface="Calibri" pitchFamily="34" charset="-120"/>
+              </a:rPr>
+              <a:t>5 Pilot Accounts</a:t>
+            </a:r>
+            <a:endParaRPr lang="en-US" sz="1600" dirty="0"/>
+          </a:p>
+        </p:txBody>
+      </p:sp>
+      <p:sp>
+        <p:nvSpPr>
+          <p:cNvPr id="14" name="Shape 12"/>
+          <p:cNvSpPr/>
+          <p:nvPr/>
+        </p:nvSpPr>
+        <p:spPr>
+          <a:xfrm>
+            <a:off x="4617720" y="2103120"/>
+            <a:ext cx="3291840" cy="9144"/>
+          </a:xfrm>
+          <a:prstGeom prst="rect">
+            <a:avLst/>
+          </a:prstGeom>
+          <a:solidFill>
+            <a:srgbClr val="DDE4F0"/>
+          </a:solidFill>
+          <a:ln/>
+        </p:spPr>
       </p:sp>
       <p:sp>
         <p:nvSpPr>
@@ -8431,8 +10115,8 @@
         </p:nvSpPr>
         <p:spPr>
           <a:xfrm>
-            <a:off x="4572000" y="2514600"/>
-            <a:ext cx="3200400" cy="822960"/>
+            <a:off x="4617720" y="2240280"/>
+            <a:ext cx="3291840" cy="2103120"/>
           </a:xfrm>
           <a:prstGeom prst="rect">
             <a:avLst/>
@@ -8456,7 +10140,7 @@
                 <a:ea typeface="Calibri" pitchFamily="34" charset="-122"/>
                 <a:cs typeface="Calibri" pitchFamily="34" charset="-120"/>
               </a:rPr>
-              <a:t>Weekly refreshes, zero-touch data ingestion</a:t>
+              <a:t>Tableau dashboards, weekly QBRs</a:t>
             </a:r>
             <a:endParaRPr lang="en-US" sz="1100" dirty="0"/>
           </a:p>
@@ -8464,53 +10148,14 @@
       </p:sp>
       <p:sp>
         <p:nvSpPr>
-          <p:cNvPr id="16" name="Text 14"/>
-          <p:cNvSpPr/>
-          <p:nvPr/>
-        </p:nvSpPr>
-        <p:spPr>
-          <a:xfrm>
-            <a:off x="7955280" y="2514600"/>
-            <a:ext cx="3474720" cy="822960"/>
-          </a:xfrm>
-          <a:prstGeom prst="rect">
-            <a:avLst/>
-          </a:prstGeom>
-          <a:noFill/>
-          <a:ln/>
-        </p:spPr>
-        <p:txBody>
-          <a:bodyPr wrap="square" lIns="0" tIns="0" rIns="0" bIns="0" rtlCol="0" anchor="ctr"/>
-          <a:lstStyle/>
-          <a:p>
-            <a:pPr indent="0" marL="0">
-              <a:buNone/>
-            </a:pPr>
-            <a:r>
-              <a:rPr lang="en-US" sz="1100" b="1" dirty="0">
-                <a:solidFill>
-                  <a:srgbClr val="1A2B4A"/>
-                </a:solidFill>
-                <a:latin typeface="Calibri" pitchFamily="34" charset="0"/>
-                <a:ea typeface="Calibri" pitchFamily="34" charset="-122"/>
-                <a:cs typeface="Calibri" pitchFamily="34" charset="-120"/>
-              </a:rPr>
-              <a:t>$150–200K annual</a:t>
-            </a:r>
-            <a:endParaRPr lang="en-US" sz="1100" dirty="0"/>
-          </a:p>
-        </p:txBody>
-      </p:sp>
-      <p:sp>
-        <p:nvSpPr>
-          <p:cNvPr id="17" name="Shape 15"/>
-          <p:cNvSpPr/>
-          <p:nvPr/>
-        </p:nvSpPr>
-        <p:spPr>
-          <a:xfrm>
-            <a:off x="365760" y="3639312"/>
-            <a:ext cx="11430000" cy="1078992"/>
+          <p:cNvPr id="16" name="Shape 14"/>
+          <p:cNvSpPr/>
+          <p:nvPr/>
+        </p:nvSpPr>
+        <p:spPr>
+          <a:xfrm>
+            <a:off x="8503920" y="1097280"/>
+            <a:ext cx="3657600" cy="3657600"/>
           </a:xfrm>
           <a:prstGeom prst="rect">
             <a:avLst/>
@@ -8530,14 +10175,14 @@
       </p:sp>
       <p:sp>
         <p:nvSpPr>
-          <p:cNvPr id="18" name="Shape 16"/>
-          <p:cNvSpPr/>
-          <p:nvPr/>
-        </p:nvSpPr>
-        <p:spPr>
-          <a:xfrm>
-            <a:off x="365760" y="3639312"/>
-            <a:ext cx="73152" cy="1078992"/>
+          <p:cNvPr id="17" name="Shape 15"/>
+          <p:cNvSpPr/>
+          <p:nvPr/>
+        </p:nvSpPr>
+        <p:spPr>
+          <a:xfrm>
+            <a:off x="8503920" y="1097280"/>
+            <a:ext cx="3657600" cy="73152"/>
           </a:xfrm>
           <a:prstGeom prst="rect">
             <a:avLst/>
@@ -8550,81 +10195,101 @@
       </p:sp>
       <p:sp>
         <p:nvSpPr>
+          <p:cNvPr id="18" name="Text 16"/>
+          <p:cNvSpPr/>
+          <p:nvPr/>
+        </p:nvSpPr>
+        <p:spPr>
+          <a:xfrm>
+            <a:off x="8686800" y="1234440"/>
+            <a:ext cx="3291840" cy="274320"/>
+          </a:xfrm>
+          <a:prstGeom prst="rect">
+            <a:avLst/>
+          </a:prstGeom>
+          <a:noFill/>
+          <a:ln/>
+        </p:spPr>
+        <p:txBody>
+          <a:bodyPr wrap="square" lIns="0" tIns="0" rIns="0" bIns="0" rtlCol="0" anchor="ctr"/>
+          <a:lstStyle/>
+          <a:p>
+            <a:pPr indent="0" marL="0">
+              <a:buNone/>
+            </a:pPr>
+            <a:r>
+              <a:rPr lang="en-US" sz="1400" b="1" dirty="0">
+                <a:solidFill>
+                  <a:srgbClr val="1D8A5B"/>
+                </a:solidFill>
+                <a:latin typeface="Calibri" pitchFamily="34" charset="0"/>
+                <a:ea typeface="Calibri" pitchFamily="34" charset="-122"/>
+                <a:cs typeface="Calibri" pitchFamily="34" charset="-120"/>
+              </a:rPr>
+              <a:t>Q4 2026</a:t>
+            </a:r>
+            <a:endParaRPr lang="en-US" sz="1400" dirty="0"/>
+          </a:p>
+        </p:txBody>
+      </p:sp>
+      <p:sp>
+        <p:nvSpPr>
           <p:cNvPr id="19" name="Text 17"/>
           <p:cNvSpPr/>
           <p:nvPr/>
         </p:nvSpPr>
         <p:spPr>
           <a:xfrm>
-            <a:off x="594360" y="3685032"/>
-            <a:ext cx="2286000" cy="320040"/>
-          </a:xfrm>
-          <a:prstGeom prst="rect">
-            <a:avLst/>
-          </a:prstGeom>
-          <a:noFill/>
-          <a:ln/>
-        </p:spPr>
-        <p:txBody>
-          <a:bodyPr wrap="square" lIns="0" tIns="0" rIns="0" bIns="0" rtlCol="0" anchor="ctr"/>
-          <a:lstStyle/>
-          <a:p>
-            <a:pPr indent="0" marL="0">
-              <a:buNone/>
-            </a:pPr>
-            <a:r>
-              <a:rPr lang="en-US" sz="1200" b="1" dirty="0">
-                <a:solidFill>
-                  <a:srgbClr val="1D8A5B"/>
-                </a:solidFill>
-                <a:latin typeface="Calibri" pitchFamily="34" charset="0"/>
-                <a:ea typeface="Calibri" pitchFamily="34" charset="-122"/>
-                <a:cs typeface="Calibri" pitchFamily="34" charset="-120"/>
-              </a:rPr>
-              <a:t>P2: Native Dashboard</a:t>
-            </a:r>
-            <a:endParaRPr lang="en-US" sz="1200" dirty="0"/>
-          </a:p>
-        </p:txBody>
-      </p:sp>
-      <p:sp>
-        <p:nvSpPr>
-          <p:cNvPr id="20" name="Text 18"/>
-          <p:cNvSpPr/>
-          <p:nvPr/>
-        </p:nvSpPr>
-        <p:spPr>
-          <a:xfrm>
-            <a:off x="3017520" y="3685032"/>
-            <a:ext cx="1371600" cy="320040"/>
-          </a:xfrm>
-          <a:prstGeom prst="rect">
-            <a:avLst/>
-          </a:prstGeom>
-          <a:noFill/>
-          <a:ln/>
-        </p:spPr>
-        <p:txBody>
-          <a:bodyPr wrap="square" lIns="0" tIns="0" rIns="0" bIns="0" rtlCol="0" anchor="ctr"/>
-          <a:lstStyle/>
-          <a:p>
-            <a:pPr indent="0" marL="0">
-              <a:buNone/>
-            </a:pPr>
-            <a:r>
-              <a:rPr lang="en-US" sz="1000" i="1" dirty="0">
-                <a:solidFill>
-                  <a:srgbClr val="718096"/>
-                </a:solidFill>
-                <a:latin typeface="Calibri" pitchFamily="34" charset="0"/>
-                <a:ea typeface="Calibri" pitchFamily="34" charset="-122"/>
-                <a:cs typeface="Calibri" pitchFamily="34" charset="-120"/>
-              </a:rPr>
-              <a:t>Q1–Q2 2027</a:t>
-            </a:r>
-            <a:endParaRPr lang="en-US" sz="1000" dirty="0"/>
-          </a:p>
-        </p:txBody>
+            <a:off x="8686800" y="1554480"/>
+            <a:ext cx="3291840" cy="457200"/>
+          </a:xfrm>
+          <a:prstGeom prst="rect">
+            <a:avLst/>
+          </a:prstGeom>
+          <a:noFill/>
+          <a:ln/>
+        </p:spPr>
+        <p:txBody>
+          <a:bodyPr wrap="square" lIns="0" tIns="0" rIns="0" bIns="0" rtlCol="0" anchor="ctr"/>
+          <a:lstStyle/>
+          <a:p>
+            <a:pPr indent="0" marL="0">
+              <a:buNone/>
+            </a:pPr>
+            <a:r>
+              <a:rPr lang="en-US" sz="1600" b="1" dirty="0">
+                <a:solidFill>
+                  <a:srgbClr val="1A2B4A"/>
+                </a:solidFill>
+                <a:latin typeface="Calibri" pitchFamily="34" charset="0"/>
+                <a:ea typeface="Calibri" pitchFamily="34" charset="-122"/>
+                <a:cs typeface="Calibri" pitchFamily="34" charset="-120"/>
+              </a:rPr>
+              <a:t>Automated Model Run</a:t>
+            </a:r>
+            <a:endParaRPr lang="en-US" sz="1600" dirty="0"/>
+          </a:p>
+        </p:txBody>
+      </p:sp>
+      <p:sp>
+        <p:nvSpPr>
+          <p:cNvPr id="20" name="Shape 18"/>
+          <p:cNvSpPr/>
+          <p:nvPr/>
+        </p:nvSpPr>
+        <p:spPr>
+          <a:xfrm>
+            <a:off x="8686800" y="2103120"/>
+            <a:ext cx="3291840" cy="9144"/>
+          </a:xfrm>
+          <a:prstGeom prst="rect">
+            <a:avLst/>
+          </a:prstGeom>
+          <a:solidFill>
+            <a:srgbClr val="DDE4F0"/>
+          </a:solidFill>
+          <a:ln/>
+        </p:spPr>
       </p:sp>
       <p:sp>
         <p:nvSpPr>
@@ -8634,8 +10299,8 @@
         </p:nvSpPr>
         <p:spPr>
           <a:xfrm>
-            <a:off x="4572000" y="3685032"/>
-            <a:ext cx="3200400" cy="822960"/>
+            <a:off x="8686800" y="2240280"/>
+            <a:ext cx="3291840" cy="2103120"/>
           </a:xfrm>
           <a:prstGeom prst="rect">
             <a:avLst/>
@@ -8659,7 +10324,7 @@
                 <a:ea typeface="Calibri" pitchFamily="34" charset="-122"/>
                 <a:cs typeface="Calibri" pitchFamily="34" charset="-120"/>
               </a:rPr>
-              <a:t>Built-in Tableau + real-time shelf signals</a:t>
+              <a:t>Transition to product, scale to 20+ accounts</a:t>
             </a:r>
             <a:endParaRPr lang="en-US" sz="1100" dirty="0"/>
           </a:p>
@@ -8667,30 +10332,70 @@
       </p:sp>
       <p:sp>
         <p:nvSpPr>
-          <p:cNvPr id="22" name="Text 20"/>
-          <p:cNvSpPr/>
-          <p:nvPr/>
-        </p:nvSpPr>
-        <p:spPr>
-          <a:xfrm>
-            <a:off x="7955280" y="3685032"/>
-            <a:ext cx="3474720" cy="822960"/>
-          </a:xfrm>
-          <a:prstGeom prst="rect">
-            <a:avLst/>
-          </a:prstGeom>
-          <a:noFill/>
-          <a:ln/>
-        </p:spPr>
-        <p:txBody>
-          <a:bodyPr wrap="square" lIns="0" tIns="0" rIns="0" bIns="0" rtlCol="0" anchor="ctr"/>
-          <a:lstStyle/>
-          <a:p>
-            <a:pPr indent="0" marL="0">
-              <a:buNone/>
-            </a:pPr>
-            <a:r>
-              <a:rPr lang="en-US" sz="1100" b="1" dirty="0">
+          <p:cNvPr id="22" name="Shape 20"/>
+          <p:cNvSpPr/>
+          <p:nvPr/>
+        </p:nvSpPr>
+        <p:spPr>
+          <a:xfrm>
+            <a:off x="365760" y="5029200"/>
+            <a:ext cx="11430000" cy="1097280"/>
+          </a:xfrm>
+          <a:prstGeom prst="rect">
+            <a:avLst/>
+          </a:prstGeom>
+          <a:solidFill>
+            <a:srgbClr val="EBF1FB"/>
+          </a:solidFill>
+          <a:ln/>
+        </p:spPr>
+      </p:sp>
+      <p:sp>
+        <p:nvSpPr>
+          <p:cNvPr id="23" name="Shape 21"/>
+          <p:cNvSpPr/>
+          <p:nvPr/>
+        </p:nvSpPr>
+        <p:spPr>
+          <a:xfrm>
+            <a:off x="365760" y="5029200"/>
+            <a:ext cx="73152" cy="1097280"/>
+          </a:xfrm>
+          <a:prstGeom prst="rect">
+            <a:avLst/>
+          </a:prstGeom>
+          <a:solidFill>
+            <a:srgbClr val="2E5D9E"/>
+          </a:solidFill>
+          <a:ln/>
+        </p:spPr>
+      </p:sp>
+      <p:sp>
+        <p:nvSpPr>
+          <p:cNvPr id="24" name="Text 22"/>
+          <p:cNvSpPr/>
+          <p:nvPr/>
+        </p:nvSpPr>
+        <p:spPr>
+          <a:xfrm>
+            <a:off x="594360" y="5138928"/>
+            <a:ext cx="10972800" cy="914400"/>
+          </a:xfrm>
+          <a:prstGeom prst="rect">
+            <a:avLst/>
+          </a:prstGeom>
+          <a:noFill/>
+          <a:ln/>
+        </p:spPr>
+        <p:txBody>
+          <a:bodyPr wrap="square" lIns="0" tIns="0" rIns="0" bIns="0" rtlCol="0" anchor="ctr"/>
+          <a:lstStyle/>
+          <a:p>
+            <a:pPr indent="0" marL="0">
+              <a:buNone/>
+            </a:pPr>
+            <a:r>
+              <a:rPr lang="en-US" sz="1300" dirty="0">
                 <a:solidFill>
                   <a:srgbClr val="1A2B4A"/>
                 </a:solidFill>
@@ -8698,212 +10403,9 @@
                 <a:ea typeface="Calibri" pitchFamily="34" charset="-122"/>
                 <a:cs typeface="Calibri" pitchFamily="34" charset="-120"/>
               </a:rPr>
-              <a:t>$250–400K enterprise</a:t>
-            </a:r>
-            <a:endParaRPr lang="en-US" sz="1100" dirty="0"/>
-          </a:p>
-        </p:txBody>
-      </p:sp>
-      <p:sp>
-        <p:nvSpPr>
-          <p:cNvPr id="23" name="Shape 21"/>
-          <p:cNvSpPr/>
-          <p:nvPr/>
-        </p:nvSpPr>
-        <p:spPr>
-          <a:xfrm>
-            <a:off x="365760" y="4809744"/>
-            <a:ext cx="11430000" cy="1078992"/>
-          </a:xfrm>
-          <a:prstGeom prst="rect">
-            <a:avLst/>
-          </a:prstGeom>
-          <a:solidFill>
-            <a:srgbClr val="FFFFFF"/>
-          </a:solidFill>
-          <a:ln/>
-          <a:effectLst>
-            <a:outerShdw sx="100000" sy="100000" kx="0" ky="0" algn="bl" rotWithShape="0" blurRad="50800" dist="25400" dir="8100000">
-              <a:srgbClr val="000000">
-                <a:alpha val="8000"/>
-              </a:srgbClr>
-            </a:outerShdw>
-          </a:effectLst>
-        </p:spPr>
-      </p:sp>
-      <p:sp>
-        <p:nvSpPr>
-          <p:cNvPr id="24" name="Shape 22"/>
-          <p:cNvSpPr/>
-          <p:nvPr/>
-        </p:nvSpPr>
-        <p:spPr>
-          <a:xfrm>
-            <a:off x="365760" y="4809744"/>
-            <a:ext cx="73152" cy="1078992"/>
-          </a:xfrm>
-          <a:prstGeom prst="rect">
-            <a:avLst/>
-          </a:prstGeom>
-          <a:solidFill>
-            <a:srgbClr val="1D8A5B"/>
-          </a:solidFill>
-          <a:ln/>
-        </p:spPr>
-      </p:sp>
-      <p:sp>
-        <p:nvSpPr>
-          <p:cNvPr id="25" name="Text 23"/>
-          <p:cNvSpPr/>
-          <p:nvPr/>
-        </p:nvSpPr>
-        <p:spPr>
-          <a:xfrm>
-            <a:off x="594360" y="4855464"/>
-            <a:ext cx="2286000" cy="320040"/>
-          </a:xfrm>
-          <a:prstGeom prst="rect">
-            <a:avLst/>
-          </a:prstGeom>
-          <a:noFill/>
-          <a:ln/>
-        </p:spPr>
-        <p:txBody>
-          <a:bodyPr wrap="square" lIns="0" tIns="0" rIns="0" bIns="0" rtlCol="0" anchor="ctr"/>
-          <a:lstStyle/>
-          <a:p>
-            <a:pPr indent="0" marL="0">
-              <a:buNone/>
-            </a:pPr>
-            <a:r>
-              <a:rPr lang="en-US" sz="1200" b="1" dirty="0">
-                <a:solidFill>
-                  <a:srgbClr val="1D8A5B"/>
-                </a:solidFill>
-                <a:latin typeface="Calibri" pitchFamily="34" charset="0"/>
-                <a:ea typeface="Calibri" pitchFamily="34" charset="-122"/>
-                <a:cs typeface="Calibri" pitchFamily="34" charset="-120"/>
-              </a:rPr>
-              <a:t>P3: Reallocation Simulator</a:t>
-            </a:r>
-            <a:endParaRPr lang="en-US" sz="1200" dirty="0"/>
-          </a:p>
-        </p:txBody>
-      </p:sp>
-      <p:sp>
-        <p:nvSpPr>
-          <p:cNvPr id="26" name="Text 24"/>
-          <p:cNvSpPr/>
-          <p:nvPr/>
-        </p:nvSpPr>
-        <p:spPr>
-          <a:xfrm>
-            <a:off x="3017520" y="4855464"/>
-            <a:ext cx="1371600" cy="320040"/>
-          </a:xfrm>
-          <a:prstGeom prst="rect">
-            <a:avLst/>
-          </a:prstGeom>
-          <a:noFill/>
-          <a:ln/>
-        </p:spPr>
-        <p:txBody>
-          <a:bodyPr wrap="square" lIns="0" tIns="0" rIns="0" bIns="0" rtlCol="0" anchor="ctr"/>
-          <a:lstStyle/>
-          <a:p>
-            <a:pPr indent="0" marL="0">
-              <a:buNone/>
-            </a:pPr>
-            <a:r>
-              <a:rPr lang="en-US" sz="1000" i="1" dirty="0">
-                <a:solidFill>
-                  <a:srgbClr val="718096"/>
-                </a:solidFill>
-                <a:latin typeface="Calibri" pitchFamily="34" charset="0"/>
-                <a:ea typeface="Calibri" pitchFamily="34" charset="-122"/>
-                <a:cs typeface="Calibri" pitchFamily="34" charset="-120"/>
-              </a:rPr>
-              <a:t>2027+</a:t>
-            </a:r>
-            <a:endParaRPr lang="en-US" sz="1000" dirty="0"/>
-          </a:p>
-        </p:txBody>
-      </p:sp>
-      <p:sp>
-        <p:nvSpPr>
-          <p:cNvPr id="27" name="Text 25"/>
-          <p:cNvSpPr/>
-          <p:nvPr/>
-        </p:nvSpPr>
-        <p:spPr>
-          <a:xfrm>
-            <a:off x="4572000" y="4855464"/>
-            <a:ext cx="3200400" cy="822960"/>
-          </a:xfrm>
-          <a:prstGeom prst="rect">
-            <a:avLst/>
-          </a:prstGeom>
-          <a:noFill/>
-          <a:ln/>
-        </p:spPr>
-        <p:txBody>
-          <a:bodyPr wrap="square" lIns="0" tIns="0" rIns="0" bIns="0" rtlCol="0" anchor="ctr"/>
-          <a:lstStyle/>
-          <a:p>
-            <a:pPr indent="0" marL="0">
-              <a:buNone/>
-            </a:pPr>
-            <a:r>
-              <a:rPr lang="en-US" sz="1100" dirty="0">
-                <a:solidFill>
-                  <a:srgbClr val="4A5568"/>
-                </a:solidFill>
-                <a:latin typeface="Calibri" pitchFamily="34" charset="0"/>
-                <a:ea typeface="Calibri" pitchFamily="34" charset="-122"/>
-                <a:cs typeface="Calibri" pitchFamily="34" charset="-120"/>
-              </a:rPr>
-              <a:t>What-if spend/content/shelf changes</a:t>
-            </a:r>
-            <a:endParaRPr lang="en-US" sz="1100" dirty="0"/>
-          </a:p>
-        </p:txBody>
-      </p:sp>
-      <p:sp>
-        <p:nvSpPr>
-          <p:cNvPr id="28" name="Text 26"/>
-          <p:cNvSpPr/>
-          <p:nvPr/>
-        </p:nvSpPr>
-        <p:spPr>
-          <a:xfrm>
-            <a:off x="7955280" y="4855464"/>
-            <a:ext cx="3474720" cy="822960"/>
-          </a:xfrm>
-          <a:prstGeom prst="rect">
-            <a:avLst/>
-          </a:prstGeom>
-          <a:noFill/>
-          <a:ln/>
-        </p:spPr>
-        <p:txBody>
-          <a:bodyPr wrap="square" lIns="0" tIns="0" rIns="0" bIns="0" rtlCol="0" anchor="ctr"/>
-          <a:lstStyle/>
-          <a:p>
-            <a:pPr indent="0" marL="0">
-              <a:buNone/>
-            </a:pPr>
-            <a:r>
-              <a:rPr lang="en-US" sz="1100" b="1" dirty="0">
-                <a:solidFill>
-                  <a:srgbClr val="1A2B4A"/>
-                </a:solidFill>
-                <a:latin typeface="Calibri" pitchFamily="34" charset="0"/>
-                <a:ea typeface="Calibri" pitchFamily="34" charset="-122"/>
-                <a:cs typeface="Calibri" pitchFamily="34" charset="-120"/>
-              </a:rPr>
-              <a:t>Net-new upsell motion</a:t>
-            </a:r>
-            <a:endParaRPr lang="en-US" sz="1100" dirty="0"/>
+              <a:t>ICP: RGM personas at CPG brands ($500M+ revenue, active on Walmart). Lead with Lactalis success case; deliver PoC via Tableau before productization.</a:t>
+            </a:r>
+            <a:endParaRPr lang="en-US" sz="1300" dirty="0"/>
           </a:p>
         </p:txBody>
       </p:sp>
@@ -8992,7 +10494,7 @@
                 <a:ea typeface="Calibri" pitchFamily="34" charset="-122"/>
                 <a:cs typeface="Calibri" pitchFamily="34" charset="-120"/>
               </a:rPr>
-              <a:t>Risk Register &amp; Mitigations</a:t>
+              <a:t>Four-Phase Productization (P0→P3)</a:t>
             </a:r>
             <a:endParaRPr lang="en-US" sz="2400" dirty="0"/>
           </a:p>
@@ -9027,7 +10529,7 @@
         <p:spPr>
           <a:xfrm>
             <a:off x="365760" y="1298448"/>
-            <a:ext cx="11430000" cy="1051560"/>
+            <a:ext cx="11430000" cy="1078992"/>
           </a:xfrm>
           <a:prstGeom prst="rect">
             <a:avLst/>
@@ -9054,13 +10556,13 @@
         <p:spPr>
           <a:xfrm>
             <a:off x="365760" y="1298448"/>
-            <a:ext cx="73152" cy="1051560"/>
-          </a:xfrm>
-          <a:prstGeom prst="rect">
-            <a:avLst/>
-          </a:prstGeom>
-          <a:solidFill>
-            <a:srgbClr val="C0392B"/>
+            <a:ext cx="73152" cy="1078992"/>
+          </a:xfrm>
+          <a:prstGeom prst="rect">
+            <a:avLst/>
+          </a:prstGeom>
+          <a:solidFill>
+            <a:srgbClr val="2E5D9E"/>
           </a:solidFill>
           <a:ln/>
         </p:spPr>
@@ -9074,7 +10576,7 @@
         <p:spPr>
           <a:xfrm>
             <a:off x="594360" y="1344168"/>
-            <a:ext cx="3657600" cy="320040"/>
+            <a:ext cx="2286000" cy="320040"/>
           </a:xfrm>
           <a:prstGeom prst="rect">
             <a:avLst/>
@@ -9092,111 +10594,130 @@
             <a:r>
               <a:rPr lang="en-US" sz="1200" b="1" dirty="0">
                 <a:solidFill>
+                  <a:srgbClr val="2E5D9E"/>
+                </a:solidFill>
+                <a:latin typeface="Calibri" pitchFamily="34" charset="0"/>
+                <a:ea typeface="Calibri" pitchFamily="34" charset="-122"/>
+                <a:cs typeface="Calibri" pitchFamily="34" charset="-120"/>
+              </a:rPr>
+              <a:t>P0: Services-Led</a:t>
+            </a:r>
+            <a:endParaRPr lang="en-US" sz="1200" dirty="0"/>
+          </a:p>
+        </p:txBody>
+      </p:sp>
+      <p:sp>
+        <p:nvSpPr>
+          <p:cNvPr id="8" name="Text 6"/>
+          <p:cNvSpPr/>
+          <p:nvPr/>
+        </p:nvSpPr>
+        <p:spPr>
+          <a:xfrm>
+            <a:off x="3017520" y="1344168"/>
+            <a:ext cx="1371600" cy="320040"/>
+          </a:xfrm>
+          <a:prstGeom prst="rect">
+            <a:avLst/>
+          </a:prstGeom>
+          <a:noFill/>
+          <a:ln/>
+        </p:spPr>
+        <p:txBody>
+          <a:bodyPr wrap="square" lIns="0" tIns="0" rIns="0" bIns="0" rtlCol="0" anchor="ctr"/>
+          <a:lstStyle/>
+          <a:p>
+            <a:pPr indent="0" marL="0">
+              <a:buNone/>
+            </a:pPr>
+            <a:r>
+              <a:rPr lang="en-US" sz="1000" i="1" dirty="0">
+                <a:solidFill>
+                  <a:srgbClr val="718096"/>
+                </a:solidFill>
+                <a:latin typeface="Calibri" pitchFamily="34" charset="0"/>
+                <a:ea typeface="Calibri" pitchFamily="34" charset="-122"/>
+                <a:cs typeface="Calibri" pitchFamily="34" charset="-120"/>
+              </a:rPr>
+              <a:t>Now–Q3</a:t>
+            </a:r>
+            <a:endParaRPr lang="en-US" sz="1000" dirty="0"/>
+          </a:p>
+        </p:txBody>
+      </p:sp>
+      <p:sp>
+        <p:nvSpPr>
+          <p:cNvPr id="9" name="Text 7"/>
+          <p:cNvSpPr/>
+          <p:nvPr/>
+        </p:nvSpPr>
+        <p:spPr>
+          <a:xfrm>
+            <a:off x="4572000" y="1344168"/>
+            <a:ext cx="3200400" cy="822960"/>
+          </a:xfrm>
+          <a:prstGeom prst="rect">
+            <a:avLst/>
+          </a:prstGeom>
+          <a:noFill/>
+          <a:ln/>
+        </p:spPr>
+        <p:txBody>
+          <a:bodyPr wrap="square" lIns="0" tIns="0" rIns="0" bIns="0" rtlCol="0" anchor="ctr"/>
+          <a:lstStyle/>
+          <a:p>
+            <a:pPr indent="0" marL="0">
+              <a:buNone/>
+            </a:pPr>
+            <a:r>
+              <a:rPr lang="en-US" sz="1100" dirty="0">
+                <a:solidFill>
+                  <a:srgbClr val="4A5568"/>
+                </a:solidFill>
+                <a:latin typeface="Calibri" pitchFamily="34" charset="0"/>
+                <a:ea typeface="Calibri" pitchFamily="34" charset="-122"/>
+                <a:cs typeface="Calibri" pitchFamily="34" charset="-120"/>
+              </a:rPr>
+              <a:t>Lactalis PoC + fast-follower betas</a:t>
+            </a:r>
+            <a:endParaRPr lang="en-US" sz="1100" dirty="0"/>
+          </a:p>
+        </p:txBody>
+      </p:sp>
+      <p:sp>
+        <p:nvSpPr>
+          <p:cNvPr id="10" name="Text 8"/>
+          <p:cNvSpPr/>
+          <p:nvPr/>
+        </p:nvSpPr>
+        <p:spPr>
+          <a:xfrm>
+            <a:off x="7955280" y="1344168"/>
+            <a:ext cx="3474720" cy="822960"/>
+          </a:xfrm>
+          <a:prstGeom prst="rect">
+            <a:avLst/>
+          </a:prstGeom>
+          <a:noFill/>
+          <a:ln/>
+        </p:spPr>
+        <p:txBody>
+          <a:bodyPr wrap="square" lIns="0" tIns="0" rIns="0" bIns="0" rtlCol="0" anchor="ctr"/>
+          <a:lstStyle/>
+          <a:p>
+            <a:pPr indent="0" marL="0">
+              <a:buNone/>
+            </a:pPr>
+            <a:r>
+              <a:rPr lang="en-US" sz="1100" b="1" dirty="0">
+                <a:solidFill>
                   <a:srgbClr val="1A2B4A"/>
                 </a:solidFill>
                 <a:latin typeface="Calibri" pitchFamily="34" charset="0"/>
                 <a:ea typeface="Calibri" pitchFamily="34" charset="-122"/>
                 <a:cs typeface="Calibri" pitchFamily="34" charset="-120"/>
               </a:rPr>
-              <a:t>Data Security / Privacy</a:t>
-            </a:r>
-            <a:endParaRPr lang="en-US" sz="1200" dirty="0"/>
-          </a:p>
-        </p:txBody>
-      </p:sp>
-      <p:sp>
-        <p:nvSpPr>
-          <p:cNvPr id="8" name="Shape 6"/>
-          <p:cNvSpPr/>
-          <p:nvPr/>
-        </p:nvSpPr>
-        <p:spPr>
-          <a:xfrm>
-            <a:off x="4480560" y="1371600"/>
-            <a:ext cx="1005840" cy="274320"/>
-          </a:xfrm>
-          <a:prstGeom prst="rect">
-            <a:avLst/>
-          </a:prstGeom>
-          <a:solidFill>
-            <a:srgbClr val="C0392B"/>
-          </a:solidFill>
-          <a:ln/>
-        </p:spPr>
-      </p:sp>
-      <p:sp>
-        <p:nvSpPr>
-          <p:cNvPr id="9" name="Text 7"/>
-          <p:cNvSpPr/>
-          <p:nvPr/>
-        </p:nvSpPr>
-        <p:spPr>
-          <a:xfrm>
-            <a:off x="4480560" y="1371600"/>
-            <a:ext cx="1005840" cy="274320"/>
-          </a:xfrm>
-          <a:prstGeom prst="rect">
-            <a:avLst/>
-          </a:prstGeom>
-          <a:noFill/>
-          <a:ln/>
-        </p:spPr>
-        <p:txBody>
-          <a:bodyPr wrap="square" lIns="0" tIns="0" rIns="0" bIns="0" rtlCol="0" anchor="ctr"/>
-          <a:lstStyle/>
-          <a:p>
-            <a:pPr algn="ctr" indent="0" marL="0">
-              <a:buNone/>
-            </a:pPr>
-            <a:r>
-              <a:rPr lang="en-US" sz="1000" b="1" dirty="0">
-                <a:solidFill>
-                  <a:srgbClr val="FFFFFF"/>
-                </a:solidFill>
-                <a:latin typeface="Calibri" pitchFamily="34" charset="0"/>
-                <a:ea typeface="Calibri" pitchFamily="34" charset="-122"/>
-                <a:cs typeface="Calibri" pitchFamily="34" charset="-120"/>
-              </a:rPr>
-              <a:t>HIGH</a:t>
-            </a:r>
-            <a:endParaRPr lang="en-US" sz="1000" dirty="0"/>
-          </a:p>
-        </p:txBody>
-      </p:sp>
-      <p:sp>
-        <p:nvSpPr>
-          <p:cNvPr id="10" name="Text 8"/>
-          <p:cNvSpPr/>
-          <p:nvPr/>
-        </p:nvSpPr>
-        <p:spPr>
-          <a:xfrm>
-            <a:off x="5669280" y="1344168"/>
-            <a:ext cx="6126480" cy="914400"/>
-          </a:xfrm>
-          <a:prstGeom prst="rect">
-            <a:avLst/>
-          </a:prstGeom>
-          <a:noFill/>
-          <a:ln/>
-        </p:spPr>
-        <p:txBody>
-          <a:bodyPr wrap="square" lIns="0" tIns="0" rIns="0" bIns="0" rtlCol="0" anchor="ctr"/>
-          <a:lstStyle/>
-          <a:p>
-            <a:pPr indent="0" marL="0">
-              <a:buNone/>
-            </a:pPr>
-            <a:r>
-              <a:rPr lang="en-US" sz="1100" dirty="0">
-                <a:solidFill>
-                  <a:srgbClr val="4A5568"/>
-                </a:solidFill>
-                <a:latin typeface="Calibri" pitchFamily="34" charset="0"/>
-                <a:ea typeface="Calibri" pitchFamily="34" charset="-122"/>
-                <a:cs typeface="Calibri" pitchFamily="34" charset="-120"/>
-              </a:rPr>
-              <a:t>SOC 2 Type II certification; Walmart data governance review</a:t>
+              <a:t>$50–75K per PoC</a:t>
             </a:r>
             <a:endParaRPr lang="en-US" sz="1100" dirty="0"/>
           </a:p>
@@ -9210,8 +10731,8 @@
         </p:nvSpPr>
         <p:spPr>
           <a:xfrm>
-            <a:off x="365760" y="2441448"/>
-            <a:ext cx="11430000" cy="1051560"/>
+            <a:off x="365760" y="2468880"/>
+            <a:ext cx="11430000" cy="1078992"/>
           </a:xfrm>
           <a:prstGeom prst="rect">
             <a:avLst/>
@@ -9237,14 +10758,14 @@
         </p:nvSpPr>
         <p:spPr>
           <a:xfrm>
-            <a:off x="365760" y="2441448"/>
-            <a:ext cx="73152" cy="1051560"/>
-          </a:xfrm>
-          <a:prstGeom prst="rect">
-            <a:avLst/>
-          </a:prstGeom>
-          <a:solidFill>
-            <a:srgbClr val="D48B14"/>
+            <a:off x="365760" y="2468880"/>
+            <a:ext cx="73152" cy="1078992"/>
+          </a:xfrm>
+          <a:prstGeom prst="rect">
+            <a:avLst/>
+          </a:prstGeom>
+          <a:solidFill>
+            <a:srgbClr val="E8612C"/>
           </a:solidFill>
           <a:ln/>
         </p:spPr>
@@ -9257,8 +10778,8 @@
         </p:nvSpPr>
         <p:spPr>
           <a:xfrm>
-            <a:off x="594360" y="2487168"/>
-            <a:ext cx="3657600" cy="320040"/>
+            <a:off x="594360" y="2514600"/>
+            <a:ext cx="2286000" cy="320040"/>
           </a:xfrm>
           <a:prstGeom prst="rect">
             <a:avLst/>
@@ -9276,111 +10797,130 @@
             <a:r>
               <a:rPr lang="en-US" sz="1200" b="1" dirty="0">
                 <a:solidFill>
+                  <a:srgbClr val="E8612C"/>
+                </a:solidFill>
+                <a:latin typeface="Calibri" pitchFamily="34" charset="0"/>
+                <a:ea typeface="Calibri" pitchFamily="34" charset="-122"/>
+                <a:cs typeface="Calibri" pitchFamily="34" charset="-120"/>
+              </a:rPr>
+              <a:t>P1: Automated Model</a:t>
+            </a:r>
+            <a:endParaRPr lang="en-US" sz="1200" dirty="0"/>
+          </a:p>
+        </p:txBody>
+      </p:sp>
+      <p:sp>
+        <p:nvSpPr>
+          <p:cNvPr id="14" name="Text 12"/>
+          <p:cNvSpPr/>
+          <p:nvPr/>
+        </p:nvSpPr>
+        <p:spPr>
+          <a:xfrm>
+            <a:off x="3017520" y="2514600"/>
+            <a:ext cx="1371600" cy="320040"/>
+          </a:xfrm>
+          <a:prstGeom prst="rect">
+            <a:avLst/>
+          </a:prstGeom>
+          <a:noFill/>
+          <a:ln/>
+        </p:spPr>
+        <p:txBody>
+          <a:bodyPr wrap="square" lIns="0" tIns="0" rIns="0" bIns="0" rtlCol="0" anchor="ctr"/>
+          <a:lstStyle/>
+          <a:p>
+            <a:pPr indent="0" marL="0">
+              <a:buNone/>
+            </a:pPr>
+            <a:r>
+              <a:rPr lang="en-US" sz="1000" i="1" dirty="0">
+                <a:solidFill>
+                  <a:srgbClr val="718096"/>
+                </a:solidFill>
+                <a:latin typeface="Calibri" pitchFamily="34" charset="0"/>
+                <a:ea typeface="Calibri" pitchFamily="34" charset="-122"/>
+                <a:cs typeface="Calibri" pitchFamily="34" charset="-120"/>
+              </a:rPr>
+              <a:t>Q4 2026</a:t>
+            </a:r>
+            <a:endParaRPr lang="en-US" sz="1000" dirty="0"/>
+          </a:p>
+        </p:txBody>
+      </p:sp>
+      <p:sp>
+        <p:nvSpPr>
+          <p:cNvPr id="15" name="Text 13"/>
+          <p:cNvSpPr/>
+          <p:nvPr/>
+        </p:nvSpPr>
+        <p:spPr>
+          <a:xfrm>
+            <a:off x="4572000" y="2514600"/>
+            <a:ext cx="3200400" cy="822960"/>
+          </a:xfrm>
+          <a:prstGeom prst="rect">
+            <a:avLst/>
+          </a:prstGeom>
+          <a:noFill/>
+          <a:ln/>
+        </p:spPr>
+        <p:txBody>
+          <a:bodyPr wrap="square" lIns="0" tIns="0" rIns="0" bIns="0" rtlCol="0" anchor="ctr"/>
+          <a:lstStyle/>
+          <a:p>
+            <a:pPr indent="0" marL="0">
+              <a:buNone/>
+            </a:pPr>
+            <a:r>
+              <a:rPr lang="en-US" sz="1100" dirty="0">
+                <a:solidFill>
+                  <a:srgbClr val="4A5568"/>
+                </a:solidFill>
+                <a:latin typeface="Calibri" pitchFamily="34" charset="0"/>
+                <a:ea typeface="Calibri" pitchFamily="34" charset="-122"/>
+                <a:cs typeface="Calibri" pitchFamily="34" charset="-120"/>
+              </a:rPr>
+              <a:t>Weekly refreshes, zero-touch data ingestion</a:t>
+            </a:r>
+            <a:endParaRPr lang="en-US" sz="1100" dirty="0"/>
+          </a:p>
+        </p:txBody>
+      </p:sp>
+      <p:sp>
+        <p:nvSpPr>
+          <p:cNvPr id="16" name="Text 14"/>
+          <p:cNvSpPr/>
+          <p:nvPr/>
+        </p:nvSpPr>
+        <p:spPr>
+          <a:xfrm>
+            <a:off x="7955280" y="2514600"/>
+            <a:ext cx="3474720" cy="822960"/>
+          </a:xfrm>
+          <a:prstGeom prst="rect">
+            <a:avLst/>
+          </a:prstGeom>
+          <a:noFill/>
+          <a:ln/>
+        </p:spPr>
+        <p:txBody>
+          <a:bodyPr wrap="square" lIns="0" tIns="0" rIns="0" bIns="0" rtlCol="0" anchor="ctr"/>
+          <a:lstStyle/>
+          <a:p>
+            <a:pPr indent="0" marL="0">
+              <a:buNone/>
+            </a:pPr>
+            <a:r>
+              <a:rPr lang="en-US" sz="1100" b="1" dirty="0">
+                <a:solidFill>
                   <a:srgbClr val="1A2B4A"/>
                 </a:solidFill>
                 <a:latin typeface="Calibri" pitchFamily="34" charset="0"/>
                 <a:ea typeface="Calibri" pitchFamily="34" charset="-122"/>
                 <a:cs typeface="Calibri" pitchFamily="34" charset="-120"/>
               </a:rPr>
-              <a:t>Walmart API Changes</a:t>
-            </a:r>
-            <a:endParaRPr lang="en-US" sz="1200" dirty="0"/>
-          </a:p>
-        </p:txBody>
-      </p:sp>
-      <p:sp>
-        <p:nvSpPr>
-          <p:cNvPr id="14" name="Shape 12"/>
-          <p:cNvSpPr/>
-          <p:nvPr/>
-        </p:nvSpPr>
-        <p:spPr>
-          <a:xfrm>
-            <a:off x="4480560" y="2514600"/>
-            <a:ext cx="1005840" cy="274320"/>
-          </a:xfrm>
-          <a:prstGeom prst="rect">
-            <a:avLst/>
-          </a:prstGeom>
-          <a:solidFill>
-            <a:srgbClr val="D48B14"/>
-          </a:solidFill>
-          <a:ln/>
-        </p:spPr>
-      </p:sp>
-      <p:sp>
-        <p:nvSpPr>
-          <p:cNvPr id="15" name="Text 13"/>
-          <p:cNvSpPr/>
-          <p:nvPr/>
-        </p:nvSpPr>
-        <p:spPr>
-          <a:xfrm>
-            <a:off x="4480560" y="2514600"/>
-            <a:ext cx="1005840" cy="274320"/>
-          </a:xfrm>
-          <a:prstGeom prst="rect">
-            <a:avLst/>
-          </a:prstGeom>
-          <a:noFill/>
-          <a:ln/>
-        </p:spPr>
-        <p:txBody>
-          <a:bodyPr wrap="square" lIns="0" tIns="0" rIns="0" bIns="0" rtlCol="0" anchor="ctr"/>
-          <a:lstStyle/>
-          <a:p>
-            <a:pPr algn="ctr" indent="0" marL="0">
-              <a:buNone/>
-            </a:pPr>
-            <a:r>
-              <a:rPr lang="en-US" sz="1000" b="1" dirty="0">
-                <a:solidFill>
-                  <a:srgbClr val="FFFFFF"/>
-                </a:solidFill>
-                <a:latin typeface="Calibri" pitchFamily="34" charset="0"/>
-                <a:ea typeface="Calibri" pitchFamily="34" charset="-122"/>
-                <a:cs typeface="Calibri" pitchFamily="34" charset="-120"/>
-              </a:rPr>
-              <a:t>MEDIUM</a:t>
-            </a:r>
-            <a:endParaRPr lang="en-US" sz="1000" dirty="0"/>
-          </a:p>
-        </p:txBody>
-      </p:sp>
-      <p:sp>
-        <p:nvSpPr>
-          <p:cNvPr id="16" name="Text 14"/>
-          <p:cNvSpPr/>
-          <p:nvPr/>
-        </p:nvSpPr>
-        <p:spPr>
-          <a:xfrm>
-            <a:off x="5669280" y="2487168"/>
-            <a:ext cx="6126480" cy="914400"/>
-          </a:xfrm>
-          <a:prstGeom prst="rect">
-            <a:avLst/>
-          </a:prstGeom>
-          <a:noFill/>
-          <a:ln/>
-        </p:spPr>
-        <p:txBody>
-          <a:bodyPr wrap="square" lIns="0" tIns="0" rIns="0" bIns="0" rtlCol="0" anchor="ctr"/>
-          <a:lstStyle/>
-          <a:p>
-            <a:pPr indent="0" marL="0">
-              <a:buNone/>
-            </a:pPr>
-            <a:r>
-              <a:rPr lang="en-US" sz="1100" dirty="0">
-                <a:solidFill>
-                  <a:srgbClr val="4A5568"/>
-                </a:solidFill>
-                <a:latin typeface="Calibri" pitchFamily="34" charset="0"/>
-                <a:ea typeface="Calibri" pitchFamily="34" charset="-122"/>
-                <a:cs typeface="Calibri" pitchFamily="34" charset="-120"/>
-              </a:rPr>
-              <a:t>Leverage Incremental.com's official API partnership</a:t>
+              <a:t>$150–200K annual</a:t>
             </a:r>
             <a:endParaRPr lang="en-US" sz="1100" dirty="0"/>
           </a:p>
@@ -9394,8 +10934,8 @@
         </p:nvSpPr>
         <p:spPr>
           <a:xfrm>
-            <a:off x="365760" y="3584448"/>
-            <a:ext cx="11430000" cy="1051560"/>
+            <a:off x="365760" y="3639312"/>
+            <a:ext cx="11430000" cy="1078992"/>
           </a:xfrm>
           <a:prstGeom prst="rect">
             <a:avLst/>
@@ -9421,14 +10961,14 @@
         </p:nvSpPr>
         <p:spPr>
           <a:xfrm>
-            <a:off x="365760" y="3584448"/>
-            <a:ext cx="73152" cy="1051560"/>
-          </a:xfrm>
-          <a:prstGeom prst="rect">
-            <a:avLst/>
-          </a:prstGeom>
-          <a:solidFill>
-            <a:srgbClr val="D48B14"/>
+            <a:off x="365760" y="3639312"/>
+            <a:ext cx="73152" cy="1078992"/>
+          </a:xfrm>
+          <a:prstGeom prst="rect">
+            <a:avLst/>
+          </a:prstGeom>
+          <a:solidFill>
+            <a:srgbClr val="1D8A5B"/>
           </a:solidFill>
           <a:ln/>
         </p:spPr>
@@ -9441,8 +10981,8 @@
         </p:nvSpPr>
         <p:spPr>
           <a:xfrm>
-            <a:off x="594360" y="3630168"/>
-            <a:ext cx="3657600" cy="320040"/>
+            <a:off x="594360" y="3685032"/>
+            <a:ext cx="2286000" cy="320040"/>
           </a:xfrm>
           <a:prstGeom prst="rect">
             <a:avLst/>
@@ -9460,111 +11000,130 @@
             <a:r>
               <a:rPr lang="en-US" sz="1200" b="1" dirty="0">
                 <a:solidFill>
+                  <a:srgbClr val="1D8A5B"/>
+                </a:solidFill>
+                <a:latin typeface="Calibri" pitchFamily="34" charset="0"/>
+                <a:ea typeface="Calibri" pitchFamily="34" charset="-122"/>
+                <a:cs typeface="Calibri" pitchFamily="34" charset="-120"/>
+              </a:rPr>
+              <a:t>P2: Native Dashboard</a:t>
+            </a:r>
+            <a:endParaRPr lang="en-US" sz="1200" dirty="0"/>
+          </a:p>
+        </p:txBody>
+      </p:sp>
+      <p:sp>
+        <p:nvSpPr>
+          <p:cNvPr id="20" name="Text 18"/>
+          <p:cNvSpPr/>
+          <p:nvPr/>
+        </p:nvSpPr>
+        <p:spPr>
+          <a:xfrm>
+            <a:off x="3017520" y="3685032"/>
+            <a:ext cx="1371600" cy="320040"/>
+          </a:xfrm>
+          <a:prstGeom prst="rect">
+            <a:avLst/>
+          </a:prstGeom>
+          <a:noFill/>
+          <a:ln/>
+        </p:spPr>
+        <p:txBody>
+          <a:bodyPr wrap="square" lIns="0" tIns="0" rIns="0" bIns="0" rtlCol="0" anchor="ctr"/>
+          <a:lstStyle/>
+          <a:p>
+            <a:pPr indent="0" marL="0">
+              <a:buNone/>
+            </a:pPr>
+            <a:r>
+              <a:rPr lang="en-US" sz="1000" i="1" dirty="0">
+                <a:solidFill>
+                  <a:srgbClr val="718096"/>
+                </a:solidFill>
+                <a:latin typeface="Calibri" pitchFamily="34" charset="0"/>
+                <a:ea typeface="Calibri" pitchFamily="34" charset="-122"/>
+                <a:cs typeface="Calibri" pitchFamily="34" charset="-120"/>
+              </a:rPr>
+              <a:t>Q1–Q2 2027</a:t>
+            </a:r>
+            <a:endParaRPr lang="en-US" sz="1000" dirty="0"/>
+          </a:p>
+        </p:txBody>
+      </p:sp>
+      <p:sp>
+        <p:nvSpPr>
+          <p:cNvPr id="21" name="Text 19"/>
+          <p:cNvSpPr/>
+          <p:nvPr/>
+        </p:nvSpPr>
+        <p:spPr>
+          <a:xfrm>
+            <a:off x="4572000" y="3685032"/>
+            <a:ext cx="3200400" cy="822960"/>
+          </a:xfrm>
+          <a:prstGeom prst="rect">
+            <a:avLst/>
+          </a:prstGeom>
+          <a:noFill/>
+          <a:ln/>
+        </p:spPr>
+        <p:txBody>
+          <a:bodyPr wrap="square" lIns="0" tIns="0" rIns="0" bIns="0" rtlCol="0" anchor="ctr"/>
+          <a:lstStyle/>
+          <a:p>
+            <a:pPr indent="0" marL="0">
+              <a:buNone/>
+            </a:pPr>
+            <a:r>
+              <a:rPr lang="en-US" sz="1100" dirty="0">
+                <a:solidFill>
+                  <a:srgbClr val="4A5568"/>
+                </a:solidFill>
+                <a:latin typeface="Calibri" pitchFamily="34" charset="0"/>
+                <a:ea typeface="Calibri" pitchFamily="34" charset="-122"/>
+                <a:cs typeface="Calibri" pitchFamily="34" charset="-120"/>
+              </a:rPr>
+              <a:t>Built-in Tableau + real-time shelf signals</a:t>
+            </a:r>
+            <a:endParaRPr lang="en-US" sz="1100" dirty="0"/>
+          </a:p>
+        </p:txBody>
+      </p:sp>
+      <p:sp>
+        <p:nvSpPr>
+          <p:cNvPr id="22" name="Text 20"/>
+          <p:cNvSpPr/>
+          <p:nvPr/>
+        </p:nvSpPr>
+        <p:spPr>
+          <a:xfrm>
+            <a:off x="7955280" y="3685032"/>
+            <a:ext cx="3474720" cy="822960"/>
+          </a:xfrm>
+          <a:prstGeom prst="rect">
+            <a:avLst/>
+          </a:prstGeom>
+          <a:noFill/>
+          <a:ln/>
+        </p:spPr>
+        <p:txBody>
+          <a:bodyPr wrap="square" lIns="0" tIns="0" rIns="0" bIns="0" rtlCol="0" anchor="ctr"/>
+          <a:lstStyle/>
+          <a:p>
+            <a:pPr indent="0" marL="0">
+              <a:buNone/>
+            </a:pPr>
+            <a:r>
+              <a:rPr lang="en-US" sz="1100" b="1" dirty="0">
+                <a:solidFill>
                   <a:srgbClr val="1A2B4A"/>
                 </a:solidFill>
                 <a:latin typeface="Calibri" pitchFamily="34" charset="0"/>
                 <a:ea typeface="Calibri" pitchFamily="34" charset="-122"/>
                 <a:cs typeface="Calibri" pitchFamily="34" charset="-120"/>
               </a:rPr>
-              <a:t>Brand Buy-in on Methodology</a:t>
-            </a:r>
-            <a:endParaRPr lang="en-US" sz="1200" dirty="0"/>
-          </a:p>
-        </p:txBody>
-      </p:sp>
-      <p:sp>
-        <p:nvSpPr>
-          <p:cNvPr id="20" name="Shape 18"/>
-          <p:cNvSpPr/>
-          <p:nvPr/>
-        </p:nvSpPr>
-        <p:spPr>
-          <a:xfrm>
-            <a:off x="4480560" y="3657600"/>
-            <a:ext cx="1005840" cy="274320"/>
-          </a:xfrm>
-          <a:prstGeom prst="rect">
-            <a:avLst/>
-          </a:prstGeom>
-          <a:solidFill>
-            <a:srgbClr val="D48B14"/>
-          </a:solidFill>
-          <a:ln/>
-        </p:spPr>
-      </p:sp>
-      <p:sp>
-        <p:nvSpPr>
-          <p:cNvPr id="21" name="Text 19"/>
-          <p:cNvSpPr/>
-          <p:nvPr/>
-        </p:nvSpPr>
-        <p:spPr>
-          <a:xfrm>
-            <a:off x="4480560" y="3657600"/>
-            <a:ext cx="1005840" cy="274320"/>
-          </a:xfrm>
-          <a:prstGeom prst="rect">
-            <a:avLst/>
-          </a:prstGeom>
-          <a:noFill/>
-          <a:ln/>
-        </p:spPr>
-        <p:txBody>
-          <a:bodyPr wrap="square" lIns="0" tIns="0" rIns="0" bIns="0" rtlCol="0" anchor="ctr"/>
-          <a:lstStyle/>
-          <a:p>
-            <a:pPr algn="ctr" indent="0" marL="0">
-              <a:buNone/>
-            </a:pPr>
-            <a:r>
-              <a:rPr lang="en-US" sz="1000" b="1" dirty="0">
-                <a:solidFill>
-                  <a:srgbClr val="FFFFFF"/>
-                </a:solidFill>
-                <a:latin typeface="Calibri" pitchFamily="34" charset="0"/>
-                <a:ea typeface="Calibri" pitchFamily="34" charset="-122"/>
-                <a:cs typeface="Calibri" pitchFamily="34" charset="-120"/>
-              </a:rPr>
-              <a:t>MEDIUM</a:t>
-            </a:r>
-            <a:endParaRPr lang="en-US" sz="1000" dirty="0"/>
-          </a:p>
-        </p:txBody>
-      </p:sp>
-      <p:sp>
-        <p:nvSpPr>
-          <p:cNvPr id="22" name="Text 20"/>
-          <p:cNvSpPr/>
-          <p:nvPr/>
-        </p:nvSpPr>
-        <p:spPr>
-          <a:xfrm>
-            <a:off x="5669280" y="3630168"/>
-            <a:ext cx="6126480" cy="914400"/>
-          </a:xfrm>
-          <a:prstGeom prst="rect">
-            <a:avLst/>
-          </a:prstGeom>
-          <a:noFill/>
-          <a:ln/>
-        </p:spPr>
-        <p:txBody>
-          <a:bodyPr wrap="square" lIns="0" tIns="0" rIns="0" bIns="0" rtlCol="0" anchor="ctr"/>
-          <a:lstStyle/>
-          <a:p>
-            <a:pPr indent="0" marL="0">
-              <a:buNone/>
-            </a:pPr>
-            <a:r>
-              <a:rPr lang="en-US" sz="1100" dirty="0">
-                <a:solidFill>
-                  <a:srgbClr val="4A5568"/>
-                </a:solidFill>
-                <a:latin typeface="Calibri" pitchFamily="34" charset="0"/>
-                <a:ea typeface="Calibri" pitchFamily="34" charset="-122"/>
-                <a:cs typeface="Calibri" pitchFamily="34" charset="-120"/>
-              </a:rPr>
-              <a:t>Lactalis case study + peer references by Q3</a:t>
+              <a:t>$250–400K enterprise</a:t>
             </a:r>
             <a:endParaRPr lang="en-US" sz="1100" dirty="0"/>
           </a:p>
@@ -9578,8 +11137,8 @@
         </p:nvSpPr>
         <p:spPr>
           <a:xfrm>
-            <a:off x="365760" y="4727448"/>
-            <a:ext cx="11430000" cy="1051560"/>
+            <a:off x="365760" y="4809744"/>
+            <a:ext cx="11430000" cy="1078992"/>
           </a:xfrm>
           <a:prstGeom prst="rect">
             <a:avLst/>
@@ -9605,14 +11164,14 @@
         </p:nvSpPr>
         <p:spPr>
           <a:xfrm>
-            <a:off x="365760" y="4727448"/>
-            <a:ext cx="73152" cy="1051560"/>
-          </a:xfrm>
-          <a:prstGeom prst="rect">
-            <a:avLst/>
-          </a:prstGeom>
-          <a:solidFill>
-            <a:srgbClr val="D48B14"/>
+            <a:off x="365760" y="4809744"/>
+            <a:ext cx="73152" cy="1078992"/>
+          </a:xfrm>
+          <a:prstGeom prst="rect">
+            <a:avLst/>
+          </a:prstGeom>
+          <a:solidFill>
+            <a:srgbClr val="1D8A5B"/>
           </a:solidFill>
           <a:ln/>
         </p:spPr>
@@ -9625,8 +11184,8 @@
         </p:nvSpPr>
         <p:spPr>
           <a:xfrm>
-            <a:off x="594360" y="4773168"/>
-            <a:ext cx="3657600" cy="320040"/>
+            <a:off x="594360" y="4855464"/>
+            <a:ext cx="2286000" cy="320040"/>
           </a:xfrm>
           <a:prstGeom prst="rect">
             <a:avLst/>
@@ -9644,111 +11203,130 @@
             <a:r>
               <a:rPr lang="en-US" sz="1200" b="1" dirty="0">
                 <a:solidFill>
+                  <a:srgbClr val="1D8A5B"/>
+                </a:solidFill>
+                <a:latin typeface="Calibri" pitchFamily="34" charset="0"/>
+                <a:ea typeface="Calibri" pitchFamily="34" charset="-122"/>
+                <a:cs typeface="Calibri" pitchFamily="34" charset="-120"/>
+              </a:rPr>
+              <a:t>P3: Reallocation Simulator</a:t>
+            </a:r>
+            <a:endParaRPr lang="en-US" sz="1200" dirty="0"/>
+          </a:p>
+        </p:txBody>
+      </p:sp>
+      <p:sp>
+        <p:nvSpPr>
+          <p:cNvPr id="26" name="Text 24"/>
+          <p:cNvSpPr/>
+          <p:nvPr/>
+        </p:nvSpPr>
+        <p:spPr>
+          <a:xfrm>
+            <a:off x="3017520" y="4855464"/>
+            <a:ext cx="1371600" cy="320040"/>
+          </a:xfrm>
+          <a:prstGeom prst="rect">
+            <a:avLst/>
+          </a:prstGeom>
+          <a:noFill/>
+          <a:ln/>
+        </p:spPr>
+        <p:txBody>
+          <a:bodyPr wrap="square" lIns="0" tIns="0" rIns="0" bIns="0" rtlCol="0" anchor="ctr"/>
+          <a:lstStyle/>
+          <a:p>
+            <a:pPr indent="0" marL="0">
+              <a:buNone/>
+            </a:pPr>
+            <a:r>
+              <a:rPr lang="en-US" sz="1000" i="1" dirty="0">
+                <a:solidFill>
+                  <a:srgbClr val="718096"/>
+                </a:solidFill>
+                <a:latin typeface="Calibri" pitchFamily="34" charset="0"/>
+                <a:ea typeface="Calibri" pitchFamily="34" charset="-122"/>
+                <a:cs typeface="Calibri" pitchFamily="34" charset="-120"/>
+              </a:rPr>
+              <a:t>2027+</a:t>
+            </a:r>
+            <a:endParaRPr lang="en-US" sz="1000" dirty="0"/>
+          </a:p>
+        </p:txBody>
+      </p:sp>
+      <p:sp>
+        <p:nvSpPr>
+          <p:cNvPr id="27" name="Text 25"/>
+          <p:cNvSpPr/>
+          <p:nvPr/>
+        </p:nvSpPr>
+        <p:spPr>
+          <a:xfrm>
+            <a:off x="4572000" y="4855464"/>
+            <a:ext cx="3200400" cy="822960"/>
+          </a:xfrm>
+          <a:prstGeom prst="rect">
+            <a:avLst/>
+          </a:prstGeom>
+          <a:noFill/>
+          <a:ln/>
+        </p:spPr>
+        <p:txBody>
+          <a:bodyPr wrap="square" lIns="0" tIns="0" rIns="0" bIns="0" rtlCol="0" anchor="ctr"/>
+          <a:lstStyle/>
+          <a:p>
+            <a:pPr indent="0" marL="0">
+              <a:buNone/>
+            </a:pPr>
+            <a:r>
+              <a:rPr lang="en-US" sz="1100" dirty="0">
+                <a:solidFill>
+                  <a:srgbClr val="4A5568"/>
+                </a:solidFill>
+                <a:latin typeface="Calibri" pitchFamily="34" charset="0"/>
+                <a:ea typeface="Calibri" pitchFamily="34" charset="-122"/>
+                <a:cs typeface="Calibri" pitchFamily="34" charset="-120"/>
+              </a:rPr>
+              <a:t>What-if spend/content/shelf changes</a:t>
+            </a:r>
+            <a:endParaRPr lang="en-US" sz="1100" dirty="0"/>
+          </a:p>
+        </p:txBody>
+      </p:sp>
+      <p:sp>
+        <p:nvSpPr>
+          <p:cNvPr id="28" name="Text 26"/>
+          <p:cNvSpPr/>
+          <p:nvPr/>
+        </p:nvSpPr>
+        <p:spPr>
+          <a:xfrm>
+            <a:off x="7955280" y="4855464"/>
+            <a:ext cx="3474720" cy="822960"/>
+          </a:xfrm>
+          <a:prstGeom prst="rect">
+            <a:avLst/>
+          </a:prstGeom>
+          <a:noFill/>
+          <a:ln/>
+        </p:spPr>
+        <p:txBody>
+          <a:bodyPr wrap="square" lIns="0" tIns="0" rIns="0" bIns="0" rtlCol="0" anchor="ctr"/>
+          <a:lstStyle/>
+          <a:p>
+            <a:pPr indent="0" marL="0">
+              <a:buNone/>
+            </a:pPr>
+            <a:r>
+              <a:rPr lang="en-US" sz="1100" b="1" dirty="0">
+                <a:solidFill>
                   <a:srgbClr val="1A2B4A"/>
                 </a:solidFill>
                 <a:latin typeface="Calibri" pitchFamily="34" charset="0"/>
                 <a:ea typeface="Calibri" pitchFamily="34" charset="-122"/>
                 <a:cs typeface="Calibri" pitchFamily="34" charset="-120"/>
               </a:rPr>
-              <a:t>Productization Timeline Slip</a:t>
-            </a:r>
-            <a:endParaRPr lang="en-US" sz="1200" dirty="0"/>
-          </a:p>
-        </p:txBody>
-      </p:sp>
-      <p:sp>
-        <p:nvSpPr>
-          <p:cNvPr id="26" name="Shape 24"/>
-          <p:cNvSpPr/>
-          <p:nvPr/>
-        </p:nvSpPr>
-        <p:spPr>
-          <a:xfrm>
-            <a:off x="4480560" y="4800600"/>
-            <a:ext cx="1005840" cy="274320"/>
-          </a:xfrm>
-          <a:prstGeom prst="rect">
-            <a:avLst/>
-          </a:prstGeom>
-          <a:solidFill>
-            <a:srgbClr val="D48B14"/>
-          </a:solidFill>
-          <a:ln/>
-        </p:spPr>
-      </p:sp>
-      <p:sp>
-        <p:nvSpPr>
-          <p:cNvPr id="27" name="Text 25"/>
-          <p:cNvSpPr/>
-          <p:nvPr/>
-        </p:nvSpPr>
-        <p:spPr>
-          <a:xfrm>
-            <a:off x="4480560" y="4800600"/>
-            <a:ext cx="1005840" cy="274320"/>
-          </a:xfrm>
-          <a:prstGeom prst="rect">
-            <a:avLst/>
-          </a:prstGeom>
-          <a:noFill/>
-          <a:ln/>
-        </p:spPr>
-        <p:txBody>
-          <a:bodyPr wrap="square" lIns="0" tIns="0" rIns="0" bIns="0" rtlCol="0" anchor="ctr"/>
-          <a:lstStyle/>
-          <a:p>
-            <a:pPr algn="ctr" indent="0" marL="0">
-              <a:buNone/>
-            </a:pPr>
-            <a:r>
-              <a:rPr lang="en-US" sz="1000" b="1" dirty="0">
-                <a:solidFill>
-                  <a:srgbClr val="FFFFFF"/>
-                </a:solidFill>
-                <a:latin typeface="Calibri" pitchFamily="34" charset="0"/>
-                <a:ea typeface="Calibri" pitchFamily="34" charset="-122"/>
-                <a:cs typeface="Calibri" pitchFamily="34" charset="-120"/>
-              </a:rPr>
-              <a:t>MEDIUM</a:t>
-            </a:r>
-            <a:endParaRPr lang="en-US" sz="1000" dirty="0"/>
-          </a:p>
-        </p:txBody>
-      </p:sp>
-      <p:sp>
-        <p:nvSpPr>
-          <p:cNvPr id="28" name="Text 26"/>
-          <p:cNvSpPr/>
-          <p:nvPr/>
-        </p:nvSpPr>
-        <p:spPr>
-          <a:xfrm>
-            <a:off x="5669280" y="4773168"/>
-            <a:ext cx="6126480" cy="914400"/>
-          </a:xfrm>
-          <a:prstGeom prst="rect">
-            <a:avLst/>
-          </a:prstGeom>
-          <a:noFill/>
-          <a:ln/>
-        </p:spPr>
-        <p:txBody>
-          <a:bodyPr wrap="square" lIns="0" tIns="0" rIns="0" bIns="0" rtlCol="0" anchor="ctr"/>
-          <a:lstStyle/>
-          <a:p>
-            <a:pPr indent="0" marL="0">
-              <a:buNone/>
-            </a:pPr>
-            <a:r>
-              <a:rPr lang="en-US" sz="1100" dirty="0">
-                <a:solidFill>
-                  <a:srgbClr val="4A5568"/>
-                </a:solidFill>
-                <a:latin typeface="Calibri" pitchFamily="34" charset="0"/>
-                <a:ea typeface="Calibri" pitchFamily="34" charset="-122"/>
-                <a:cs typeface="Calibri" pitchFamily="34" charset="-120"/>
-              </a:rPr>
-              <a:t>Fallback: extend Tableau services model</a:t>
+              <a:t>Net-new upsell motion</a:t>
             </a:r>
             <a:endParaRPr lang="en-US" sz="1100" dirty="0"/>
           </a:p>
